--- a/protected-downloads/praesentation/M19.pptx
+++ b/protected-downloads/praesentation/M19.pptx
@@ -10,14 +10,14 @@
     <p:sldId id="258" r:id="rId9"/>
     <p:sldId id="259" r:id="rId10"/>
     <p:sldId id="260" r:id="rId11"/>
-    <p:sldId id="261" r:id="rId12"/>
-    <p:sldId id="262" r:id="rId13"/>
-    <p:sldId id="263" r:id="rId14"/>
-    <p:sldId id="264" r:id="rId15"/>
-    <p:sldId id="265" r:id="rId16"/>
-    <p:sldId id="266" r:id="rId17"/>
-    <p:sldId id="267" r:id="rId18"/>
-    <p:sldId id="268" r:id="rId19"/>
+    <p:sldId id="261" r:id="rId13"/>
+    <p:sldId id="262" r:id="rId14"/>
+    <p:sldId id="263" r:id="rId15"/>
+    <p:sldId id="264" r:id="rId16"/>
+    <p:sldId id="265" r:id="rId17"/>
+    <p:sldId id="266" r:id="rId18"/>
+    <p:sldId id="267" r:id="rId19"/>
+    <p:sldId id="268" r:id="rId20"/>
   </p:sldIdLst>
   <p:sldSz cx="12188952" cy="6858000" type="screen4x3"/>
   <p:notesSz cx="6858000" cy="9144000"/>
@@ -117,6 +117,986 @@
     </a:lvl9pPr>
   </p:defaultTextStyle>
 </p:presentation>
+</file>
+
+<file path=ppt/notesMasters/notesMaster1.xml><?xml version="1.0" encoding="utf-8"?>
+<p:notesMaster xmlns:a="http://schemas.openxmlformats.org/drawingml/2006/main" xmlns:p="http://schemas.openxmlformats.org/presentationml/2006/main" xmlns:r="http://schemas.openxmlformats.org/officeDocument/2006/relationships">
+  <p:cSld>
+    <p:bg>
+      <p:bgRef idx="1001">
+        <a:schemeClr val="bg1"/>
+      </p:bgRef>
+    </p:bg>
+    <p:spTree>
+      <p:nvGrpSpPr>
+        <p:cNvPr id="1" name=""/>
+        <p:cNvGrpSpPr/>
+        <p:nvPr/>
+      </p:nvGrpSpPr>
+      <p:grpSpPr>
+        <a:xfrm>
+          <a:off x="0" y="0"/>
+          <a:ext cx="0" cy="0"/>
+          <a:chOff x="0" y="0"/>
+          <a:chExt cx="0" cy="0"/>
+        </a:xfrm>
+      </p:grpSpPr>
+      <p:sp>
+        <p:nvSpPr>
+          <p:cNvPr id="2" name="Header Placeholder 1"/>
+          <p:cNvSpPr>
+            <a:spLocks noGrp="1"/>
+          </p:cNvSpPr>
+          <p:nvPr>
+            <p:ph type="hdr" sz="quarter"/>
+          </p:nvPr>
+        </p:nvSpPr>
+        <p:spPr>
+          <a:xfrm>
+            <a:off x="0" y="0"/>
+            <a:ext cx="2971800" cy="457200"/>
+          </a:xfrm>
+          <a:prstGeom prst="rect">
+            <a:avLst/>
+          </a:prstGeom>
+        </p:spPr>
+        <p:txBody>
+          <a:bodyPr vert="horz" lIns="91440" tIns="45720" rIns="91440" bIns="45720" rtlCol="0"/>
+          <a:lstStyle>
+            <a:lvl1pPr algn="l">
+              <a:defRPr sz="1200"/>
+            </a:lvl1pPr>
+          </a:lstStyle>
+          <a:p>
+            <a:endParaRPr lang="en-US"/>
+          </a:p>
+        </p:txBody>
+      </p:sp>
+      <p:sp>
+        <p:nvSpPr>
+          <p:cNvPr id="3" name="Date Placeholder 2"/>
+          <p:cNvSpPr>
+            <a:spLocks noGrp="1"/>
+          </p:cNvSpPr>
+          <p:nvPr>
+            <p:ph type="dt" idx="1"/>
+          </p:nvPr>
+        </p:nvSpPr>
+        <p:spPr>
+          <a:xfrm>
+            <a:off x="3884613" y="0"/>
+            <a:ext cx="2971800" cy="457200"/>
+          </a:xfrm>
+          <a:prstGeom prst="rect">
+            <a:avLst/>
+          </a:prstGeom>
+        </p:spPr>
+        <p:txBody>
+          <a:bodyPr vert="horz" lIns="91440" tIns="45720" rIns="91440" bIns="45720" rtlCol="0"/>
+          <a:lstStyle>
+            <a:lvl1pPr algn="r">
+              <a:defRPr sz="1200"/>
+            </a:lvl1pPr>
+          </a:lstStyle>
+          <a:p>
+            <a:fld id="{0F89C1C7-3DCD-1040-A9CF-14679D8B5DDD}" type="datetimeFigureOut">
+              <a:rPr lang="en-US" smtClean="0"/>
+              <a:t>10/17/16</a:t>
+            </a:fld>
+            <a:endParaRPr lang="en-US"/>
+          </a:p>
+        </p:txBody>
+      </p:sp>
+      <p:sp>
+        <p:nvSpPr>
+          <p:cNvPr id="4" name="Slide Image Placeholder 3"/>
+          <p:cNvSpPr>
+            <a:spLocks noGrp="1" noRot="1" noChangeAspect="1"/>
+          </p:cNvSpPr>
+          <p:nvPr>
+            <p:ph type="sldImg" idx="2"/>
+          </p:nvPr>
+        </p:nvSpPr>
+        <p:spPr>
+          <a:xfrm>
+            <a:off x="1143000" y="685800"/>
+            <a:ext cx="4572000" cy="3429000"/>
+          </a:xfrm>
+          <a:prstGeom prst="rect">
+            <a:avLst/>
+          </a:prstGeom>
+          <a:noFill/>
+          <a:ln w="12700">
+            <a:solidFill>
+              <a:prstClr val="black"/>
+            </a:solidFill>
+          </a:ln>
+        </p:spPr>
+        <p:txBody>
+          <a:bodyPr vert="horz" lIns="91440" tIns="45720" rIns="91440" bIns="45720" rtlCol="0" anchor="ctr"/>
+          <a:lstStyle/>
+          <a:p>
+            <a:endParaRPr lang="en-US"/>
+          </a:p>
+        </p:txBody>
+      </p:sp>
+      <p:sp>
+        <p:nvSpPr>
+          <p:cNvPr id="5" name="Notes Placeholder 4"/>
+          <p:cNvSpPr>
+            <a:spLocks noGrp="1"/>
+          </p:cNvSpPr>
+          <p:nvPr>
+            <p:ph type="body" sz="quarter" idx="3"/>
+          </p:nvPr>
+        </p:nvSpPr>
+        <p:spPr>
+          <a:xfrm>
+            <a:off x="685800" y="4343400"/>
+            <a:ext cx="5486400" cy="4114800"/>
+          </a:xfrm>
+          <a:prstGeom prst="rect">
+            <a:avLst/>
+          </a:prstGeom>
+        </p:spPr>
+        <p:txBody>
+          <a:bodyPr vert="horz" lIns="91440" tIns="45720" rIns="91440" bIns="45720" rtlCol="0"/>
+          <a:lstStyle/>
+          <a:p>
+            <a:pPr lvl="0"/>
+            <a:r>
+              <a:rPr lang="en-US" smtClean="0"/>
+              <a:t>Click to edit Master text styles</a:t>
+            </a:r>
+          </a:p>
+          <a:p>
+            <a:pPr lvl="1"/>
+            <a:r>
+              <a:rPr lang="en-US" smtClean="0"/>
+              <a:t>Second level</a:t>
+            </a:r>
+          </a:p>
+          <a:p>
+            <a:pPr lvl="2"/>
+            <a:r>
+              <a:rPr lang="en-US" smtClean="0"/>
+              <a:t>Third level</a:t>
+            </a:r>
+          </a:p>
+          <a:p>
+            <a:pPr lvl="3"/>
+            <a:r>
+              <a:rPr lang="en-US" smtClean="0"/>
+              <a:t>Fourth level</a:t>
+            </a:r>
+          </a:p>
+          <a:p>
+            <a:pPr lvl="4"/>
+            <a:r>
+              <a:rPr lang="en-US" smtClean="0"/>
+              <a:t>Fifth level</a:t>
+            </a:r>
+            <a:endParaRPr lang="en-US"/>
+          </a:p>
+        </p:txBody>
+      </p:sp>
+      <p:sp>
+        <p:nvSpPr>
+          <p:cNvPr id="6" name="Footer Placeholder 5"/>
+          <p:cNvSpPr>
+            <a:spLocks noGrp="1"/>
+          </p:cNvSpPr>
+          <p:nvPr>
+            <p:ph type="ftr" sz="quarter" idx="4"/>
+          </p:nvPr>
+        </p:nvSpPr>
+        <p:spPr>
+          <a:xfrm>
+            <a:off x="0" y="8685213"/>
+            <a:ext cx="2971800" cy="457200"/>
+          </a:xfrm>
+          <a:prstGeom prst="rect">
+            <a:avLst/>
+          </a:prstGeom>
+        </p:spPr>
+        <p:txBody>
+          <a:bodyPr vert="horz" lIns="91440" tIns="45720" rIns="91440" bIns="45720" rtlCol="0" anchor="b"/>
+          <a:lstStyle>
+            <a:lvl1pPr algn="l">
+              <a:defRPr sz="1200"/>
+            </a:lvl1pPr>
+          </a:lstStyle>
+          <a:p>
+            <a:endParaRPr lang="en-US"/>
+          </a:p>
+        </p:txBody>
+      </p:sp>
+      <p:sp>
+        <p:nvSpPr>
+          <p:cNvPr id="7" name="Slide Number Placeholder 6"/>
+          <p:cNvSpPr>
+            <a:spLocks noGrp="1"/>
+          </p:cNvSpPr>
+          <p:nvPr>
+            <p:ph type="sldNum" sz="quarter" idx="5"/>
+          </p:nvPr>
+        </p:nvSpPr>
+        <p:spPr>
+          <a:xfrm>
+            <a:off x="3884613" y="8685213"/>
+            <a:ext cx="2971800" cy="457200"/>
+          </a:xfrm>
+          <a:prstGeom prst="rect">
+            <a:avLst/>
+          </a:prstGeom>
+        </p:spPr>
+        <p:txBody>
+          <a:bodyPr vert="horz" lIns="91440" tIns="45720" rIns="91440" bIns="45720" rtlCol="0" anchor="b"/>
+          <a:lstStyle>
+            <a:lvl1pPr algn="r">
+              <a:defRPr sz="1200"/>
+            </a:lvl1pPr>
+          </a:lstStyle>
+          <a:p>
+            <a:fld id="{BB5E49A5-4136-284D-997B-48E1D791AD67}" type="slidenum">
+              <a:rPr lang="en-US" smtClean="0"/>
+              <a:t>‹#›</a:t>
+            </a:fld>
+            <a:endParaRPr lang="en-US"/>
+          </a:p>
+        </p:txBody>
+      </p:sp>
+    </p:spTree>
+    <p:extLst>
+      <p:ext uri="{BB962C8B-B14F-4D97-AF65-F5344CB8AC3E}">
+        <p14:creationId xmlns:p14="http://schemas.microsoft.com/office/powerpoint/2010/main" val="2623252185"/>
+      </p:ext>
+    </p:extLst>
+  </p:cSld>
+  <p:clrMap bg1="lt1" tx1="dk1" bg2="lt2" tx2="dk2" accent1="accent1" accent2="accent2" accent3="accent3" accent4="accent4" accent5="accent5" accent6="accent6" hlink="hlink" folHlink="folHlink"/>
+  <p:notesStyle>
+    <a:lvl1pPr marL="0" algn="l" defTabSz="457200" rtl="0" eaLnBrk="1" latinLnBrk="0" hangingPunct="1">
+      <a:defRPr sz="1200" kern="1200">
+        <a:solidFill>
+          <a:schemeClr val="tx1"/>
+        </a:solidFill>
+        <a:latin typeface="+mn-lt"/>
+        <a:ea typeface="+mn-ea"/>
+        <a:cs typeface="+mn-cs"/>
+      </a:defRPr>
+    </a:lvl1pPr>
+    <a:lvl2pPr marL="457200" algn="l" defTabSz="457200" rtl="0" eaLnBrk="1" latinLnBrk="0" hangingPunct="1">
+      <a:defRPr sz="1200" kern="1200">
+        <a:solidFill>
+          <a:schemeClr val="tx1"/>
+        </a:solidFill>
+        <a:latin typeface="+mn-lt"/>
+        <a:ea typeface="+mn-ea"/>
+        <a:cs typeface="+mn-cs"/>
+      </a:defRPr>
+    </a:lvl2pPr>
+    <a:lvl3pPr marL="914400" algn="l" defTabSz="457200" rtl="0" eaLnBrk="1" latinLnBrk="0" hangingPunct="1">
+      <a:defRPr sz="1200" kern="1200">
+        <a:solidFill>
+          <a:schemeClr val="tx1"/>
+        </a:solidFill>
+        <a:latin typeface="+mn-lt"/>
+        <a:ea typeface="+mn-ea"/>
+        <a:cs typeface="+mn-cs"/>
+      </a:defRPr>
+    </a:lvl3pPr>
+    <a:lvl4pPr marL="1371600" algn="l" defTabSz="457200" rtl="0" eaLnBrk="1" latinLnBrk="0" hangingPunct="1">
+      <a:defRPr sz="1200" kern="1200">
+        <a:solidFill>
+          <a:schemeClr val="tx1"/>
+        </a:solidFill>
+        <a:latin typeface="+mn-lt"/>
+        <a:ea typeface="+mn-ea"/>
+        <a:cs typeface="+mn-cs"/>
+      </a:defRPr>
+    </a:lvl4pPr>
+    <a:lvl5pPr marL="1828800" algn="l" defTabSz="457200" rtl="0" eaLnBrk="1" latinLnBrk="0" hangingPunct="1">
+      <a:defRPr sz="1200" kern="1200">
+        <a:solidFill>
+          <a:schemeClr val="tx1"/>
+        </a:solidFill>
+        <a:latin typeface="+mn-lt"/>
+        <a:ea typeface="+mn-ea"/>
+        <a:cs typeface="+mn-cs"/>
+      </a:defRPr>
+    </a:lvl5pPr>
+    <a:lvl6pPr marL="2286000" algn="l" defTabSz="457200" rtl="0" eaLnBrk="1" latinLnBrk="0" hangingPunct="1">
+      <a:defRPr sz="1200" kern="1200">
+        <a:solidFill>
+          <a:schemeClr val="tx1"/>
+        </a:solidFill>
+        <a:latin typeface="+mn-lt"/>
+        <a:ea typeface="+mn-ea"/>
+        <a:cs typeface="+mn-cs"/>
+      </a:defRPr>
+    </a:lvl6pPr>
+    <a:lvl7pPr marL="2743200" algn="l" defTabSz="457200" rtl="0" eaLnBrk="1" latinLnBrk="0" hangingPunct="1">
+      <a:defRPr sz="1200" kern="1200">
+        <a:solidFill>
+          <a:schemeClr val="tx1"/>
+        </a:solidFill>
+        <a:latin typeface="+mn-lt"/>
+        <a:ea typeface="+mn-ea"/>
+        <a:cs typeface="+mn-cs"/>
+      </a:defRPr>
+    </a:lvl7pPr>
+    <a:lvl8pPr marL="3200400" algn="l" defTabSz="457200" rtl="0" eaLnBrk="1" latinLnBrk="0" hangingPunct="1">
+      <a:defRPr sz="1200" kern="1200">
+        <a:solidFill>
+          <a:schemeClr val="tx1"/>
+        </a:solidFill>
+        <a:latin typeface="+mn-lt"/>
+        <a:ea typeface="+mn-ea"/>
+        <a:cs typeface="+mn-cs"/>
+      </a:defRPr>
+    </a:lvl8pPr>
+    <a:lvl9pPr marL="3657600" algn="l" defTabSz="457200" rtl="0" eaLnBrk="1" latinLnBrk="0" hangingPunct="1">
+      <a:defRPr sz="1200" kern="1200">
+        <a:solidFill>
+          <a:schemeClr val="tx1"/>
+        </a:solidFill>
+        <a:latin typeface="+mn-lt"/>
+        <a:ea typeface="+mn-ea"/>
+        <a:cs typeface="+mn-cs"/>
+      </a:defRPr>
+    </a:lvl9pPr>
+  </p:notesStyle>
+</p:notesMaster>
+</file>
+
+<file path=ppt/notesSlides/notesSlide1.xml><?xml version="1.0" encoding="utf-8"?>
+<p:notes xmlns:a="http://schemas.openxmlformats.org/drawingml/2006/main" xmlns:p="http://schemas.openxmlformats.org/presentationml/2006/main" xmlns:r="http://schemas.openxmlformats.org/officeDocument/2006/relationships">
+  <p:cSld>
+    <p:spTree>
+      <p:nvGrpSpPr>
+        <p:cNvPr id="1" name=""/>
+        <p:cNvGrpSpPr/>
+        <p:nvPr/>
+      </p:nvGrpSpPr>
+      <p:grpSpPr>
+        <a:xfrm>
+          <a:off x="0" y="0"/>
+          <a:ext cx="0" cy="0"/>
+          <a:chOff x="0" y="0"/>
+          <a:chExt cx="0" cy="0"/>
+        </a:xfrm>
+      </p:grpSpPr>
+      <p:sp>
+        <p:nvSpPr>
+          <p:cNvPr id="2" name="Slide Image Placeholder 1"/>
+          <p:cNvSpPr>
+            <a:spLocks noGrp="1"/>
+          </p:cNvSpPr>
+          <p:nvPr>
+            <p:ph type="sldImg" idx="2"/>
+          </p:nvPr>
+        </p:nvSpPr>
+        <p:spPr/>
+      </p:sp>
+      <p:sp>
+        <p:nvSpPr>
+          <p:cNvPr id="3" name="Notes Placeholder 2"/>
+          <p:cNvSpPr>
+            <a:spLocks noGrp="1"/>
+          </p:cNvSpPr>
+          <p:nvPr>
+            <p:ph type="body" idx="3" sz="quarter"/>
+          </p:nvPr>
+        </p:nvSpPr>
+        <p:spPr/>
+        <p:txBody>
+          <a:bodyPr/>
+          <a:lstStyle/>
+          <a:p>
+            <a:r>
+              <a:t>Siehe Trainerhandbuch (Sektion 3) für Moderationshinweise, Timing und erwartete Teilnehmerreaktionen.</a:t>
+            </a:r>
+          </a:p>
+        </p:txBody>
+      </p:sp>
+      <p:sp>
+        <p:nvSpPr>
+          <p:cNvPr id="4" name="Slide Number Placeholder 3"/>
+          <p:cNvSpPr>
+            <a:spLocks noGrp="1"/>
+          </p:cNvSpPr>
+          <p:nvPr>
+            <p:ph type="sldNum" idx="5" sz="quarter"/>
+          </p:nvPr>
+        </p:nvSpPr>
+        <p:spPr/>
+      </p:sp>
+    </p:spTree>
+  </p:cSld>
+  <p:clrMapOvr>
+    <a:masterClrMapping/>
+  </p:clrMapOvr>
+</p:notes>
+</file>
+
+<file path=ppt/notesSlides/notesSlide2.xml><?xml version="1.0" encoding="utf-8"?>
+<p:notes xmlns:a="http://schemas.openxmlformats.org/drawingml/2006/main" xmlns:p="http://schemas.openxmlformats.org/presentationml/2006/main" xmlns:r="http://schemas.openxmlformats.org/officeDocument/2006/relationships">
+  <p:cSld>
+    <p:spTree>
+      <p:nvGrpSpPr>
+        <p:cNvPr id="1" name=""/>
+        <p:cNvGrpSpPr/>
+        <p:nvPr/>
+      </p:nvGrpSpPr>
+      <p:grpSpPr>
+        <a:xfrm>
+          <a:off x="0" y="0"/>
+          <a:ext cx="0" cy="0"/>
+          <a:chOff x="0" y="0"/>
+          <a:chExt cx="0" cy="0"/>
+        </a:xfrm>
+      </p:grpSpPr>
+      <p:sp>
+        <p:nvSpPr>
+          <p:cNvPr id="2" name="Slide Image Placeholder 1"/>
+          <p:cNvSpPr>
+            <a:spLocks noGrp="1"/>
+          </p:cNvSpPr>
+          <p:nvPr>
+            <p:ph type="sldImg" idx="2"/>
+          </p:nvPr>
+        </p:nvSpPr>
+        <p:spPr/>
+      </p:sp>
+      <p:sp>
+        <p:nvSpPr>
+          <p:cNvPr id="3" name="Notes Placeholder 2"/>
+          <p:cNvSpPr>
+            <a:spLocks noGrp="1"/>
+          </p:cNvSpPr>
+          <p:nvPr>
+            <p:ph type="body" idx="3" sz="quarter"/>
+          </p:nvPr>
+        </p:nvSpPr>
+        <p:spPr/>
+        <p:txBody>
+          <a:bodyPr/>
+          <a:lstStyle/>
+          <a:p>
+            <a:r>
+              <a:t>Siehe Trainerhandbuch (Sektion 3) für Moderationshinweise, Timing und erwartete Teilnehmerreaktionen.</a:t>
+            </a:r>
+          </a:p>
+        </p:txBody>
+      </p:sp>
+      <p:sp>
+        <p:nvSpPr>
+          <p:cNvPr id="4" name="Slide Number Placeholder 3"/>
+          <p:cNvSpPr>
+            <a:spLocks noGrp="1"/>
+          </p:cNvSpPr>
+          <p:nvPr>
+            <p:ph type="sldNum" idx="5" sz="quarter"/>
+          </p:nvPr>
+        </p:nvSpPr>
+        <p:spPr/>
+      </p:sp>
+    </p:spTree>
+  </p:cSld>
+  <p:clrMapOvr>
+    <a:masterClrMapping/>
+  </p:clrMapOvr>
+</p:notes>
+</file>
+
+<file path=ppt/notesSlides/notesSlide3.xml><?xml version="1.0" encoding="utf-8"?>
+<p:notes xmlns:a="http://schemas.openxmlformats.org/drawingml/2006/main" xmlns:p="http://schemas.openxmlformats.org/presentationml/2006/main" xmlns:r="http://schemas.openxmlformats.org/officeDocument/2006/relationships">
+  <p:cSld>
+    <p:spTree>
+      <p:nvGrpSpPr>
+        <p:cNvPr id="1" name=""/>
+        <p:cNvGrpSpPr/>
+        <p:nvPr/>
+      </p:nvGrpSpPr>
+      <p:grpSpPr>
+        <a:xfrm>
+          <a:off x="0" y="0"/>
+          <a:ext cx="0" cy="0"/>
+          <a:chOff x="0" y="0"/>
+          <a:chExt cx="0" cy="0"/>
+        </a:xfrm>
+      </p:grpSpPr>
+      <p:sp>
+        <p:nvSpPr>
+          <p:cNvPr id="2" name="Slide Image Placeholder 1"/>
+          <p:cNvSpPr>
+            <a:spLocks noGrp="1"/>
+          </p:cNvSpPr>
+          <p:nvPr>
+            <p:ph type="sldImg" idx="2"/>
+          </p:nvPr>
+        </p:nvSpPr>
+        <p:spPr/>
+      </p:sp>
+      <p:sp>
+        <p:nvSpPr>
+          <p:cNvPr id="3" name="Notes Placeholder 2"/>
+          <p:cNvSpPr>
+            <a:spLocks noGrp="1"/>
+          </p:cNvSpPr>
+          <p:nvPr>
+            <p:ph type="body" idx="3" sz="quarter"/>
+          </p:nvPr>
+        </p:nvSpPr>
+        <p:spPr/>
+        <p:txBody>
+          <a:bodyPr/>
+          <a:lstStyle/>
+          <a:p>
+            <a:r>
+              <a:t>Siehe Trainerhandbuch (Sektion 3) für Moderationshinweise, Timing und erwartete Teilnehmerreaktionen.</a:t>
+            </a:r>
+          </a:p>
+        </p:txBody>
+      </p:sp>
+      <p:sp>
+        <p:nvSpPr>
+          <p:cNvPr id="4" name="Slide Number Placeholder 3"/>
+          <p:cNvSpPr>
+            <a:spLocks noGrp="1"/>
+          </p:cNvSpPr>
+          <p:nvPr>
+            <p:ph type="sldNum" idx="5" sz="quarter"/>
+          </p:nvPr>
+        </p:nvSpPr>
+        <p:spPr/>
+      </p:sp>
+    </p:spTree>
+  </p:cSld>
+  <p:clrMapOvr>
+    <a:masterClrMapping/>
+  </p:clrMapOvr>
+</p:notes>
+</file>
+
+<file path=ppt/notesSlides/notesSlide4.xml><?xml version="1.0" encoding="utf-8"?>
+<p:notes xmlns:a="http://schemas.openxmlformats.org/drawingml/2006/main" xmlns:p="http://schemas.openxmlformats.org/presentationml/2006/main" xmlns:r="http://schemas.openxmlformats.org/officeDocument/2006/relationships">
+  <p:cSld>
+    <p:spTree>
+      <p:nvGrpSpPr>
+        <p:cNvPr id="1" name=""/>
+        <p:cNvGrpSpPr/>
+        <p:nvPr/>
+      </p:nvGrpSpPr>
+      <p:grpSpPr>
+        <a:xfrm>
+          <a:off x="0" y="0"/>
+          <a:ext cx="0" cy="0"/>
+          <a:chOff x="0" y="0"/>
+          <a:chExt cx="0" cy="0"/>
+        </a:xfrm>
+      </p:grpSpPr>
+      <p:sp>
+        <p:nvSpPr>
+          <p:cNvPr id="2" name="Slide Image Placeholder 1"/>
+          <p:cNvSpPr>
+            <a:spLocks noGrp="1"/>
+          </p:cNvSpPr>
+          <p:nvPr>
+            <p:ph type="sldImg" idx="2"/>
+          </p:nvPr>
+        </p:nvSpPr>
+        <p:spPr/>
+      </p:sp>
+      <p:sp>
+        <p:nvSpPr>
+          <p:cNvPr id="3" name="Notes Placeholder 2"/>
+          <p:cNvSpPr>
+            <a:spLocks noGrp="1"/>
+          </p:cNvSpPr>
+          <p:nvPr>
+            <p:ph type="body" idx="3" sz="quarter"/>
+          </p:nvPr>
+        </p:nvSpPr>
+        <p:spPr/>
+        <p:txBody>
+          <a:bodyPr/>
+          <a:lstStyle/>
+          <a:p>
+            <a:r>
+              <a:t>Siehe Trainerhandbuch (Sektion 3) für Moderationshinweise, Timing und erwartete Teilnehmerreaktionen.</a:t>
+            </a:r>
+          </a:p>
+        </p:txBody>
+      </p:sp>
+      <p:sp>
+        <p:nvSpPr>
+          <p:cNvPr id="4" name="Slide Number Placeholder 3"/>
+          <p:cNvSpPr>
+            <a:spLocks noGrp="1"/>
+          </p:cNvSpPr>
+          <p:nvPr>
+            <p:ph type="sldNum" idx="5" sz="quarter"/>
+          </p:nvPr>
+        </p:nvSpPr>
+        <p:spPr/>
+      </p:sp>
+    </p:spTree>
+  </p:cSld>
+  <p:clrMapOvr>
+    <a:masterClrMapping/>
+  </p:clrMapOvr>
+</p:notes>
+</file>
+
+<file path=ppt/notesSlides/notesSlide5.xml><?xml version="1.0" encoding="utf-8"?>
+<p:notes xmlns:a="http://schemas.openxmlformats.org/drawingml/2006/main" xmlns:p="http://schemas.openxmlformats.org/presentationml/2006/main" xmlns:r="http://schemas.openxmlformats.org/officeDocument/2006/relationships">
+  <p:cSld>
+    <p:spTree>
+      <p:nvGrpSpPr>
+        <p:cNvPr id="1" name=""/>
+        <p:cNvGrpSpPr/>
+        <p:nvPr/>
+      </p:nvGrpSpPr>
+      <p:grpSpPr>
+        <a:xfrm>
+          <a:off x="0" y="0"/>
+          <a:ext cx="0" cy="0"/>
+          <a:chOff x="0" y="0"/>
+          <a:chExt cx="0" cy="0"/>
+        </a:xfrm>
+      </p:grpSpPr>
+      <p:sp>
+        <p:nvSpPr>
+          <p:cNvPr id="2" name="Slide Image Placeholder 1"/>
+          <p:cNvSpPr>
+            <a:spLocks noGrp="1"/>
+          </p:cNvSpPr>
+          <p:nvPr>
+            <p:ph type="sldImg" idx="2"/>
+          </p:nvPr>
+        </p:nvSpPr>
+        <p:spPr/>
+      </p:sp>
+      <p:sp>
+        <p:nvSpPr>
+          <p:cNvPr id="3" name="Notes Placeholder 2"/>
+          <p:cNvSpPr>
+            <a:spLocks noGrp="1"/>
+          </p:cNvSpPr>
+          <p:nvPr>
+            <p:ph type="body" idx="3" sz="quarter"/>
+          </p:nvPr>
+        </p:nvSpPr>
+        <p:spPr/>
+        <p:txBody>
+          <a:bodyPr/>
+          <a:lstStyle/>
+          <a:p>
+            <a:r>
+              <a:t>Siehe Trainerhandbuch (Sektion 3) für Moderationshinweise, Timing und erwartete Teilnehmerreaktionen.</a:t>
+            </a:r>
+          </a:p>
+        </p:txBody>
+      </p:sp>
+      <p:sp>
+        <p:nvSpPr>
+          <p:cNvPr id="4" name="Slide Number Placeholder 3"/>
+          <p:cNvSpPr>
+            <a:spLocks noGrp="1"/>
+          </p:cNvSpPr>
+          <p:nvPr>
+            <p:ph type="sldNum" idx="5" sz="quarter"/>
+          </p:nvPr>
+        </p:nvSpPr>
+        <p:spPr/>
+      </p:sp>
+    </p:spTree>
+  </p:cSld>
+  <p:clrMapOvr>
+    <a:masterClrMapping/>
+  </p:clrMapOvr>
+</p:notes>
+</file>
+
+<file path=ppt/notesSlides/notesSlide6.xml><?xml version="1.0" encoding="utf-8"?>
+<p:notes xmlns:a="http://schemas.openxmlformats.org/drawingml/2006/main" xmlns:p="http://schemas.openxmlformats.org/presentationml/2006/main" xmlns:r="http://schemas.openxmlformats.org/officeDocument/2006/relationships">
+  <p:cSld>
+    <p:spTree>
+      <p:nvGrpSpPr>
+        <p:cNvPr id="1" name=""/>
+        <p:cNvGrpSpPr/>
+        <p:nvPr/>
+      </p:nvGrpSpPr>
+      <p:grpSpPr>
+        <a:xfrm>
+          <a:off x="0" y="0"/>
+          <a:ext cx="0" cy="0"/>
+          <a:chOff x="0" y="0"/>
+          <a:chExt cx="0" cy="0"/>
+        </a:xfrm>
+      </p:grpSpPr>
+      <p:sp>
+        <p:nvSpPr>
+          <p:cNvPr id="2" name="Slide Image Placeholder 1"/>
+          <p:cNvSpPr>
+            <a:spLocks noGrp="1"/>
+          </p:cNvSpPr>
+          <p:nvPr>
+            <p:ph type="sldImg" idx="2"/>
+          </p:nvPr>
+        </p:nvSpPr>
+        <p:spPr/>
+      </p:sp>
+      <p:sp>
+        <p:nvSpPr>
+          <p:cNvPr id="3" name="Notes Placeholder 2"/>
+          <p:cNvSpPr>
+            <a:spLocks noGrp="1"/>
+          </p:cNvSpPr>
+          <p:nvPr>
+            <p:ph type="body" idx="3" sz="quarter"/>
+          </p:nvPr>
+        </p:nvSpPr>
+        <p:spPr/>
+        <p:txBody>
+          <a:bodyPr/>
+          <a:lstStyle/>
+          <a:p>
+            <a:r>
+              <a:t>Siehe Trainerhandbuch (Sektion 3) für Moderationshinweise, Timing und erwartete Teilnehmerreaktionen.</a:t>
+            </a:r>
+          </a:p>
+        </p:txBody>
+      </p:sp>
+      <p:sp>
+        <p:nvSpPr>
+          <p:cNvPr id="4" name="Slide Number Placeholder 3"/>
+          <p:cNvSpPr>
+            <a:spLocks noGrp="1"/>
+          </p:cNvSpPr>
+          <p:nvPr>
+            <p:ph type="sldNum" idx="5" sz="quarter"/>
+          </p:nvPr>
+        </p:nvSpPr>
+        <p:spPr/>
+      </p:sp>
+    </p:spTree>
+  </p:cSld>
+  <p:clrMapOvr>
+    <a:masterClrMapping/>
+  </p:clrMapOvr>
+</p:notes>
+</file>
+
+<file path=ppt/notesSlides/notesSlide7.xml><?xml version="1.0" encoding="utf-8"?>
+<p:notes xmlns:a="http://schemas.openxmlformats.org/drawingml/2006/main" xmlns:p="http://schemas.openxmlformats.org/presentationml/2006/main" xmlns:r="http://schemas.openxmlformats.org/officeDocument/2006/relationships">
+  <p:cSld>
+    <p:spTree>
+      <p:nvGrpSpPr>
+        <p:cNvPr id="1" name=""/>
+        <p:cNvGrpSpPr/>
+        <p:nvPr/>
+      </p:nvGrpSpPr>
+      <p:grpSpPr>
+        <a:xfrm>
+          <a:off x="0" y="0"/>
+          <a:ext cx="0" cy="0"/>
+          <a:chOff x="0" y="0"/>
+          <a:chExt cx="0" cy="0"/>
+        </a:xfrm>
+      </p:grpSpPr>
+      <p:sp>
+        <p:nvSpPr>
+          <p:cNvPr id="2" name="Slide Image Placeholder 1"/>
+          <p:cNvSpPr>
+            <a:spLocks noGrp="1"/>
+          </p:cNvSpPr>
+          <p:nvPr>
+            <p:ph type="sldImg" idx="2"/>
+          </p:nvPr>
+        </p:nvSpPr>
+        <p:spPr/>
+      </p:sp>
+      <p:sp>
+        <p:nvSpPr>
+          <p:cNvPr id="3" name="Notes Placeholder 2"/>
+          <p:cNvSpPr>
+            <a:spLocks noGrp="1"/>
+          </p:cNvSpPr>
+          <p:nvPr>
+            <p:ph type="body" idx="3" sz="quarter"/>
+          </p:nvPr>
+        </p:nvSpPr>
+        <p:spPr/>
+        <p:txBody>
+          <a:bodyPr/>
+          <a:lstStyle/>
+          <a:p>
+            <a:r>
+              <a:t>Siehe Trainerhandbuch (Sektion 3) für Moderationshinweise, Timing und erwartete Teilnehmerreaktionen.</a:t>
+            </a:r>
+          </a:p>
+        </p:txBody>
+      </p:sp>
+      <p:sp>
+        <p:nvSpPr>
+          <p:cNvPr id="4" name="Slide Number Placeholder 3"/>
+          <p:cNvSpPr>
+            <a:spLocks noGrp="1"/>
+          </p:cNvSpPr>
+          <p:nvPr>
+            <p:ph type="sldNum" idx="5" sz="quarter"/>
+          </p:nvPr>
+        </p:nvSpPr>
+        <p:spPr/>
+      </p:sp>
+    </p:spTree>
+  </p:cSld>
+  <p:clrMapOvr>
+    <a:masterClrMapping/>
+  </p:clrMapOvr>
+</p:notes>
+</file>
+
+<file path=ppt/notesSlides/notesSlide8.xml><?xml version="1.0" encoding="utf-8"?>
+<p:notes xmlns:a="http://schemas.openxmlformats.org/drawingml/2006/main" xmlns:p="http://schemas.openxmlformats.org/presentationml/2006/main" xmlns:r="http://schemas.openxmlformats.org/officeDocument/2006/relationships">
+  <p:cSld>
+    <p:spTree>
+      <p:nvGrpSpPr>
+        <p:cNvPr id="1" name=""/>
+        <p:cNvGrpSpPr/>
+        <p:nvPr/>
+      </p:nvGrpSpPr>
+      <p:grpSpPr>
+        <a:xfrm>
+          <a:off x="0" y="0"/>
+          <a:ext cx="0" cy="0"/>
+          <a:chOff x="0" y="0"/>
+          <a:chExt cx="0" cy="0"/>
+        </a:xfrm>
+      </p:grpSpPr>
+      <p:sp>
+        <p:nvSpPr>
+          <p:cNvPr id="2" name="Slide Image Placeholder 1"/>
+          <p:cNvSpPr>
+            <a:spLocks noGrp="1"/>
+          </p:cNvSpPr>
+          <p:nvPr>
+            <p:ph type="sldImg" idx="2"/>
+          </p:nvPr>
+        </p:nvSpPr>
+        <p:spPr/>
+      </p:sp>
+      <p:sp>
+        <p:nvSpPr>
+          <p:cNvPr id="3" name="Notes Placeholder 2"/>
+          <p:cNvSpPr>
+            <a:spLocks noGrp="1"/>
+          </p:cNvSpPr>
+          <p:nvPr>
+            <p:ph type="body" idx="3" sz="quarter"/>
+          </p:nvPr>
+        </p:nvSpPr>
+        <p:spPr/>
+        <p:txBody>
+          <a:bodyPr/>
+          <a:lstStyle/>
+          <a:p>
+            <a:r>
+              <a:t>Siehe Trainerhandbuch (Sektion 3) für Moderationshinweise, Timing und erwartete Teilnehmerreaktionen.</a:t>
+            </a:r>
+          </a:p>
+        </p:txBody>
+      </p:sp>
+      <p:sp>
+        <p:nvSpPr>
+          <p:cNvPr id="4" name="Slide Number Placeholder 3"/>
+          <p:cNvSpPr>
+            <a:spLocks noGrp="1"/>
+          </p:cNvSpPr>
+          <p:nvPr>
+            <p:ph type="sldNum" idx="5" sz="quarter"/>
+          </p:nvPr>
+        </p:nvSpPr>
+        <p:spPr/>
+      </p:sp>
+    </p:spTree>
+  </p:cSld>
+  <p:clrMapOvr>
+    <a:masterClrMapping/>
+  </p:clrMapOvr>
+</p:notes>
+</file>
+
+<file path=ppt/notesSlides/notesSlide9.xml><?xml version="1.0" encoding="utf-8"?>
+<p:notes xmlns:a="http://schemas.openxmlformats.org/drawingml/2006/main" xmlns:p="http://schemas.openxmlformats.org/presentationml/2006/main" xmlns:r="http://schemas.openxmlformats.org/officeDocument/2006/relationships">
+  <p:cSld>
+    <p:spTree>
+      <p:nvGrpSpPr>
+        <p:cNvPr id="1" name=""/>
+        <p:cNvGrpSpPr/>
+        <p:nvPr/>
+      </p:nvGrpSpPr>
+      <p:grpSpPr>
+        <a:xfrm>
+          <a:off x="0" y="0"/>
+          <a:ext cx="0" cy="0"/>
+          <a:chOff x="0" y="0"/>
+          <a:chExt cx="0" cy="0"/>
+        </a:xfrm>
+      </p:grpSpPr>
+      <p:sp>
+        <p:nvSpPr>
+          <p:cNvPr id="2" name="Slide Image Placeholder 1"/>
+          <p:cNvSpPr>
+            <a:spLocks noGrp="1"/>
+          </p:cNvSpPr>
+          <p:nvPr>
+            <p:ph type="sldImg" idx="2"/>
+          </p:nvPr>
+        </p:nvSpPr>
+        <p:spPr/>
+      </p:sp>
+      <p:sp>
+        <p:nvSpPr>
+          <p:cNvPr id="3" name="Notes Placeholder 2"/>
+          <p:cNvSpPr>
+            <a:spLocks noGrp="1"/>
+          </p:cNvSpPr>
+          <p:nvPr>
+            <p:ph type="body" idx="3" sz="quarter"/>
+          </p:nvPr>
+        </p:nvSpPr>
+        <p:spPr/>
+        <p:txBody>
+          <a:bodyPr/>
+          <a:lstStyle/>
+          <a:p>
+            <a:r>
+              <a:t>Siehe Trainerhandbuch (Sektion 3) für Moderationshinweise, Timing und erwartete Teilnehmerreaktionen.</a:t>
+            </a:r>
+          </a:p>
+        </p:txBody>
+      </p:sp>
+      <p:sp>
+        <p:nvSpPr>
+          <p:cNvPr id="4" name="Slide Number Placeholder 3"/>
+          <p:cNvSpPr>
+            <a:spLocks noGrp="1"/>
+          </p:cNvSpPr>
+          <p:nvPr>
+            <p:ph type="sldNum" idx="5" sz="quarter"/>
+          </p:nvPr>
+        </p:nvSpPr>
+        <p:spPr/>
+      </p:sp>
+    </p:spTree>
+  </p:cSld>
+  <p:clrMapOvr>
+    <a:masterClrMapping/>
+  </p:clrMapOvr>
+</p:notes>
 </file>
 
 <file path=ppt/slideLayouts/slideLayout1.xml><?xml version="1.0" encoding="utf-8"?>
@@ -8938,4 +9918,324 @@
   </a:objectDefaults>
   <a:extraClrSchemeLst/>
 </a:theme>
+</file>
+
+<file path=ppt/theme/theme2.xml><?xml version="1.0" encoding="utf-8"?>
+<a:theme xmlns:a="http://schemas.openxmlformats.org/drawingml/2006/main" name="Office Theme">
+  <a:themeElements>
+    <a:clrScheme name="Office">
+      <a:dk1>
+        <a:sysClr val="windowText" lastClr="000000"/>
+      </a:dk1>
+      <a:lt1>
+        <a:sysClr val="window" lastClr="FFFFFF"/>
+      </a:lt1>
+      <a:dk2>
+        <a:srgbClr val="1F497D"/>
+      </a:dk2>
+      <a:lt2>
+        <a:srgbClr val="EEECE1"/>
+      </a:lt2>
+      <a:accent1>
+        <a:srgbClr val="4F81BD"/>
+      </a:accent1>
+      <a:accent2>
+        <a:srgbClr val="C0504D"/>
+      </a:accent2>
+      <a:accent3>
+        <a:srgbClr val="9BBB59"/>
+      </a:accent3>
+      <a:accent4>
+        <a:srgbClr val="8064A2"/>
+      </a:accent4>
+      <a:accent5>
+        <a:srgbClr val="4BACC6"/>
+      </a:accent5>
+      <a:accent6>
+        <a:srgbClr val="F79646"/>
+      </a:accent6>
+      <a:hlink>
+        <a:srgbClr val="0000FF"/>
+      </a:hlink>
+      <a:folHlink>
+        <a:srgbClr val="800080"/>
+      </a:folHlink>
+    </a:clrScheme>
+    <a:fontScheme name="Office">
+      <a:majorFont>
+        <a:latin typeface="Calibri"/>
+        <a:ea typeface=""/>
+        <a:cs typeface=""/>
+        <a:font script="Jpan" typeface="ＭＳ Ｐゴシック"/>
+        <a:font script="Hang" typeface="맑은 고딕"/>
+        <a:font script="Hans" typeface="宋体"/>
+        <a:font script="Hant" typeface="新細明體"/>
+        <a:font script="Arab" typeface="Times New Roman"/>
+        <a:font script="Hebr" typeface="Times New Roman"/>
+        <a:font script="Thai" typeface="Angsana New"/>
+        <a:font script="Ethi" typeface="Nyala"/>
+        <a:font script="Beng" typeface="Vrinda"/>
+        <a:font script="Gujr" typeface="Shruti"/>
+        <a:font script="Khmr" typeface="MoolBoran"/>
+        <a:font script="Knda" typeface="Tunga"/>
+        <a:font script="Guru" typeface="Raavi"/>
+        <a:font script="Cans" typeface="Euphemia"/>
+        <a:font script="Cher" typeface="Plantagenet Cherokee"/>
+        <a:font script="Yiii" typeface="Microsoft Yi Baiti"/>
+        <a:font script="Tibt" typeface="Microsoft Himalaya"/>
+        <a:font script="Thaa" typeface="MV Boli"/>
+        <a:font script="Deva" typeface="Mangal"/>
+        <a:font script="Telu" typeface="Gautami"/>
+        <a:font script="Taml" typeface="Latha"/>
+        <a:font script="Syrc" typeface="Estrangelo Edessa"/>
+        <a:font script="Orya" typeface="Kalinga"/>
+        <a:font script="Mlym" typeface="Kartika"/>
+        <a:font script="Laoo" typeface="DokChampa"/>
+        <a:font script="Sinh" typeface="Iskoola Pota"/>
+        <a:font script="Mong" typeface="Mongolian Baiti"/>
+        <a:font script="Viet" typeface="Times New Roman"/>
+        <a:font script="Uigh" typeface="Microsoft Uighur"/>
+        <a:font script="Geor" typeface="Sylfaen"/>
+      </a:majorFont>
+      <a:minorFont>
+        <a:latin typeface="Calibri"/>
+        <a:ea typeface=""/>
+        <a:cs typeface=""/>
+        <a:font script="Jpan" typeface="ＭＳ Ｐゴシック"/>
+        <a:font script="Hang" typeface="맑은 고딕"/>
+        <a:font script="Hans" typeface="宋体"/>
+        <a:font script="Hant" typeface="新細明體"/>
+        <a:font script="Arab" typeface="Arial"/>
+        <a:font script="Hebr" typeface="Arial"/>
+        <a:font script="Thai" typeface="Cordia New"/>
+        <a:font script="Ethi" typeface="Nyala"/>
+        <a:font script="Beng" typeface="Vrinda"/>
+        <a:font script="Gujr" typeface="Shruti"/>
+        <a:font script="Khmr" typeface="DaunPenh"/>
+        <a:font script="Knda" typeface="Tunga"/>
+        <a:font script="Guru" typeface="Raavi"/>
+        <a:font script="Cans" typeface="Euphemia"/>
+        <a:font script="Cher" typeface="Plantagenet Cherokee"/>
+        <a:font script="Yiii" typeface="Microsoft Yi Baiti"/>
+        <a:font script="Tibt" typeface="Microsoft Himalaya"/>
+        <a:font script="Thaa" typeface="MV Boli"/>
+        <a:font script="Deva" typeface="Mangal"/>
+        <a:font script="Telu" typeface="Gautami"/>
+        <a:font script="Taml" typeface="Latha"/>
+        <a:font script="Syrc" typeface="Estrangelo Edessa"/>
+        <a:font script="Orya" typeface="Kalinga"/>
+        <a:font script="Mlym" typeface="Kartika"/>
+        <a:font script="Laoo" typeface="DokChampa"/>
+        <a:font script="Sinh" typeface="Iskoola Pota"/>
+        <a:font script="Mong" typeface="Mongolian Baiti"/>
+        <a:font script="Viet" typeface="Arial"/>
+        <a:font script="Uigh" typeface="Microsoft Uighur"/>
+        <a:font script="Geor" typeface="Sylfaen"/>
+      </a:minorFont>
+    </a:fontScheme>
+    <a:fmtScheme name="Office">
+      <a:fillStyleLst>
+        <a:solidFill>
+          <a:schemeClr val="phClr"/>
+        </a:solidFill>
+        <a:gradFill rotWithShape="1">
+          <a:gsLst>
+            <a:gs pos="0">
+              <a:schemeClr val="phClr">
+                <a:tint val="50000"/>
+                <a:satMod val="300000"/>
+              </a:schemeClr>
+            </a:gs>
+            <a:gs pos="35000">
+              <a:schemeClr val="phClr">
+                <a:tint val="37000"/>
+                <a:satMod val="300000"/>
+              </a:schemeClr>
+            </a:gs>
+            <a:gs pos="100000">
+              <a:schemeClr val="phClr">
+                <a:tint val="15000"/>
+                <a:satMod val="350000"/>
+              </a:schemeClr>
+            </a:gs>
+          </a:gsLst>
+          <a:lin ang="16200000" scaled="1"/>
+        </a:gradFill>
+        <a:gradFill rotWithShape="1">
+          <a:gsLst>
+            <a:gs pos="0">
+              <a:schemeClr val="phClr">
+                <a:tint val="100000"/>
+                <a:shade val="100000"/>
+                <a:satMod val="130000"/>
+              </a:schemeClr>
+            </a:gs>
+            <a:gs pos="100000">
+              <a:schemeClr val="phClr">
+                <a:tint val="50000"/>
+                <a:shade val="100000"/>
+                <a:satMod val="350000"/>
+              </a:schemeClr>
+            </a:gs>
+          </a:gsLst>
+          <a:lin ang="16200000" scaled="0"/>
+        </a:gradFill>
+      </a:fillStyleLst>
+      <a:lnStyleLst>
+        <a:ln w="9525" cap="flat" cmpd="sng" algn="ctr">
+          <a:solidFill>
+            <a:schemeClr val="phClr">
+              <a:shade val="95000"/>
+              <a:satMod val="105000"/>
+            </a:schemeClr>
+          </a:solidFill>
+          <a:prstDash val="solid"/>
+        </a:ln>
+        <a:ln w="25400" cap="flat" cmpd="sng" algn="ctr">
+          <a:solidFill>
+            <a:schemeClr val="phClr"/>
+          </a:solidFill>
+          <a:prstDash val="solid"/>
+        </a:ln>
+        <a:ln w="38100" cap="flat" cmpd="sng" algn="ctr">
+          <a:solidFill>
+            <a:schemeClr val="phClr"/>
+          </a:solidFill>
+          <a:prstDash val="solid"/>
+        </a:ln>
+      </a:lnStyleLst>
+      <a:effectStyleLst>
+        <a:effectStyle>
+          <a:effectLst>
+            <a:outerShdw blurRad="40000" dist="20000" dir="5400000" rotWithShape="0">
+              <a:srgbClr val="000000">
+                <a:alpha val="38000"/>
+              </a:srgbClr>
+            </a:outerShdw>
+          </a:effectLst>
+        </a:effectStyle>
+        <a:effectStyle>
+          <a:effectLst>
+            <a:outerShdw blurRad="40000" dist="23000" dir="5400000" rotWithShape="0">
+              <a:srgbClr val="000000">
+                <a:alpha val="35000"/>
+              </a:srgbClr>
+            </a:outerShdw>
+          </a:effectLst>
+        </a:effectStyle>
+        <a:effectStyle>
+          <a:effectLst>
+            <a:outerShdw blurRad="40000" dist="23000" dir="5400000" rotWithShape="0">
+              <a:srgbClr val="000000">
+                <a:alpha val="35000"/>
+              </a:srgbClr>
+            </a:outerShdw>
+          </a:effectLst>
+          <a:scene3d>
+            <a:camera prst="orthographicFront">
+              <a:rot lat="0" lon="0" rev="0"/>
+            </a:camera>
+            <a:lightRig rig="threePt" dir="t">
+              <a:rot lat="0" lon="0" rev="1200000"/>
+            </a:lightRig>
+          </a:scene3d>
+          <a:sp3d>
+            <a:bevelT w="63500" h="25400"/>
+          </a:sp3d>
+        </a:effectStyle>
+      </a:effectStyleLst>
+      <a:bgFillStyleLst>
+        <a:solidFill>
+          <a:schemeClr val="phClr"/>
+        </a:solidFill>
+        <a:gradFill rotWithShape="1">
+          <a:gsLst>
+            <a:gs pos="0">
+              <a:schemeClr val="phClr">
+                <a:tint val="40000"/>
+                <a:satMod val="350000"/>
+              </a:schemeClr>
+            </a:gs>
+            <a:gs pos="40000">
+              <a:schemeClr val="phClr">
+                <a:tint val="45000"/>
+                <a:shade val="99000"/>
+                <a:satMod val="350000"/>
+              </a:schemeClr>
+            </a:gs>
+            <a:gs pos="100000">
+              <a:schemeClr val="phClr">
+                <a:shade val="20000"/>
+                <a:satMod val="255000"/>
+              </a:schemeClr>
+            </a:gs>
+          </a:gsLst>
+          <a:path path="circle">
+            <a:fillToRect l="50000" t="-80000" r="50000" b="180000"/>
+          </a:path>
+        </a:gradFill>
+        <a:gradFill rotWithShape="1">
+          <a:gsLst>
+            <a:gs pos="0">
+              <a:schemeClr val="phClr">
+                <a:tint val="80000"/>
+                <a:satMod val="300000"/>
+              </a:schemeClr>
+            </a:gs>
+            <a:gs pos="100000">
+              <a:schemeClr val="phClr">
+                <a:shade val="30000"/>
+                <a:satMod val="200000"/>
+              </a:schemeClr>
+            </a:gs>
+          </a:gsLst>
+          <a:path path="circle">
+            <a:fillToRect l="50000" t="50000" r="50000" b="50000"/>
+          </a:path>
+        </a:gradFill>
+      </a:bgFillStyleLst>
+    </a:fmtScheme>
+  </a:themeElements>
+  <a:objectDefaults>
+    <a:spDef>
+      <a:spPr/>
+      <a:bodyPr/>
+      <a:lstStyle/>
+      <a:style>
+        <a:lnRef idx="1">
+          <a:schemeClr val="accent1"/>
+        </a:lnRef>
+        <a:fillRef idx="3">
+          <a:schemeClr val="accent1"/>
+        </a:fillRef>
+        <a:effectRef idx="2">
+          <a:schemeClr val="accent1"/>
+        </a:effectRef>
+        <a:fontRef idx="minor">
+          <a:schemeClr val="lt1"/>
+        </a:fontRef>
+      </a:style>
+    </a:spDef>
+    <a:lnDef>
+      <a:spPr/>
+      <a:bodyPr/>
+      <a:lstStyle/>
+      <a:style>
+        <a:lnRef idx="2">
+          <a:schemeClr val="accent1"/>
+        </a:lnRef>
+        <a:fillRef idx="0">
+          <a:schemeClr val="accent1"/>
+        </a:fillRef>
+        <a:effectRef idx="1">
+          <a:schemeClr val="accent1"/>
+        </a:effectRef>
+        <a:fontRef idx="minor">
+          <a:schemeClr val="tx1"/>
+        </a:fontRef>
+      </a:style>
+    </a:lnDef>
+  </a:objectDefaults>
+  <a:extraClrSchemeLst/>
+</a:theme>
 </file>
--- a/protected-downloads/praesentation/M19.pptx
+++ b/protected-downloads/praesentation/M19.pptx
@@ -6206,49 +6206,7 @@
       </p:sp>
       <p:sp>
         <p:nvSpPr>
-          <p:cNvPr id="8" name="TextBox 7"/>
-          <p:cNvSpPr txBox="1"/>
-          <p:nvPr/>
-        </p:nvSpPr>
-        <p:spPr>
-          <a:xfrm>
-            <a:off x="685800" y="1417320"/>
-            <a:ext cx="10817352" cy="5029200"/>
-          </a:xfrm>
-          <a:prstGeom prst="rect">
-            <a:avLst/>
-          </a:prstGeom>
-          <a:noFill/>
-        </p:spPr>
-        <p:txBody>
-          <a:bodyPr wrap="square">
-            <a:spAutoFit/>
-          </a:bodyPr>
-          <a:lstStyle/>
-          <a:p>
-            <a:pPr>
-              <a:spcBef>
-                <a:spcPts val="400"/>
-              </a:spcBef>
-              <a:spcAft>
-                <a:spcPts val="200"/>
-              </a:spcAft>
-            </a:pPr>
-            <a:r>
-              <a:rPr sz="1200">
-                <a:solidFill>
-                  <a:srgbClr val="3D5466"/>
-                </a:solidFill>
-                <a:latin typeface="Arial"/>
-              </a:rPr>
-              <a:t># 5. PRAXISTRANSFER</a:t>
-            </a:r>
-          </a:p>
-        </p:txBody>
-      </p:sp>
-      <p:sp>
-        <p:nvSpPr>
-          <p:cNvPr id="9" name="Rectangle 8"/>
+          <p:cNvPr id="8" name="Rectangle 7"/>
           <p:cNvSpPr/>
           <p:nvPr/>
         </p:nvSpPr>
@@ -6291,7 +6249,7 @@
       </p:sp>
       <p:sp>
         <p:nvSpPr>
-          <p:cNvPr id="10" name="TextBox 9"/>
+          <p:cNvPr id="9" name="TextBox 8"/>
           <p:cNvSpPr txBox="1"/>
           <p:nvPr/>
         </p:nvSpPr>

--- a/protected-downloads/praesentation/M19.pptx
+++ b/protected-downloads/praesentation/M19.pptx
@@ -10,7 +10,7 @@
     <p:sldId id="258" r:id="rId9"/>
     <p:sldId id="259" r:id="rId10"/>
     <p:sldId id="260" r:id="rId11"/>
-    <p:sldId id="261" r:id="rId13"/>
+    <p:sldId id="261" r:id="rId12"/>
     <p:sldId id="262" r:id="rId14"/>
     <p:sldId id="263" r:id="rId15"/>
     <p:sldId id="264" r:id="rId16"/>
@@ -18,6 +18,7 @@
     <p:sldId id="266" r:id="rId18"/>
     <p:sldId id="267" r:id="rId19"/>
     <p:sldId id="268" r:id="rId20"/>
+    <p:sldId id="269" r:id="rId21"/>
   </p:sldIdLst>
   <p:sldSz cx="12188952" cy="6858000" type="screen4x3"/>
   <p:notesSz cx="6858000" cy="9144000"/>
@@ -4892,7 +4893,7 @@
                 </a:solidFill>
                 <a:latin typeface="Source Serif 4"/>
               </a:rPr>
-              <a:t>Methode 5: Reverse Mentoring</a:t>
+              <a:t>Hinweis: Hybride und standortverteilte Teams</a:t>
             </a:r>
           </a:p>
         </p:txBody>
@@ -4934,216 +4935,7 @@
                 </a:solidFill>
                 <a:latin typeface="Arial"/>
               </a:rPr>
-              <a:t>Was: Jüngere/neuere Berater unterweisen erfahrene Berater in Digitalthemen oder neuen Systemfunktionen.</a:t>
-            </a:r>
-          </a:p>
-          <a:p>
-            <a:pPr>
-              <a:spcBef>
-                <a:spcPts val="400"/>
-              </a:spcBef>
-              <a:spcAft>
-                <a:spcPts val="200"/>
-              </a:spcAft>
-            </a:pPr>
-            <a:r>
-              <a:rPr sz="1200">
-                <a:solidFill>
-                  <a:srgbClr val="3D5466"/>
-                </a:solidFill>
-                <a:latin typeface="Arial"/>
-              </a:rPr>
-              <a:t>Wann: Bei Einführung neuer Tools (z.B. agree-Updates, CRM-Erweiterungen).</a:t>
-            </a:r>
-          </a:p>
-          <a:p>
-            <a:pPr>
-              <a:spcBef>
-                <a:spcPts val="400"/>
-              </a:spcBef>
-              <a:spcAft>
-                <a:spcPts val="200"/>
-              </a:spcAft>
-            </a:pPr>
-            <a:r>
-              <a:rPr sz="1200">
-                <a:solidFill>
-                  <a:srgbClr val="3D5466"/>
-                </a:solidFill>
-                <a:latin typeface="Arial"/>
-              </a:rPr>
-              <a:t>Nutzen: Durchbricht die Hierarchie als Wissensbarriere; wertet beide Seiten auf.</a:t>
-            </a:r>
-          </a:p>
-          <a:p>
-            <a:pPr>
-              <a:spcBef>
-                <a:spcPts val="400"/>
-              </a:spcBef>
-              <a:spcAft>
-                <a:spcPts val="200"/>
-              </a:spcAft>
-            </a:pPr>
-            <a:r>
-              <a:rPr sz="1200">
-                <a:solidFill>
-                  <a:srgbClr val="3D5466"/>
-                </a:solidFill>
-                <a:latin typeface="Arial"/>
-              </a:rPr>
-              <a:t>## 4.6 Typische Transferbarrieren und Gegenmaßnahmen</a:t>
-            </a:r>
-          </a:p>
-          <a:p>
-            <a:pPr>
-              <a:spcBef>
-                <a:spcPts val="400"/>
-              </a:spcBef>
-              <a:spcAft>
-                <a:spcPts val="200"/>
-              </a:spcAft>
-            </a:pPr>
-            <a:r>
-              <a:rPr sz="1200">
-                <a:solidFill>
-                  <a:srgbClr val="3D5466"/>
-                </a:solidFill>
-                <a:latin typeface="Arial"/>
-              </a:rPr>
-              <a:t>## 4.7 Praxiscase: Team Ostbayern</a:t>
-            </a:r>
-          </a:p>
-          <a:p>
-            <a:pPr>
-              <a:spcBef>
-                <a:spcPts val="400"/>
-              </a:spcBef>
-              <a:spcAft>
-                <a:spcPts val="200"/>
-              </a:spcAft>
-            </a:pPr>
-            <a:r>
-              <a:rPr sz="1200">
-                <a:solidFill>
-                  <a:srgbClr val="3D5466"/>
-                </a:solidFill>
-                <a:latin typeface="Arial"/>
-              </a:rPr>
-              <a:t>Ausgangssituation</a:t>
-            </a:r>
-          </a:p>
-          <a:p>
-            <a:pPr>
-              <a:spcBef>
-                <a:spcPts val="400"/>
-              </a:spcBef>
-              <a:spcAft>
-                <a:spcPts val="200"/>
-              </a:spcAft>
-            </a:pPr>
-            <a:r>
-              <a:rPr sz="1200">
-                <a:solidFill>
-                  <a:srgbClr val="3D5466"/>
-                </a:solidFill>
-                <a:latin typeface="Arial"/>
-              </a:rPr>
-              <a:t>Gleichzeitig sind drei jüngere Berater seit 2–4 Jahren im Team. Sie beherrschen agree gut, kennen aber die regionalen Besonderheiten kaum.</a:t>
-            </a:r>
-          </a:p>
-          <a:p>
-            <a:pPr>
-              <a:spcBef>
-                <a:spcPts val="400"/>
-              </a:spcBef>
-              <a:spcAft>
-                <a:spcPts val="200"/>
-              </a:spcAft>
-            </a:pPr>
-            <a:r>
-              <a:rPr sz="1200">
-                <a:solidFill>
-                  <a:srgbClr val="3D5466"/>
-                </a:solidFill>
-                <a:latin typeface="Arial"/>
-              </a:rPr>
-              <a:t>Maßnahmen von Claudia Möller</a:t>
-            </a:r>
-          </a:p>
-          <a:p>
-            <a:pPr>
-              <a:spcBef>
-                <a:spcPts val="400"/>
-              </a:spcBef>
-              <a:spcAft>
-                <a:spcPts val="200"/>
-              </a:spcAft>
-            </a:pPr>
-            <a:r>
-              <a:rPr sz="1200">
-                <a:solidFill>
-                  <a:srgbClr val="3D5466"/>
-                </a:solidFill>
-                <a:latin typeface="Arial"/>
-              </a:rPr>
-              <a:t>Schritt 1 – Wissenslandkarte erstellen (Monat 1):</a:t>
-            </a:r>
-          </a:p>
-          <a:p>
-            <a:pPr>
-              <a:spcBef>
-                <a:spcPts val="400"/>
-              </a:spcBef>
-              <a:spcAft>
-                <a:spcPts val="200"/>
-              </a:spcAft>
-            </a:pPr>
-            <a:r>
-              <a:rPr sz="1200">
-                <a:solidFill>
-                  <a:srgbClr val="3D5466"/>
-                </a:solidFill>
-                <a:latin typeface="Arial"/>
-              </a:rPr>
-              <a:t>Schritt 2 – Tandem-Besuche einführen (Monat 2–3):</a:t>
-            </a:r>
-          </a:p>
-          <a:p>
-            <a:pPr>
-              <a:spcBef>
-                <a:spcPts val="400"/>
-              </a:spcBef>
-              <a:spcAft>
-                <a:spcPts val="200"/>
-              </a:spcAft>
-            </a:pPr>
-            <a:r>
-              <a:rPr sz="1200">
-                <a:solidFill>
-                  <a:srgbClr val="3D5466"/>
-                </a:solidFill>
-                <a:latin typeface="Arial"/>
-              </a:rPr>
-              <a:t>Schritt 3 – Monatliche Fallbesprechung (ab Monat 2):</a:t>
-            </a:r>
-          </a:p>
-          <a:p>
-            <a:pPr>
-              <a:spcBef>
-                <a:spcPts val="400"/>
-              </a:spcBef>
-              <a:spcAft>
-                <a:spcPts val="200"/>
-              </a:spcAft>
-            </a:pPr>
-            <a:r>
-              <a:rPr sz="1200">
-                <a:solidFill>
-                  <a:srgbClr val="3D5466"/>
-                </a:solidFill>
-                <a:latin typeface="Arial"/>
-              </a:rPr>
-              <a:t>Ergebnis nach 6 Monaten</a:t>
+              <a:t>Viele VR-Bank-FK-Teams arbeiten inzwischen über mehrere Geschäftsstellen verteilt oder hybrid. Die o.g. Methoden funktionieren auch auf Distanz – mit kleinen Anpassungen:</a:t>
             </a:r>
           </a:p>
         </p:txBody>
@@ -5481,14 +5273,265 @@
                 </a:solidFill>
                 <a:latin typeface="Source Serif 4"/>
               </a:rPr>
-              <a:t>Arbeitsblatt 1: Wissenslandkarte – eigener Steckbrief</a:t>
-            </a:r>
-          </a:p>
-        </p:txBody>
-      </p:sp>
-      <p:sp>
-        <p:nvSpPr>
-          <p:cNvPr id="8" name="Rectangle 7"/>
+              <a:t>Methode 5: Reverse Mentoring</a:t>
+            </a:r>
+          </a:p>
+        </p:txBody>
+      </p:sp>
+      <p:sp>
+        <p:nvSpPr>
+          <p:cNvPr id="8" name="TextBox 7"/>
+          <p:cNvSpPr txBox="1"/>
+          <p:nvPr/>
+        </p:nvSpPr>
+        <p:spPr>
+          <a:xfrm>
+            <a:off x="685800" y="1417320"/>
+            <a:ext cx="10817352" cy="5029200"/>
+          </a:xfrm>
+          <a:prstGeom prst="rect">
+            <a:avLst/>
+          </a:prstGeom>
+          <a:noFill/>
+        </p:spPr>
+        <p:txBody>
+          <a:bodyPr wrap="square">
+            <a:spAutoFit/>
+          </a:bodyPr>
+          <a:lstStyle/>
+          <a:p>
+            <a:pPr>
+              <a:spcBef>
+                <a:spcPts val="400"/>
+              </a:spcBef>
+              <a:spcAft>
+                <a:spcPts val="200"/>
+              </a:spcAft>
+            </a:pPr>
+            <a:r>
+              <a:rPr sz="1200">
+                <a:solidFill>
+                  <a:srgbClr val="3D5466"/>
+                </a:solidFill>
+                <a:latin typeface="Arial"/>
+              </a:rPr>
+              <a:t>Was: Jüngere/neuere Berater unterweisen erfahrene Berater in Digitalthemen oder neuen Systemfunktionen.</a:t>
+            </a:r>
+          </a:p>
+          <a:p>
+            <a:pPr>
+              <a:spcBef>
+                <a:spcPts val="400"/>
+              </a:spcBef>
+              <a:spcAft>
+                <a:spcPts val="200"/>
+              </a:spcAft>
+            </a:pPr>
+            <a:r>
+              <a:rPr sz="1200">
+                <a:solidFill>
+                  <a:srgbClr val="3D5466"/>
+                </a:solidFill>
+                <a:latin typeface="Arial"/>
+              </a:rPr>
+              <a:t>Wann: Bei Einführung neuer Tools (z.B. agree-Updates, CRM-Erweiterungen).</a:t>
+            </a:r>
+          </a:p>
+          <a:p>
+            <a:pPr>
+              <a:spcBef>
+                <a:spcPts val="400"/>
+              </a:spcBef>
+              <a:spcAft>
+                <a:spcPts val="200"/>
+              </a:spcAft>
+            </a:pPr>
+            <a:r>
+              <a:rPr sz="1200">
+                <a:solidFill>
+                  <a:srgbClr val="3D5466"/>
+                </a:solidFill>
+                <a:latin typeface="Arial"/>
+              </a:rPr>
+              <a:t>Nutzen: Durchbricht die Hierarchie als Wissensbarriere; wertet beide Seiten auf.</a:t>
+            </a:r>
+          </a:p>
+          <a:p>
+            <a:pPr>
+              <a:spcBef>
+                <a:spcPts val="400"/>
+              </a:spcBef>
+              <a:spcAft>
+                <a:spcPts val="200"/>
+              </a:spcAft>
+            </a:pPr>
+            <a:r>
+              <a:rPr sz="1200">
+                <a:solidFill>
+                  <a:srgbClr val="3D5466"/>
+                </a:solidFill>
+                <a:latin typeface="Arial"/>
+              </a:rPr>
+              <a:t>## 4.6 Typische Transferbarrieren und Gegenmaßnahmen</a:t>
+            </a:r>
+          </a:p>
+          <a:p>
+            <a:pPr>
+              <a:spcBef>
+                <a:spcPts val="400"/>
+              </a:spcBef>
+              <a:spcAft>
+                <a:spcPts val="200"/>
+              </a:spcAft>
+            </a:pPr>
+            <a:r>
+              <a:rPr sz="1200">
+                <a:solidFill>
+                  <a:srgbClr val="3D5466"/>
+                </a:solidFill>
+                <a:latin typeface="Arial"/>
+              </a:rPr>
+              <a:t>## 4.7 Praxiscase: Team Ostbayern</a:t>
+            </a:r>
+          </a:p>
+          <a:p>
+            <a:pPr>
+              <a:spcBef>
+                <a:spcPts val="400"/>
+              </a:spcBef>
+              <a:spcAft>
+                <a:spcPts val="200"/>
+              </a:spcAft>
+            </a:pPr>
+            <a:r>
+              <a:rPr sz="1200">
+                <a:solidFill>
+                  <a:srgbClr val="3D5466"/>
+                </a:solidFill>
+                <a:latin typeface="Arial"/>
+              </a:rPr>
+              <a:t>Ausgangssituation</a:t>
+            </a:r>
+          </a:p>
+          <a:p>
+            <a:pPr>
+              <a:spcBef>
+                <a:spcPts val="400"/>
+              </a:spcBef>
+              <a:spcAft>
+                <a:spcPts val="200"/>
+              </a:spcAft>
+            </a:pPr>
+            <a:r>
+              <a:rPr sz="1200">
+                <a:solidFill>
+                  <a:srgbClr val="3D5466"/>
+                </a:solidFill>
+                <a:latin typeface="Arial"/>
+              </a:rPr>
+              <a:t>Gleichzeitig sind drei jüngere Berater seit 2–4 Jahren im Team. Sie beherrschen agree gut, kennen aber die regionalen Besonderheiten kaum.</a:t>
+            </a:r>
+          </a:p>
+          <a:p>
+            <a:pPr>
+              <a:spcBef>
+                <a:spcPts val="400"/>
+              </a:spcBef>
+              <a:spcAft>
+                <a:spcPts val="200"/>
+              </a:spcAft>
+            </a:pPr>
+            <a:r>
+              <a:rPr sz="1200">
+                <a:solidFill>
+                  <a:srgbClr val="3D5466"/>
+                </a:solidFill>
+                <a:latin typeface="Arial"/>
+              </a:rPr>
+              <a:t>Maßnahmen von Claudia Möller</a:t>
+            </a:r>
+          </a:p>
+          <a:p>
+            <a:pPr>
+              <a:spcBef>
+                <a:spcPts val="400"/>
+              </a:spcBef>
+              <a:spcAft>
+                <a:spcPts val="200"/>
+              </a:spcAft>
+            </a:pPr>
+            <a:r>
+              <a:rPr sz="1200">
+                <a:solidFill>
+                  <a:srgbClr val="3D5466"/>
+                </a:solidFill>
+                <a:latin typeface="Arial"/>
+              </a:rPr>
+              <a:t>Schritt 1 – Wissenslandkarte erstellen (Monat 1):</a:t>
+            </a:r>
+          </a:p>
+          <a:p>
+            <a:pPr>
+              <a:spcBef>
+                <a:spcPts val="400"/>
+              </a:spcBef>
+              <a:spcAft>
+                <a:spcPts val="200"/>
+              </a:spcAft>
+            </a:pPr>
+            <a:r>
+              <a:rPr sz="1200">
+                <a:solidFill>
+                  <a:srgbClr val="3D5466"/>
+                </a:solidFill>
+                <a:latin typeface="Arial"/>
+              </a:rPr>
+              <a:t>Schritt 2 – Tandem-Besuche einführen (Monat 2–3):</a:t>
+            </a:r>
+          </a:p>
+          <a:p>
+            <a:pPr>
+              <a:spcBef>
+                <a:spcPts val="400"/>
+              </a:spcBef>
+              <a:spcAft>
+                <a:spcPts val="200"/>
+              </a:spcAft>
+            </a:pPr>
+            <a:r>
+              <a:rPr sz="1200">
+                <a:solidFill>
+                  <a:srgbClr val="3D5466"/>
+                </a:solidFill>
+                <a:latin typeface="Arial"/>
+              </a:rPr>
+              <a:t>Schritt 3 – Monatliche Fallbesprechung (ab Monat 2):</a:t>
+            </a:r>
+          </a:p>
+          <a:p>
+            <a:pPr>
+              <a:spcBef>
+                <a:spcPts val="400"/>
+              </a:spcBef>
+              <a:spcAft>
+                <a:spcPts val="200"/>
+              </a:spcAft>
+            </a:pPr>
+            <a:r>
+              <a:rPr sz="1200">
+                <a:solidFill>
+                  <a:srgbClr val="3D5466"/>
+                </a:solidFill>
+                <a:latin typeface="Arial"/>
+              </a:rPr>
+              <a:t>Ergebnis nach 6 Monaten</a:t>
+            </a:r>
+          </a:p>
+        </p:txBody>
+      </p:sp>
+      <p:sp>
+        <p:nvSpPr>
+          <p:cNvPr id="9" name="Rectangle 8"/>
           <p:cNvSpPr/>
           <p:nvPr/>
         </p:nvSpPr>
@@ -5531,7 +5574,7 @@
       </p:sp>
       <p:sp>
         <p:nvSpPr>
-          <p:cNvPr id="9" name="TextBox 8"/>
+          <p:cNvPr id="10" name="TextBox 9"/>
           <p:cNvSpPr txBox="1"/>
           <p:nvPr/>
         </p:nvSpPr>
@@ -5819,56 +5862,14 @@
                 </a:solidFill>
                 <a:latin typeface="Source Serif 4"/>
               </a:rPr>
-              <a:t>Arbeitsblatt 2: Fallbesprechung vorbereiten</a:t>
-            </a:r>
-          </a:p>
-        </p:txBody>
-      </p:sp>
-      <p:sp>
-        <p:nvSpPr>
-          <p:cNvPr id="8" name="TextBox 7"/>
-          <p:cNvSpPr txBox="1"/>
-          <p:nvPr/>
-        </p:nvSpPr>
-        <p:spPr>
-          <a:xfrm>
-            <a:off x="685800" y="1417320"/>
-            <a:ext cx="10817352" cy="5029200"/>
-          </a:xfrm>
-          <a:prstGeom prst="rect">
-            <a:avLst/>
-          </a:prstGeom>
-          <a:noFill/>
-        </p:spPr>
-        <p:txBody>
-          <a:bodyPr wrap="square">
-            <a:spAutoFit/>
-          </a:bodyPr>
-          <a:lstStyle/>
-          <a:p>
-            <a:pPr>
-              <a:spcBef>
-                <a:spcPts val="400"/>
-              </a:spcBef>
-              <a:spcAft>
-                <a:spcPts val="200"/>
-              </a:spcAft>
-            </a:pPr>
-            <a:r>
-              <a:rPr sz="1200">
-                <a:solidFill>
-                  <a:srgbClr val="3D5466"/>
-                </a:solidFill>
-                <a:latin typeface="Arial"/>
-              </a:rPr>
-              <a:t>(für den Fallbringer)</a:t>
-            </a:r>
-          </a:p>
-        </p:txBody>
-      </p:sp>
-      <p:sp>
-        <p:nvSpPr>
-          <p:cNvPr id="9" name="Rectangle 8"/>
+              <a:t>Arbeitsblatt 1: Wissenslandkarte – eigener Steckbrief</a:t>
+            </a:r>
+          </a:p>
+        </p:txBody>
+      </p:sp>
+      <p:sp>
+        <p:nvSpPr>
+          <p:cNvPr id="8" name="Rectangle 7"/>
           <p:cNvSpPr/>
           <p:nvPr/>
         </p:nvSpPr>
@@ -5911,7 +5912,7 @@
       </p:sp>
       <p:sp>
         <p:nvSpPr>
-          <p:cNvPr id="10" name="TextBox 9"/>
+          <p:cNvPr id="9" name="TextBox 8"/>
           <p:cNvSpPr txBox="1"/>
           <p:nvPr/>
         </p:nvSpPr>
@@ -6199,6 +6200,386 @@
                 </a:solidFill>
                 <a:latin typeface="Source Serif 4"/>
               </a:rPr>
+              <a:t>Arbeitsblatt 2: Fallbesprechung vorbereiten</a:t>
+            </a:r>
+          </a:p>
+        </p:txBody>
+      </p:sp>
+      <p:sp>
+        <p:nvSpPr>
+          <p:cNvPr id="8" name="TextBox 7"/>
+          <p:cNvSpPr txBox="1"/>
+          <p:nvPr/>
+        </p:nvSpPr>
+        <p:spPr>
+          <a:xfrm>
+            <a:off x="685800" y="1417320"/>
+            <a:ext cx="10817352" cy="5029200"/>
+          </a:xfrm>
+          <a:prstGeom prst="rect">
+            <a:avLst/>
+          </a:prstGeom>
+          <a:noFill/>
+        </p:spPr>
+        <p:txBody>
+          <a:bodyPr wrap="square">
+            <a:spAutoFit/>
+          </a:bodyPr>
+          <a:lstStyle/>
+          <a:p>
+            <a:pPr>
+              <a:spcBef>
+                <a:spcPts val="400"/>
+              </a:spcBef>
+              <a:spcAft>
+                <a:spcPts val="200"/>
+              </a:spcAft>
+            </a:pPr>
+            <a:r>
+              <a:rPr sz="1200">
+                <a:solidFill>
+                  <a:srgbClr val="3D5466"/>
+                </a:solidFill>
+                <a:latin typeface="Arial"/>
+              </a:rPr>
+              <a:t>(für den Fallbringer)</a:t>
+            </a:r>
+          </a:p>
+        </p:txBody>
+      </p:sp>
+      <p:sp>
+        <p:nvSpPr>
+          <p:cNvPr id="9" name="Rectangle 8"/>
+          <p:cNvSpPr/>
+          <p:nvPr/>
+        </p:nvSpPr>
+        <p:spPr>
+          <a:xfrm>
+            <a:off x="0" y="6510528"/>
+            <a:ext cx="12188952" cy="347472"/>
+          </a:xfrm>
+          <a:prstGeom prst="rect">
+            <a:avLst/>
+          </a:prstGeom>
+          <a:solidFill>
+            <a:srgbClr val="0A1937"/>
+          </a:solidFill>
+          <a:ln>
+            <a:noFill/>
+          </a:ln>
+        </p:spPr>
+        <p:style>
+          <a:lnRef idx="1">
+            <a:schemeClr val="accent1"/>
+          </a:lnRef>
+          <a:fillRef idx="3">
+            <a:schemeClr val="accent1"/>
+          </a:fillRef>
+          <a:effectRef idx="2">
+            <a:schemeClr val="accent1"/>
+          </a:effectRef>
+          <a:fontRef idx="minor">
+            <a:schemeClr val="lt1"/>
+          </a:fontRef>
+        </p:style>
+        <p:txBody>
+          <a:bodyPr rtlCol="0" anchor="ctr"/>
+          <a:lstStyle/>
+          <a:p>
+            <a:pPr algn="ctr"/>
+          </a:p>
+        </p:txBody>
+      </p:sp>
+      <p:sp>
+        <p:nvSpPr>
+          <p:cNvPr id="10" name="TextBox 9"/>
+          <p:cNvSpPr txBox="1"/>
+          <p:nvPr/>
+        </p:nvSpPr>
+        <p:spPr>
+          <a:xfrm>
+            <a:off x="685800" y="6583680"/>
+            <a:ext cx="6490411" cy="256032"/>
+          </a:xfrm>
+          <a:prstGeom prst="rect">
+            <a:avLst/>
+          </a:prstGeom>
+          <a:noFill/>
+        </p:spPr>
+        <p:txBody>
+          <a:bodyPr wrap="none">
+            <a:spAutoFit/>
+          </a:bodyPr>
+          <a:lstStyle/>
+          <a:p>
+            <a:pPr algn="l"/>
+            <a:r>
+              <a:rPr sz="700">
+                <a:solidFill>
+                  <a:srgbClr val="A0B4D2"/>
+                </a:solidFill>
+                <a:latin typeface="JetBrains Mono"/>
+              </a:rPr>
+              <a:t>Benedikt Zoller Coaching  ·  FKB Campus  ·  M19</a:t>
+            </a:r>
+          </a:p>
+        </p:txBody>
+      </p:sp>
+    </p:spTree>
+  </p:cSld>
+  <p:clrMapOvr>
+    <a:masterClrMapping/>
+  </p:clrMapOvr>
+</p:sld>
+</file>
+
+<file path=ppt/slides/slide14.xml><?xml version="1.0" encoding="utf-8"?>
+<p:sld xmlns:a="http://schemas.openxmlformats.org/drawingml/2006/main" xmlns:p="http://schemas.openxmlformats.org/presentationml/2006/main" xmlns:r="http://schemas.openxmlformats.org/officeDocument/2006/relationships">
+  <p:cSld>
+    <p:spTree>
+      <p:nvGrpSpPr>
+        <p:cNvPr id="1" name=""/>
+        <p:cNvGrpSpPr/>
+        <p:nvPr/>
+      </p:nvGrpSpPr>
+      <p:grpSpPr/>
+      <p:sp>
+        <p:nvSpPr>
+          <p:cNvPr id="2" name="Rectangle 1"/>
+          <p:cNvSpPr/>
+          <p:nvPr/>
+        </p:nvSpPr>
+        <p:spPr>
+          <a:xfrm>
+            <a:off x="0" y="0"/>
+            <a:ext cx="12188952" cy="6858000"/>
+          </a:xfrm>
+          <a:prstGeom prst="rect">
+            <a:avLst/>
+          </a:prstGeom>
+          <a:solidFill>
+            <a:srgbClr val="EDEDF3"/>
+          </a:solidFill>
+          <a:ln>
+            <a:noFill/>
+          </a:ln>
+        </p:spPr>
+        <p:style>
+          <a:lnRef idx="1">
+            <a:schemeClr val="accent1"/>
+          </a:lnRef>
+          <a:fillRef idx="3">
+            <a:schemeClr val="accent1"/>
+          </a:fillRef>
+          <a:effectRef idx="2">
+            <a:schemeClr val="accent1"/>
+          </a:effectRef>
+          <a:fontRef idx="minor">
+            <a:schemeClr val="lt1"/>
+          </a:fontRef>
+        </p:style>
+        <p:txBody>
+          <a:bodyPr rtlCol="0" anchor="ctr"/>
+          <a:lstStyle/>
+          <a:p>
+            <a:pPr algn="ctr"/>
+          </a:p>
+        </p:txBody>
+      </p:sp>
+      <p:sp>
+        <p:nvSpPr>
+          <p:cNvPr id="3" name="Rectangle 2"/>
+          <p:cNvSpPr/>
+          <p:nvPr/>
+        </p:nvSpPr>
+        <p:spPr>
+          <a:xfrm>
+            <a:off x="0" y="0"/>
+            <a:ext cx="12188952" cy="50292"/>
+          </a:xfrm>
+          <a:prstGeom prst="rect">
+            <a:avLst/>
+          </a:prstGeom>
+          <a:solidFill>
+            <a:srgbClr val="1F2C56"/>
+          </a:solidFill>
+          <a:ln>
+            <a:noFill/>
+          </a:ln>
+        </p:spPr>
+        <p:style>
+          <a:lnRef idx="1">
+            <a:schemeClr val="accent1"/>
+          </a:lnRef>
+          <a:fillRef idx="3">
+            <a:schemeClr val="accent1"/>
+          </a:fillRef>
+          <a:effectRef idx="2">
+            <a:schemeClr val="accent1"/>
+          </a:effectRef>
+          <a:fontRef idx="minor">
+            <a:schemeClr val="lt1"/>
+          </a:fontRef>
+        </p:style>
+        <p:txBody>
+          <a:bodyPr rtlCol="0" anchor="ctr"/>
+          <a:lstStyle/>
+          <a:p>
+            <a:pPr algn="ctr"/>
+          </a:p>
+        </p:txBody>
+      </p:sp>
+      <p:sp>
+        <p:nvSpPr>
+          <p:cNvPr id="4" name="TextBox 3"/>
+          <p:cNvSpPr txBox="1"/>
+          <p:nvPr/>
+        </p:nvSpPr>
+        <p:spPr>
+          <a:xfrm>
+            <a:off x="685800" y="109728"/>
+            <a:ext cx="10817352" cy="228600"/>
+          </a:xfrm>
+          <a:prstGeom prst="rect">
+            <a:avLst/>
+          </a:prstGeom>
+          <a:noFill/>
+        </p:spPr>
+        <p:txBody>
+          <a:bodyPr wrap="none">
+            <a:spAutoFit/>
+          </a:bodyPr>
+          <a:lstStyle/>
+          <a:p>
+            <a:pPr algn="l"/>
+            <a:r>
+              <a:rPr sz="750">
+                <a:solidFill>
+                  <a:srgbClr val="78808C"/>
+                </a:solidFill>
+                <a:latin typeface="JetBrains Mono"/>
+              </a:rPr>
+              <a:t>M19  ·  INHALT</a:t>
+            </a:r>
+          </a:p>
+        </p:txBody>
+      </p:sp>
+      <p:sp>
+        <p:nvSpPr>
+          <p:cNvPr id="5" name="Rectangle 4"/>
+          <p:cNvSpPr/>
+          <p:nvPr/>
+        </p:nvSpPr>
+        <p:spPr>
+          <a:xfrm>
+            <a:off x="0" y="1234440"/>
+            <a:ext cx="12188952" cy="12700"/>
+          </a:xfrm>
+          <a:prstGeom prst="rect">
+            <a:avLst/>
+          </a:prstGeom>
+          <a:solidFill>
+            <a:srgbClr val="D8DFE4"/>
+          </a:solidFill>
+          <a:ln>
+            <a:noFill/>
+          </a:ln>
+        </p:spPr>
+        <p:style>
+          <a:lnRef idx="1">
+            <a:schemeClr val="accent1"/>
+          </a:lnRef>
+          <a:fillRef idx="3">
+            <a:schemeClr val="accent1"/>
+          </a:fillRef>
+          <a:effectRef idx="2">
+            <a:schemeClr val="accent1"/>
+          </a:effectRef>
+          <a:fontRef idx="minor">
+            <a:schemeClr val="lt1"/>
+          </a:fontRef>
+        </p:style>
+        <p:txBody>
+          <a:bodyPr rtlCol="0" anchor="ctr"/>
+          <a:lstStyle/>
+          <a:p>
+            <a:pPr algn="ctr"/>
+          </a:p>
+        </p:txBody>
+      </p:sp>
+      <p:sp>
+        <p:nvSpPr>
+          <p:cNvPr id="6" name="Rectangle 5"/>
+          <p:cNvSpPr/>
+          <p:nvPr/>
+        </p:nvSpPr>
+        <p:spPr>
+          <a:xfrm>
+            <a:off x="685800" y="502920"/>
+            <a:ext cx="36576" cy="658368"/>
+          </a:xfrm>
+          <a:prstGeom prst="rect">
+            <a:avLst/>
+          </a:prstGeom>
+          <a:solidFill>
+            <a:srgbClr val="D9C089"/>
+          </a:solidFill>
+          <a:ln>
+            <a:noFill/>
+          </a:ln>
+        </p:spPr>
+        <p:style>
+          <a:lnRef idx="1">
+            <a:schemeClr val="accent1"/>
+          </a:lnRef>
+          <a:fillRef idx="3">
+            <a:schemeClr val="accent1"/>
+          </a:fillRef>
+          <a:effectRef idx="2">
+            <a:schemeClr val="accent1"/>
+          </a:effectRef>
+          <a:fontRef idx="minor">
+            <a:schemeClr val="lt1"/>
+          </a:fontRef>
+        </p:style>
+        <p:txBody>
+          <a:bodyPr rtlCol="0" anchor="ctr"/>
+          <a:lstStyle/>
+          <a:p>
+            <a:pPr algn="ctr"/>
+          </a:p>
+        </p:txBody>
+      </p:sp>
+      <p:sp>
+        <p:nvSpPr>
+          <p:cNvPr id="7" name="TextBox 6"/>
+          <p:cNvSpPr txBox="1"/>
+          <p:nvPr/>
+        </p:nvSpPr>
+        <p:spPr>
+          <a:xfrm>
+            <a:off x="813816" y="502920"/>
+            <a:ext cx="10634472" cy="685800"/>
+          </a:xfrm>
+          <a:prstGeom prst="rect">
+            <a:avLst/>
+          </a:prstGeom>
+          <a:noFill/>
+        </p:spPr>
+        <p:txBody>
+          <a:bodyPr wrap="square">
+            <a:spAutoFit/>
+          </a:bodyPr>
+          <a:lstStyle/>
+          <a:p>
+            <a:pPr algn="l"/>
+            <a:r>
+              <a:rPr sz="2400" b="1" i="0">
+                <a:solidFill>
+                  <a:srgbClr val="1F2C56"/>
+                </a:solidFill>
+                <a:latin typeface="Source Serif 4"/>
+              </a:rPr>
               <a:t>Arbeitsblatt 3: Wissenstransfer-Maßnahmenplan</a:t>
             </a:r>
           </a:p>
@@ -6416,7 +6797,7 @@
                 </a:solidFill>
                 <a:latin typeface="JetBrains Mono"/>
               </a:rPr>
-              <a:t>LERNZIELE  ·  M19</a:t>
+              <a:t>ÜBERBLICK  ·  M19</a:t>
             </a:r>
           </a:p>
         </p:txBody>
@@ -6494,7 +6875,7 @@
                 </a:solidFill>
                 <a:latin typeface="Source Serif 4"/>
               </a:rPr>
-              <a:t>Was Sie heute mitnehmen</a:t>
+              <a:t>Worum geht es heute</a:t>
             </a:r>
           </a:p>
         </p:txBody>
@@ -6507,8 +6888,8 @@
         </p:nvSpPr>
         <p:spPr>
           <a:xfrm>
-            <a:off x="685800" y="1371600"/>
-            <a:ext cx="10817352" cy="5120640"/>
+            <a:off x="685800" y="1737360"/>
+            <a:ext cx="9720072" cy="4206240"/>
           </a:xfrm>
           <a:prstGeom prst="rect">
             <a:avLst/>
@@ -6522,97 +6903,50 @@
           <a:lstStyle/>
           <a:p>
             <a:pPr>
-              <a:spcBef>
-                <a:spcPts val="800"/>
-              </a:spcBef>
               <a:spcAft>
-                <a:spcPts val="200"/>
+                <a:spcPts val="1200"/>
               </a:spcAft>
             </a:pPr>
             <a:r>
-              <a:rPr sz="1400">
+              <a:rPr sz="1700">
                 <a:solidFill>
                   <a:srgbClr val="3D5466"/>
                 </a:solidFill>
                 <a:latin typeface="Arial"/>
               </a:rPr>
-              <a:t>▸  Explizites von implizitem Wissen unterscheiden und ungenutzte Transferbereiche identifizieren</a:t>
+              <a:t>Das wertvollste Wissen Ihres Teams steckt in den Köpfen einzelner – und geht mit jeder Verrentung verloren.</a:t>
             </a:r>
           </a:p>
           <a:p>
             <a:pPr>
-              <a:spcBef>
-                <a:spcPts val="800"/>
-              </a:spcBef>
               <a:spcAft>
-                <a:spcPts val="200"/>
+                <a:spcPts val="1200"/>
               </a:spcAft>
             </a:pPr>
             <a:r>
-              <a:rPr sz="1400">
+              <a:rPr sz="1700">
                 <a:solidFill>
                   <a:srgbClr val="3D5466"/>
                 </a:solidFill>
                 <a:latin typeface="Arial"/>
               </a:rPr>
-              <a:t>▸  Mindestens zwei Wissenstransfer-Methoden auf den eigenen Teamkontext anwenden</a:t>
+              <a:t>Sie lernen Formate des Wissenstransfers (kollegiale Fallberatung, SECI-Modell) und trainieren deren Moderation.</a:t>
             </a:r>
           </a:p>
           <a:p>
             <a:pPr>
-              <a:spcBef>
-                <a:spcPts val="800"/>
-              </a:spcBef>
               <a:spcAft>
-                <a:spcPts val="200"/>
+                <a:spcPts val="1200"/>
               </a:spcAft>
             </a:pPr>
             <a:r>
-              <a:rPr sz="1400">
+              <a:rPr sz="1700">
                 <a:solidFill>
                   <a:srgbClr val="3D5466"/>
                 </a:solidFill>
                 <a:latin typeface="Arial"/>
               </a:rPr>
-              <a:t>▸  Typische Transferbarrieren analysieren und Gegenmaßnahmen ableiten</a:t>
-            </a:r>
-          </a:p>
-          <a:p>
-            <a:pPr>
-              <a:spcBef>
-                <a:spcPts val="800"/>
-              </a:spcBef>
-              <a:spcAft>
-                <a:spcPts val="200"/>
-              </a:spcAft>
-            </a:pPr>
-            <a:r>
-              <a:rPr sz="1400">
-                <a:solidFill>
-                  <a:srgbClr val="3D5466"/>
-                </a:solidFill>
-                <a:latin typeface="Arial"/>
-              </a:rPr>
-              <a:t>▸  Eine geeignete Wissenstransfer-Routine für den Teamkontext auswählen und die Wahl anhand von Transferbarrieren begründen</a:t>
-            </a:r>
-          </a:p>
-          <a:p>
-            <a:pPr>
-              <a:spcBef>
-                <a:spcPts val="800"/>
-              </a:spcBef>
-              <a:spcAft>
-                <a:spcPts val="200"/>
-              </a:spcAft>
-            </a:pPr>
-            <a:r>
-              <a:rPr sz="1400">
-                <a:solidFill>
-                  <a:srgbClr val="3D5466"/>
-                </a:solidFill>
-                <a:latin typeface="Arial"/>
-              </a:rPr>
-              <a:t>▸  Den Nutzen des Teams als Community of Practice bewerten und konkrete Stärkungsschritte begründen</a:t>
+              <a:t>Danach etablieren Sie Routinen, mit denen Erfahrungswissen im Team systematisch weitergegeben wird.</a:t>
             </a:r>
           </a:p>
         </p:txBody>
@@ -6728,7 +7062,7 @@
             <a:avLst/>
           </a:prstGeom>
           <a:solidFill>
-            <a:srgbClr val="FFFFFF"/>
+            <a:srgbClr val="EDEDF3"/>
           </a:solidFill>
           <a:ln>
             <a:noFill/>
@@ -6829,62 +7163,27 @@
                 </a:solidFill>
                 <a:latin typeface="JetBrains Mono"/>
               </a:rPr>
-              <a:t>M19  ·  SCHAUBILD</a:t>
-            </a:r>
-          </a:p>
-        </p:txBody>
-      </p:sp>
-      <p:sp>
-        <p:nvSpPr>
-          <p:cNvPr id="5" name="TextBox 4"/>
-          <p:cNvSpPr txBox="1"/>
-          <p:nvPr/>
-        </p:nvSpPr>
-        <p:spPr>
-          <a:xfrm>
-            <a:off x="685800" y="502920"/>
-            <a:ext cx="10817352" cy="594360"/>
-          </a:xfrm>
-          <a:prstGeom prst="rect">
-            <a:avLst/>
-          </a:prstGeom>
-          <a:noFill/>
-        </p:spPr>
-        <p:txBody>
-          <a:bodyPr wrap="square">
-            <a:spAutoFit/>
-          </a:bodyPr>
-          <a:lstStyle/>
-          <a:p>
-            <a:pPr algn="l"/>
-            <a:r>
-              <a:rPr sz="2000" b="1" i="0">
-                <a:solidFill>
-                  <a:srgbClr val="1F2C56"/>
-                </a:solidFill>
-                <a:latin typeface="Source Serif 4"/>
-              </a:rPr>
-              <a:t>SECI-Modell Wissensspirale nach Nonaka &amp; Takeuchi</a:t>
-            </a:r>
-          </a:p>
-        </p:txBody>
-      </p:sp>
-      <p:sp>
-        <p:nvSpPr>
-          <p:cNvPr id="6" name="Rectangle 5"/>
+              <a:t>LERNZIELE  ·  M19</a:t>
+            </a:r>
+          </a:p>
+        </p:txBody>
+      </p:sp>
+      <p:sp>
+        <p:nvSpPr>
+          <p:cNvPr id="5" name="Rectangle 4"/>
           <p:cNvSpPr/>
           <p:nvPr/>
         </p:nvSpPr>
         <p:spPr>
           <a:xfrm>
-            <a:off x="685800" y="1143000"/>
-            <a:ext cx="10817352" cy="25400"/>
+            <a:off x="0" y="1234440"/>
+            <a:ext cx="12188952" cy="12700"/>
           </a:xfrm>
           <a:prstGeom prst="rect">
             <a:avLst/>
           </a:prstGeom>
           <a:solidFill>
-            <a:srgbClr val="D9C089"/>
+            <a:srgbClr val="D8DFE4"/>
           </a:solidFill>
           <a:ln>
             <a:noFill/>
@@ -6912,30 +7211,159 @@
           </a:p>
         </p:txBody>
       </p:sp>
-      <p:pic>
-        <p:nvPicPr>
-          <p:cNvPr id="7" name="Picture 6" descr="image.png"/>
-          <p:cNvPicPr>
-            <a:picLocks noChangeAspect="1"/>
-          </p:cNvPicPr>
-          <p:nvPr/>
-        </p:nvPicPr>
-        <p:blipFill>
-          <a:blip r:embed="rId2"/>
-          <a:stretch>
-            <a:fillRect/>
-          </a:stretch>
-        </p:blipFill>
-        <p:spPr>
-          <a:xfrm>
-            <a:off x="2554863" y="1325880"/>
-            <a:ext cx="7079225" cy="4937760"/>
-          </a:xfrm>
-          <a:prstGeom prst="rect">
-            <a:avLst/>
-          </a:prstGeom>
-        </p:spPr>
-      </p:pic>
+      <p:sp>
+        <p:nvSpPr>
+          <p:cNvPr id="6" name="TextBox 5"/>
+          <p:cNvSpPr txBox="1"/>
+          <p:nvPr/>
+        </p:nvSpPr>
+        <p:spPr>
+          <a:xfrm>
+            <a:off x="685800" y="502920"/>
+            <a:ext cx="10817352" cy="658368"/>
+          </a:xfrm>
+          <a:prstGeom prst="rect">
+            <a:avLst/>
+          </a:prstGeom>
+          <a:noFill/>
+        </p:spPr>
+        <p:txBody>
+          <a:bodyPr wrap="square">
+            <a:spAutoFit/>
+          </a:bodyPr>
+          <a:lstStyle/>
+          <a:p>
+            <a:pPr algn="l"/>
+            <a:r>
+              <a:rPr sz="2600" b="1" i="0">
+                <a:solidFill>
+                  <a:srgbClr val="1F2C56"/>
+                </a:solidFill>
+                <a:latin typeface="Source Serif 4"/>
+              </a:rPr>
+              <a:t>Was Sie heute mitnehmen</a:t>
+            </a:r>
+          </a:p>
+        </p:txBody>
+      </p:sp>
+      <p:sp>
+        <p:nvSpPr>
+          <p:cNvPr id="7" name="TextBox 6"/>
+          <p:cNvSpPr txBox="1"/>
+          <p:nvPr/>
+        </p:nvSpPr>
+        <p:spPr>
+          <a:xfrm>
+            <a:off x="685800" y="1371600"/>
+            <a:ext cx="10817352" cy="5120640"/>
+          </a:xfrm>
+          <a:prstGeom prst="rect">
+            <a:avLst/>
+          </a:prstGeom>
+          <a:noFill/>
+        </p:spPr>
+        <p:txBody>
+          <a:bodyPr wrap="square">
+            <a:spAutoFit/>
+          </a:bodyPr>
+          <a:lstStyle/>
+          <a:p>
+            <a:pPr>
+              <a:spcBef>
+                <a:spcPts val="800"/>
+              </a:spcBef>
+              <a:spcAft>
+                <a:spcPts val="200"/>
+              </a:spcAft>
+            </a:pPr>
+            <a:r>
+              <a:rPr sz="1400">
+                <a:solidFill>
+                  <a:srgbClr val="3D5466"/>
+                </a:solidFill>
+                <a:latin typeface="Arial"/>
+              </a:rPr>
+              <a:t>▸  Explizites von implizitem Wissen unterscheiden und ungenutzte Transferbereiche identifizieren</a:t>
+            </a:r>
+          </a:p>
+          <a:p>
+            <a:pPr>
+              <a:spcBef>
+                <a:spcPts val="800"/>
+              </a:spcBef>
+              <a:spcAft>
+                <a:spcPts val="200"/>
+              </a:spcAft>
+            </a:pPr>
+            <a:r>
+              <a:rPr sz="1400">
+                <a:solidFill>
+                  <a:srgbClr val="3D5466"/>
+                </a:solidFill>
+                <a:latin typeface="Arial"/>
+              </a:rPr>
+              <a:t>▸  Mindestens zwei Wissenstransfer-Methoden auf den eigenen Teamkontext anwenden</a:t>
+            </a:r>
+          </a:p>
+          <a:p>
+            <a:pPr>
+              <a:spcBef>
+                <a:spcPts val="800"/>
+              </a:spcBef>
+              <a:spcAft>
+                <a:spcPts val="200"/>
+              </a:spcAft>
+            </a:pPr>
+            <a:r>
+              <a:rPr sz="1400">
+                <a:solidFill>
+                  <a:srgbClr val="3D5466"/>
+                </a:solidFill>
+                <a:latin typeface="Arial"/>
+              </a:rPr>
+              <a:t>▸  Typische Transferbarrieren analysieren und Gegenmaßnahmen ableiten</a:t>
+            </a:r>
+          </a:p>
+          <a:p>
+            <a:pPr>
+              <a:spcBef>
+                <a:spcPts val="800"/>
+              </a:spcBef>
+              <a:spcAft>
+                <a:spcPts val="200"/>
+              </a:spcAft>
+            </a:pPr>
+            <a:r>
+              <a:rPr sz="1400">
+                <a:solidFill>
+                  <a:srgbClr val="3D5466"/>
+                </a:solidFill>
+                <a:latin typeface="Arial"/>
+              </a:rPr>
+              <a:t>▸  Eine geeignete Wissenstransfer-Routine für den Teamkontext auswählen und die Wahl anhand von Transferbarrieren begründen</a:t>
+            </a:r>
+          </a:p>
+          <a:p>
+            <a:pPr>
+              <a:spcBef>
+                <a:spcPts val="800"/>
+              </a:spcBef>
+              <a:spcAft>
+                <a:spcPts val="200"/>
+              </a:spcAft>
+            </a:pPr>
+            <a:r>
+              <a:rPr sz="1400">
+                <a:solidFill>
+                  <a:srgbClr val="3D5466"/>
+                </a:solidFill>
+                <a:latin typeface="Arial"/>
+              </a:rPr>
+              <a:t>▸  Den Nutzen des Teams als Community of Practice bewerten und konkrete Stärkungsschritte begründen</a:t>
+            </a:r>
+          </a:p>
+        </p:txBody>
+      </p:sp>
       <p:sp>
         <p:nvSpPr>
           <p:cNvPr id="8" name="Rectangle 7"/>
@@ -7010,41 +7438,6 @@
                 <a:latin typeface="JetBrains Mono"/>
               </a:rPr>
               <a:t>Benedikt Zoller Coaching  ·  FKB Campus  ·  M19</a:t>
-            </a:r>
-          </a:p>
-        </p:txBody>
-      </p:sp>
-      <p:sp>
-        <p:nvSpPr>
-          <p:cNvPr id="10" name="TextBox 9"/>
-          <p:cNvSpPr txBox="1"/>
-          <p:nvPr/>
-        </p:nvSpPr>
-        <p:spPr>
-          <a:xfrm>
-            <a:off x="7176211" y="6583680"/>
-            <a:ext cx="4326940" cy="256032"/>
-          </a:xfrm>
-          <a:prstGeom prst="rect">
-            <a:avLst/>
-          </a:prstGeom>
-          <a:noFill/>
-        </p:spPr>
-        <p:txBody>
-          <a:bodyPr wrap="none">
-            <a:spAutoFit/>
-          </a:bodyPr>
-          <a:lstStyle/>
-          <a:p>
-            <a:pPr algn="r"/>
-            <a:r>
-              <a:rPr sz="700">
-                <a:solidFill>
-                  <a:srgbClr val="A0B4D2"/>
-                </a:solidFill>
-                <a:latin typeface="JetBrains Mono"/>
-              </a:rPr>
-              <a:t>Schaubild</a:t>
             </a:r>
           </a:p>
         </p:txBody>
@@ -7218,7 +7611,7 @@
                 </a:solidFill>
                 <a:latin typeface="Source Serif 4"/>
               </a:rPr>
-              <a:t>Kolb-Lernzyklus</a:t>
+              <a:t>SECI-Modell Wissensspirale nach Nonaka &amp; Takeuchi</a:t>
             </a:r>
           </a:p>
         </p:txBody>
@@ -7436,7 +7829,7 @@
             <a:avLst/>
           </a:prstGeom>
           <a:solidFill>
-            <a:srgbClr val="EDEDF3"/>
+            <a:srgbClr val="FFFFFF"/>
           </a:solidFill>
           <a:ln>
             <a:noFill/>
@@ -7537,51 +7930,43 @@
                 </a:solidFill>
                 <a:latin typeface="JetBrains Mono"/>
               </a:rPr>
-              <a:t>M19  ·  INHALT</a:t>
-            </a:r>
-          </a:p>
-        </p:txBody>
-      </p:sp>
-      <p:sp>
-        <p:nvSpPr>
-          <p:cNvPr id="5" name="Rectangle 4"/>
-          <p:cNvSpPr/>
-          <p:nvPr/>
-        </p:nvSpPr>
-        <p:spPr>
-          <a:xfrm>
-            <a:off x="0" y="1234440"/>
-            <a:ext cx="12188952" cy="12700"/>
-          </a:xfrm>
-          <a:prstGeom prst="rect">
-            <a:avLst/>
-          </a:prstGeom>
-          <a:solidFill>
-            <a:srgbClr val="D8DFE4"/>
-          </a:solidFill>
-          <a:ln>
-            <a:noFill/>
-          </a:ln>
-        </p:spPr>
-        <p:style>
-          <a:lnRef idx="1">
-            <a:schemeClr val="accent1"/>
-          </a:lnRef>
-          <a:fillRef idx="3">
-            <a:schemeClr val="accent1"/>
-          </a:fillRef>
-          <a:effectRef idx="2">
-            <a:schemeClr val="accent1"/>
-          </a:effectRef>
-          <a:fontRef idx="minor">
-            <a:schemeClr val="lt1"/>
-          </a:fontRef>
-        </p:style>
-        <p:txBody>
-          <a:bodyPr rtlCol="0" anchor="ctr"/>
-          <a:lstStyle/>
-          <a:p>
-            <a:pPr algn="ctr"/>
+              <a:t>M19  ·  SCHAUBILD</a:t>
+            </a:r>
+          </a:p>
+        </p:txBody>
+      </p:sp>
+      <p:sp>
+        <p:nvSpPr>
+          <p:cNvPr id="5" name="TextBox 4"/>
+          <p:cNvSpPr txBox="1"/>
+          <p:nvPr/>
+        </p:nvSpPr>
+        <p:spPr>
+          <a:xfrm>
+            <a:off x="685800" y="502920"/>
+            <a:ext cx="10817352" cy="594360"/>
+          </a:xfrm>
+          <a:prstGeom prst="rect">
+            <a:avLst/>
+          </a:prstGeom>
+          <a:noFill/>
+        </p:spPr>
+        <p:txBody>
+          <a:bodyPr wrap="square">
+            <a:spAutoFit/>
+          </a:bodyPr>
+          <a:lstStyle/>
+          <a:p>
+            <a:pPr algn="l"/>
+            <a:r>
+              <a:rPr sz="2000" b="1" i="0">
+                <a:solidFill>
+                  <a:srgbClr val="1F2C56"/>
+                </a:solidFill>
+                <a:latin typeface="Source Serif 4"/>
+              </a:rPr>
+              <a:t>Kolb-Lernzyklus</a:t>
+            </a:r>
           </a:p>
         </p:txBody>
       </p:sp>
@@ -7593,8 +7978,8 @@
         </p:nvSpPr>
         <p:spPr>
           <a:xfrm>
-            <a:off x="685800" y="502920"/>
-            <a:ext cx="36576" cy="658368"/>
+            <a:off x="685800" y="1143000"/>
+            <a:ext cx="10817352" cy="25400"/>
           </a:xfrm>
           <a:prstGeom prst="rect">
             <a:avLst/>
@@ -7628,200 +8013,33 @@
           </a:p>
         </p:txBody>
       </p:sp>
-      <p:sp>
-        <p:nvSpPr>
-          <p:cNvPr id="7" name="TextBox 6"/>
-          <p:cNvSpPr txBox="1"/>
-          <p:nvPr/>
-        </p:nvSpPr>
-        <p:spPr>
-          <a:xfrm>
-            <a:off x="813816" y="502920"/>
-            <a:ext cx="10634472" cy="685800"/>
-          </a:xfrm>
-          <a:prstGeom prst="rect">
-            <a:avLst/>
-          </a:prstGeom>
-          <a:noFill/>
-        </p:spPr>
-        <p:txBody>
-          <a:bodyPr wrap="square">
-            <a:spAutoFit/>
-          </a:bodyPr>
-          <a:lstStyle/>
-          <a:p>
-            <a:pPr algn="l"/>
-            <a:r>
-              <a:rPr sz="2400" b="1" i="0">
-                <a:solidFill>
-                  <a:srgbClr val="1F2C56"/>
-                </a:solidFill>
-                <a:latin typeface="Source Serif 4"/>
-              </a:rPr>
-              <a:t>Methode 1: Tandem-Kundenbesuch</a:t>
-            </a:r>
-          </a:p>
-        </p:txBody>
-      </p:sp>
-      <p:sp>
-        <p:nvSpPr>
-          <p:cNvPr id="8" name="TextBox 7"/>
-          <p:cNvSpPr txBox="1"/>
-          <p:nvPr/>
-        </p:nvSpPr>
-        <p:spPr>
-          <a:xfrm>
-            <a:off x="685800" y="1417320"/>
-            <a:ext cx="10817352" cy="5029200"/>
-          </a:xfrm>
-          <a:prstGeom prst="rect">
-            <a:avLst/>
-          </a:prstGeom>
-          <a:noFill/>
-        </p:spPr>
-        <p:txBody>
-          <a:bodyPr wrap="square">
-            <a:spAutoFit/>
-          </a:bodyPr>
-          <a:lstStyle/>
-          <a:p>
-            <a:pPr>
-              <a:spcBef>
-                <a:spcPts val="400"/>
-              </a:spcBef>
-              <a:spcAft>
-                <a:spcPts val="200"/>
-              </a:spcAft>
-            </a:pPr>
-            <a:r>
-              <a:rPr sz="1200">
-                <a:solidFill>
-                  <a:srgbClr val="3D5466"/>
-                </a:solidFill>
-                <a:latin typeface="Arial"/>
-              </a:rPr>
-              <a:t>Was: Zwei Berater besuchen gemeinsam einen Kunden – einer führt, einer beobachtet.</a:t>
-            </a:r>
-          </a:p>
-          <a:p>
-            <a:pPr>
-              <a:spcBef>
-                <a:spcPts val="400"/>
-              </a:spcBef>
-              <a:spcAft>
-                <a:spcPts val="200"/>
-              </a:spcAft>
-            </a:pPr>
-            <a:r>
-              <a:rPr sz="1200">
-                <a:solidFill>
-                  <a:srgbClr val="3D5466"/>
-                </a:solidFill>
-                <a:latin typeface="Arial"/>
-              </a:rPr>
-              <a:t>Wann: Bei speziellem Branchenwissen oder neuem Kundensegment.</a:t>
-            </a:r>
-          </a:p>
-          <a:p>
-            <a:pPr>
-              <a:spcBef>
-                <a:spcPts val="400"/>
-              </a:spcBef>
-              <a:spcAft>
-                <a:spcPts val="200"/>
-              </a:spcAft>
-            </a:pPr>
-            <a:r>
-              <a:rPr sz="1200">
-                <a:solidFill>
-                  <a:srgbClr val="3D5466"/>
-                </a:solidFill>
-                <a:latin typeface="Arial"/>
-              </a:rPr>
-              <a:t>Ablauf:</a:t>
-            </a:r>
-          </a:p>
-          <a:p>
-            <a:pPr>
-              <a:spcBef>
-                <a:spcPts val="400"/>
-              </a:spcBef>
-              <a:spcAft>
-                <a:spcPts val="200"/>
-              </a:spcAft>
-            </a:pPr>
-            <a:r>
-              <a:rPr sz="1300">
-                <a:solidFill>
-                  <a:srgbClr val="3D5466"/>
-                </a:solidFill>
-                <a:latin typeface="Arial"/>
-              </a:rPr>
-              <a:t>▸  Kurze Vorbesprechung (10 Min.): Wer übernimmt welche Rolle? Welche Beobachtungsaufgabe hat der Gast?</a:t>
-            </a:r>
-          </a:p>
-          <a:p>
-            <a:pPr>
-              <a:spcBef>
-                <a:spcPts val="400"/>
-              </a:spcBef>
-              <a:spcAft>
-                <a:spcPts val="200"/>
-              </a:spcAft>
-            </a:pPr>
-            <a:r>
-              <a:rPr sz="1300">
-                <a:solidFill>
-                  <a:srgbClr val="3D5466"/>
-                </a:solidFill>
-                <a:latin typeface="Arial"/>
-              </a:rPr>
-              <a:t>▸  Kundenbesuch (gemeinsam, einer führt)</a:t>
-            </a:r>
-          </a:p>
-          <a:p>
-            <a:pPr>
-              <a:spcBef>
-                <a:spcPts val="400"/>
-              </a:spcBef>
-              <a:spcAft>
-                <a:spcPts val="200"/>
-              </a:spcAft>
-            </a:pPr>
-            <a:r>
-              <a:rPr sz="1300">
-                <a:solidFill>
-                  <a:srgbClr val="3D5466"/>
-                </a:solidFill>
-                <a:latin typeface="Arial"/>
-              </a:rPr>
-              <a:t>▸  Nachbesprechung (15 Min.): Beobachter gibt strukturiertes Feedback; Berater teilt Hintergrundwissen</a:t>
-            </a:r>
-          </a:p>
-          <a:p>
-            <a:pPr>
-              <a:spcBef>
-                <a:spcPts val="400"/>
-              </a:spcBef>
-              <a:spcAft>
-                <a:spcPts val="200"/>
-              </a:spcAft>
-            </a:pPr>
-            <a:r>
-              <a:rPr sz="1200">
-                <a:solidFill>
-                  <a:srgbClr val="3D5466"/>
-                </a:solidFill>
-                <a:latin typeface="Arial"/>
-              </a:rPr>
-              <a:t>Qualitätsfaktor: Der Beobachter hat vorab eine konkrete Beobachtungsaufgabe (z.B. „achte auf, wie der Kollege das Thema Nachfolge einführt").</a:t>
-            </a:r>
-          </a:p>
-        </p:txBody>
-      </p:sp>
-      <p:sp>
-        <p:nvSpPr>
-          <p:cNvPr id="9" name="Rectangle 8"/>
+      <p:pic>
+        <p:nvPicPr>
+          <p:cNvPr id="7" name="Picture 6" descr="image.png"/>
+          <p:cNvPicPr>
+            <a:picLocks noChangeAspect="1"/>
+          </p:cNvPicPr>
+          <p:nvPr/>
+        </p:nvPicPr>
+        <p:blipFill>
+          <a:blip r:embed="rId2"/>
+          <a:stretch>
+            <a:fillRect/>
+          </a:stretch>
+        </p:blipFill>
+        <p:spPr>
+          <a:xfrm>
+            <a:off x="2554863" y="1325880"/>
+            <a:ext cx="7079225" cy="4937760"/>
+          </a:xfrm>
+          <a:prstGeom prst="rect">
+            <a:avLst/>
+          </a:prstGeom>
+        </p:spPr>
+      </p:pic>
+      <p:sp>
+        <p:nvSpPr>
+          <p:cNvPr id="8" name="Rectangle 7"/>
           <p:cNvSpPr/>
           <p:nvPr/>
         </p:nvSpPr>
@@ -7864,7 +8082,7 @@
       </p:sp>
       <p:sp>
         <p:nvSpPr>
-          <p:cNvPr id="10" name="TextBox 9"/>
+          <p:cNvPr id="9" name="TextBox 8"/>
           <p:cNvSpPr txBox="1"/>
           <p:nvPr/>
         </p:nvSpPr>
@@ -7893,6 +8111,41 @@
                 <a:latin typeface="JetBrains Mono"/>
               </a:rPr>
               <a:t>Benedikt Zoller Coaching  ·  FKB Campus  ·  M19</a:t>
+            </a:r>
+          </a:p>
+        </p:txBody>
+      </p:sp>
+      <p:sp>
+        <p:nvSpPr>
+          <p:cNvPr id="10" name="TextBox 9"/>
+          <p:cNvSpPr txBox="1"/>
+          <p:nvPr/>
+        </p:nvSpPr>
+        <p:spPr>
+          <a:xfrm>
+            <a:off x="7176211" y="6583680"/>
+            <a:ext cx="4326940" cy="256032"/>
+          </a:xfrm>
+          <a:prstGeom prst="rect">
+            <a:avLst/>
+          </a:prstGeom>
+          <a:noFill/>
+        </p:spPr>
+        <p:txBody>
+          <a:bodyPr wrap="none">
+            <a:spAutoFit/>
+          </a:bodyPr>
+          <a:lstStyle/>
+          <a:p>
+            <a:pPr algn="r"/>
+            <a:r>
+              <a:rPr sz="700">
+                <a:solidFill>
+                  <a:srgbClr val="A0B4D2"/>
+                </a:solidFill>
+                <a:latin typeface="JetBrains Mono"/>
+              </a:rPr>
+              <a:t>Schaubild</a:t>
             </a:r>
           </a:p>
         </p:txBody>
@@ -8152,7 +8405,7 @@
                 </a:solidFill>
                 <a:latin typeface="Source Serif 4"/>
               </a:rPr>
-              <a:t>Methode 2: Strukturierte Fallbesprechung</a:t>
+              <a:t>Methode 1: Tandem-Kundenbesuch</a:t>
             </a:r>
           </a:p>
         </p:txBody>
@@ -8194,7 +8447,7 @@
                 </a:solidFill>
                 <a:latin typeface="Arial"/>
               </a:rPr>
-              <a:t>Was: 45-minütiges Team-Format, in dem ein Berater einen aktuellen Fall vorstellt und das Team kollektiv reflektiert.</a:t>
+              <a:t>Was: Zwei Berater besuchen gemeinsam einen Kunden – einer führt, einer beobachtet.</a:t>
             </a:r>
           </a:p>
           <a:p>
@@ -8213,7 +8466,7 @@
                 </a:solidFill>
                 <a:latin typeface="Arial"/>
               </a:rPr>
-              <a:t>Struktur:</a:t>
+              <a:t>Wann: Bei speziellem Branchenwissen oder neuem Kundensegment.</a:t>
             </a:r>
           </a:p>
           <a:p>
@@ -8232,7 +8485,83 @@
                 </a:solidFill>
                 <a:latin typeface="Arial"/>
               </a:rPr>
-              <a:t>Qualitätsfaktor: Die stille Reflexion vor der Diskussion verhindert Gruppendenken (Anchoring-Bias).</a:t>
+              <a:t>Ablauf:</a:t>
+            </a:r>
+          </a:p>
+          <a:p>
+            <a:pPr>
+              <a:spcBef>
+                <a:spcPts val="400"/>
+              </a:spcBef>
+              <a:spcAft>
+                <a:spcPts val="200"/>
+              </a:spcAft>
+            </a:pPr>
+            <a:r>
+              <a:rPr sz="1300">
+                <a:solidFill>
+                  <a:srgbClr val="3D5466"/>
+                </a:solidFill>
+                <a:latin typeface="Arial"/>
+              </a:rPr>
+              <a:t>▸  Kurze Vorbesprechung (10 Min.): Wer übernimmt welche Rolle? Welche Beobachtungsaufgabe hat der Gast?</a:t>
+            </a:r>
+          </a:p>
+          <a:p>
+            <a:pPr>
+              <a:spcBef>
+                <a:spcPts val="400"/>
+              </a:spcBef>
+              <a:spcAft>
+                <a:spcPts val="200"/>
+              </a:spcAft>
+            </a:pPr>
+            <a:r>
+              <a:rPr sz="1300">
+                <a:solidFill>
+                  <a:srgbClr val="3D5466"/>
+                </a:solidFill>
+                <a:latin typeface="Arial"/>
+              </a:rPr>
+              <a:t>▸  Kundenbesuch (gemeinsam, einer führt)</a:t>
+            </a:r>
+          </a:p>
+          <a:p>
+            <a:pPr>
+              <a:spcBef>
+                <a:spcPts val="400"/>
+              </a:spcBef>
+              <a:spcAft>
+                <a:spcPts val="200"/>
+              </a:spcAft>
+            </a:pPr>
+            <a:r>
+              <a:rPr sz="1300">
+                <a:solidFill>
+                  <a:srgbClr val="3D5466"/>
+                </a:solidFill>
+                <a:latin typeface="Arial"/>
+              </a:rPr>
+              <a:t>▸  Nachbesprechung (15 Min.): Beobachter gibt strukturiertes Feedback; Berater teilt Hintergrundwissen</a:t>
+            </a:r>
+          </a:p>
+          <a:p>
+            <a:pPr>
+              <a:spcBef>
+                <a:spcPts val="400"/>
+              </a:spcBef>
+              <a:spcAft>
+                <a:spcPts val="200"/>
+              </a:spcAft>
+            </a:pPr>
+            <a:r>
+              <a:rPr sz="1200">
+                <a:solidFill>
+                  <a:srgbClr val="3D5466"/>
+                </a:solidFill>
+                <a:latin typeface="Arial"/>
+              </a:rPr>
+              <a:t>Qualitätsfaktor: Der Beobachter hat vorab eine konkrete Beobachtungsaufgabe (z.B. „achte auf, wie der Kollege das Thema Nachfolge einführt").</a:t>
             </a:r>
           </a:p>
         </p:txBody>
@@ -8570,7 +8899,7 @@
                 </a:solidFill>
                 <a:latin typeface="Source Serif 4"/>
               </a:rPr>
-              <a:t>Methode 3: Wissenslandkarte</a:t>
+              <a:t>Methode 2: Strukturierte Fallbesprechung</a:t>
             </a:r>
           </a:p>
         </p:txBody>
@@ -8612,7 +8941,7 @@
                 </a:solidFill>
                 <a:latin typeface="Arial"/>
               </a:rPr>
-              <a:t>Was: Visualisierung, wer im Team über welches Spezialwissen verfügt.</a:t>
+              <a:t>Was: 45-minütiges Team-Format, in dem ein Berater einen aktuellen Fall vorstellt und das Team kollektiv reflektiert.</a:t>
             </a:r>
           </a:p>
           <a:p>
@@ -8631,7 +8960,7 @@
                 </a:solidFill>
                 <a:latin typeface="Arial"/>
               </a:rPr>
-              <a:t>Wann: Einmalig erstellen, halbjährlich aktualisieren.</a:t>
+              <a:t>Struktur:</a:t>
             </a:r>
           </a:p>
           <a:p>
@@ -8650,26 +8979,7 @@
                 </a:solidFill>
                 <a:latin typeface="Arial"/>
               </a:rPr>
-              <a:t>Inhalt: Pro Berater: Branchenexpertise, Sonderwissen (z.B. Nachfolge, Landwirtschaft, Heilberufe), bevorzugte Methoden, Kontaktnetzwerk.</a:t>
-            </a:r>
-          </a:p>
-          <a:p>
-            <a:pPr>
-              <a:spcBef>
-                <a:spcPts val="400"/>
-              </a:spcBef>
-              <a:spcAft>
-                <a:spcPts val="200"/>
-              </a:spcAft>
-            </a:pPr>
-            <a:r>
-              <a:rPr sz="1200">
-                <a:solidFill>
-                  <a:srgbClr val="3D5466"/>
-                </a:solidFill>
-                <a:latin typeface="Arial"/>
-              </a:rPr>
-              <a:t>Nutzen: Neue Berater wissen sofort, wen sie bei welchem Thema fragen sollen. Der Teamleiter erkennt Wissensinseln und -lücken.</a:t>
+              <a:t>Qualitätsfaktor: Die stille Reflexion vor der Diskussion verhindert Gruppendenken (Anchoring-Bias).</a:t>
             </a:r>
           </a:p>
         </p:txBody>
@@ -9007,7 +9317,7 @@
                 </a:solidFill>
                 <a:latin typeface="Source Serif 4"/>
               </a:rPr>
-              <a:t>Methode 4: Lunch-and-Learn (15 Minuten)</a:t>
+              <a:t>Methode 3: Wissenslandkarte</a:t>
             </a:r>
           </a:p>
         </p:txBody>
@@ -9049,7 +9359,7 @@
                 </a:solidFill>
                 <a:latin typeface="Arial"/>
               </a:rPr>
-              <a:t>Was: Kurzes, informelles Wissensformat – ein Berater erklärt an einem konkreten Beispiel eine Technik oder ein Konzept.</a:t>
+              <a:t>Was: Visualisierung, wer im Team über welches Spezialwissen verfügt.</a:t>
             </a:r>
           </a:p>
           <a:p>
@@ -9068,7 +9378,7 @@
                 </a:solidFill>
                 <a:latin typeface="Arial"/>
               </a:rPr>
-              <a:t>Wann: Spontan oder geplant, 1–2× pro Monat.</a:t>
+              <a:t>Wann: Einmalig erstellen, halbjährlich aktualisieren.</a:t>
             </a:r>
           </a:p>
           <a:p>
@@ -9087,7 +9397,26 @@
                 </a:solidFill>
                 <a:latin typeface="Arial"/>
               </a:rPr>
-              <a:t>Qualitätsfaktor: Keine Präsentation, keine Vorbereitung – nur Erzählen + Fragen.</a:t>
+              <a:t>Inhalt: Pro Berater: Branchenexpertise, Sonderwissen (z.B. Nachfolge, Landwirtschaft, Heilberufe), bevorzugte Methoden, Kontaktnetzwerk.</a:t>
+            </a:r>
+          </a:p>
+          <a:p>
+            <a:pPr>
+              <a:spcBef>
+                <a:spcPts val="400"/>
+              </a:spcBef>
+              <a:spcAft>
+                <a:spcPts val="200"/>
+              </a:spcAft>
+            </a:pPr>
+            <a:r>
+              <a:rPr sz="1200">
+                <a:solidFill>
+                  <a:srgbClr val="3D5466"/>
+                </a:solidFill>
+                <a:latin typeface="Arial"/>
+              </a:rPr>
+              <a:t>Nutzen: Neue Berater wissen sofort, wen sie bei welchem Thema fragen sollen. Der Teamleiter erkennt Wissensinseln und -lücken.</a:t>
             </a:r>
           </a:p>
         </p:txBody>
@@ -9425,7 +9754,7 @@
                 </a:solidFill>
                 <a:latin typeface="Source Serif 4"/>
               </a:rPr>
-              <a:t>Hinweis: Hybride und standortverteilte Teams</a:t>
+              <a:t>Methode 4: Lunch-and-Learn (15 Minuten)</a:t>
             </a:r>
           </a:p>
         </p:txBody>
@@ -9467,7 +9796,45 @@
                 </a:solidFill>
                 <a:latin typeface="Arial"/>
               </a:rPr>
-              <a:t>Viele VR-Bank-FK-Teams arbeiten inzwischen über mehrere Geschäftsstellen verteilt oder hybrid. Die o.g. Methoden funktionieren auch auf Distanz – mit kleinen Anpassungen:</a:t>
+              <a:t>Was: Kurzes, informelles Wissensformat – ein Berater erklärt an einem konkreten Beispiel eine Technik oder ein Konzept.</a:t>
+            </a:r>
+          </a:p>
+          <a:p>
+            <a:pPr>
+              <a:spcBef>
+                <a:spcPts val="400"/>
+              </a:spcBef>
+              <a:spcAft>
+                <a:spcPts val="200"/>
+              </a:spcAft>
+            </a:pPr>
+            <a:r>
+              <a:rPr sz="1200">
+                <a:solidFill>
+                  <a:srgbClr val="3D5466"/>
+                </a:solidFill>
+                <a:latin typeface="Arial"/>
+              </a:rPr>
+              <a:t>Wann: Spontan oder geplant, 1–2× pro Monat.</a:t>
+            </a:r>
+          </a:p>
+          <a:p>
+            <a:pPr>
+              <a:spcBef>
+                <a:spcPts val="400"/>
+              </a:spcBef>
+              <a:spcAft>
+                <a:spcPts val="200"/>
+              </a:spcAft>
+            </a:pPr>
+            <a:r>
+              <a:rPr sz="1200">
+                <a:solidFill>
+                  <a:srgbClr val="3D5466"/>
+                </a:solidFill>
+                <a:latin typeface="Arial"/>
+              </a:rPr>
+              <a:t>Qualitätsfaktor: Keine Präsentation, keine Vorbereitung – nur Erzählen + Fragen.</a:t>
             </a:r>
           </a:p>
         </p:txBody>

--- a/protected-downloads/praesentation/M19.pptx
+++ b/protected-downloads/praesentation/M19.pptx
@@ -9,8 +9,8 @@
     <p:sldId id="257" r:id="rId8"/>
     <p:sldId id="258" r:id="rId9"/>
     <p:sldId id="259" r:id="rId10"/>
-    <p:sldId id="260" r:id="rId11"/>
-    <p:sldId id="261" r:id="rId12"/>
+    <p:sldId id="260" r:id="rId12"/>
+    <p:sldId id="261" r:id="rId13"/>
     <p:sldId id="262" r:id="rId14"/>
     <p:sldId id="263" r:id="rId15"/>
     <p:sldId id="264" r:id="rId16"/>
@@ -19,6 +19,7 @@
     <p:sldId id="267" r:id="rId19"/>
     <p:sldId id="268" r:id="rId20"/>
     <p:sldId id="269" r:id="rId21"/>
+    <p:sldId id="270" r:id="rId22"/>
   </p:sldIdLst>
   <p:sldSz cx="12188952" cy="6858000" type="screen4x3"/>
   <p:notesSz cx="6858000" cy="9144000"/>
@@ -515,7 +516,7 @@
           <a:lstStyle/>
           <a:p>
             <a:r>
-              <a:t>Siehe Trainerhandbuch (Sektion 3) für Moderationshinweise, Timing und erwartete Teilnehmerreaktionen.</a:t>
+              <a:t>Agenda aus dem Ablaufplan (Sektion 3.1). Timing und Pausen siehe Trainerhandbuch.</a:t>
             </a:r>
           </a:p>
         </p:txBody>
@@ -961,76 +962,6 @@
 </file>
 
 <file path=ppt/notesSlides/notesSlide8.xml><?xml version="1.0" encoding="utf-8"?>
-<p:notes xmlns:a="http://schemas.openxmlformats.org/drawingml/2006/main" xmlns:p="http://schemas.openxmlformats.org/presentationml/2006/main" xmlns:r="http://schemas.openxmlformats.org/officeDocument/2006/relationships">
-  <p:cSld>
-    <p:spTree>
-      <p:nvGrpSpPr>
-        <p:cNvPr id="1" name=""/>
-        <p:cNvGrpSpPr/>
-        <p:nvPr/>
-      </p:nvGrpSpPr>
-      <p:grpSpPr>
-        <a:xfrm>
-          <a:off x="0" y="0"/>
-          <a:ext cx="0" cy="0"/>
-          <a:chOff x="0" y="0"/>
-          <a:chExt cx="0" cy="0"/>
-        </a:xfrm>
-      </p:grpSpPr>
-      <p:sp>
-        <p:nvSpPr>
-          <p:cNvPr id="2" name="Slide Image Placeholder 1"/>
-          <p:cNvSpPr>
-            <a:spLocks noGrp="1"/>
-          </p:cNvSpPr>
-          <p:nvPr>
-            <p:ph type="sldImg" idx="2"/>
-          </p:nvPr>
-        </p:nvSpPr>
-        <p:spPr/>
-      </p:sp>
-      <p:sp>
-        <p:nvSpPr>
-          <p:cNvPr id="3" name="Notes Placeholder 2"/>
-          <p:cNvSpPr>
-            <a:spLocks noGrp="1"/>
-          </p:cNvSpPr>
-          <p:nvPr>
-            <p:ph type="body" idx="3" sz="quarter"/>
-          </p:nvPr>
-        </p:nvSpPr>
-        <p:spPr/>
-        <p:txBody>
-          <a:bodyPr/>
-          <a:lstStyle/>
-          <a:p>
-            <a:r>
-              <a:t>Siehe Trainerhandbuch (Sektion 3) für Moderationshinweise, Timing und erwartete Teilnehmerreaktionen.</a:t>
-            </a:r>
-          </a:p>
-        </p:txBody>
-      </p:sp>
-      <p:sp>
-        <p:nvSpPr>
-          <p:cNvPr id="4" name="Slide Number Placeholder 3"/>
-          <p:cNvSpPr>
-            <a:spLocks noGrp="1"/>
-          </p:cNvSpPr>
-          <p:nvPr>
-            <p:ph type="sldNum" idx="5" sz="quarter"/>
-          </p:nvPr>
-        </p:nvSpPr>
-        <p:spPr/>
-      </p:sp>
-    </p:spTree>
-  </p:cSld>
-  <p:clrMapOvr>
-    <a:masterClrMapping/>
-  </p:clrMapOvr>
-</p:notes>
-</file>
-
-<file path=ppt/notesSlides/notesSlide9.xml><?xml version="1.0" encoding="utf-8"?>
 <p:notes xmlns:a="http://schemas.openxmlformats.org/drawingml/2006/main" xmlns:p="http://schemas.openxmlformats.org/presentationml/2006/main" xmlns:r="http://schemas.openxmlformats.org/officeDocument/2006/relationships">
   <p:cSld>
     <p:spTree>
@@ -4893,7 +4824,7 @@
                 </a:solidFill>
                 <a:latin typeface="Source Serif 4"/>
               </a:rPr>
-              <a:t>Hinweis: Hybride und standortverteilte Teams</a:t>
+              <a:t>Methode 4: Lunch-and-Learn (15 Minuten)</a:t>
             </a:r>
           </a:p>
         </p:txBody>
@@ -4929,13 +4860,51 @@
               </a:spcAft>
             </a:pPr>
             <a:r>
-              <a:rPr sz="1200">
+              <a:rPr sz="1300">
                 <a:solidFill>
                   <a:srgbClr val="3D5466"/>
                 </a:solidFill>
                 <a:latin typeface="Arial"/>
               </a:rPr>
-              <a:t>Viele VR-Bank-FK-Teams arbeiten inzwischen über mehrere Geschäftsstellen verteilt oder hybrid. Die o.g. Methoden funktionieren auch auf Distanz – mit kleinen Anpassungen:</a:t>
+              <a:t>▸  Was: Kurzes, informelles Wissensformat – ein Berater erklärt an einem konkreten Beispiel eine Technik oder ein Konzept.</a:t>
+            </a:r>
+          </a:p>
+          <a:p>
+            <a:pPr>
+              <a:spcBef>
+                <a:spcPts val="400"/>
+              </a:spcBef>
+              <a:spcAft>
+                <a:spcPts val="200"/>
+              </a:spcAft>
+            </a:pPr>
+            <a:r>
+              <a:rPr sz="1300">
+                <a:solidFill>
+                  <a:srgbClr val="3D5466"/>
+                </a:solidFill>
+                <a:latin typeface="Arial"/>
+              </a:rPr>
+              <a:t>▸  Wann: Spontan oder geplant, 1–2× pro Monat.</a:t>
+            </a:r>
+          </a:p>
+          <a:p>
+            <a:pPr>
+              <a:spcBef>
+                <a:spcPts val="400"/>
+              </a:spcBef>
+              <a:spcAft>
+                <a:spcPts val="200"/>
+              </a:spcAft>
+            </a:pPr>
+            <a:r>
+              <a:rPr sz="1300">
+                <a:solidFill>
+                  <a:srgbClr val="3D5466"/>
+                </a:solidFill>
+                <a:latin typeface="Arial"/>
+              </a:rPr>
+              <a:t>▸  Qualitätsfaktor: Keine Präsentation, keine Vorbereitung – nur Erzählen + Fragen.</a:t>
             </a:r>
           </a:p>
         </p:txBody>
@@ -5273,7 +5242,7 @@
                 </a:solidFill>
                 <a:latin typeface="Source Serif 4"/>
               </a:rPr>
-              <a:t>Methode 5: Reverse Mentoring</a:t>
+              <a:t>Hinweis: Hybride und standortverteilte Teams</a:t>
             </a:r>
           </a:p>
         </p:txBody>
@@ -5309,222 +5278,13 @@
               </a:spcAft>
             </a:pPr>
             <a:r>
-              <a:rPr sz="1200">
+              <a:rPr sz="1300">
                 <a:solidFill>
                   <a:srgbClr val="3D5466"/>
                 </a:solidFill>
                 <a:latin typeface="Arial"/>
               </a:rPr>
-              <a:t>Was: Jüngere/neuere Berater unterweisen erfahrene Berater in Digitalthemen oder neuen Systemfunktionen.</a:t>
-            </a:r>
-          </a:p>
-          <a:p>
-            <a:pPr>
-              <a:spcBef>
-                <a:spcPts val="400"/>
-              </a:spcBef>
-              <a:spcAft>
-                <a:spcPts val="200"/>
-              </a:spcAft>
-            </a:pPr>
-            <a:r>
-              <a:rPr sz="1200">
-                <a:solidFill>
-                  <a:srgbClr val="3D5466"/>
-                </a:solidFill>
-                <a:latin typeface="Arial"/>
-              </a:rPr>
-              <a:t>Wann: Bei Einführung neuer Tools (z.B. agree-Updates, CRM-Erweiterungen).</a:t>
-            </a:r>
-          </a:p>
-          <a:p>
-            <a:pPr>
-              <a:spcBef>
-                <a:spcPts val="400"/>
-              </a:spcBef>
-              <a:spcAft>
-                <a:spcPts val="200"/>
-              </a:spcAft>
-            </a:pPr>
-            <a:r>
-              <a:rPr sz="1200">
-                <a:solidFill>
-                  <a:srgbClr val="3D5466"/>
-                </a:solidFill>
-                <a:latin typeface="Arial"/>
-              </a:rPr>
-              <a:t>Nutzen: Durchbricht die Hierarchie als Wissensbarriere; wertet beide Seiten auf.</a:t>
-            </a:r>
-          </a:p>
-          <a:p>
-            <a:pPr>
-              <a:spcBef>
-                <a:spcPts val="400"/>
-              </a:spcBef>
-              <a:spcAft>
-                <a:spcPts val="200"/>
-              </a:spcAft>
-            </a:pPr>
-            <a:r>
-              <a:rPr sz="1200">
-                <a:solidFill>
-                  <a:srgbClr val="3D5466"/>
-                </a:solidFill>
-                <a:latin typeface="Arial"/>
-              </a:rPr>
-              <a:t>## 4.6 Typische Transferbarrieren und Gegenmaßnahmen</a:t>
-            </a:r>
-          </a:p>
-          <a:p>
-            <a:pPr>
-              <a:spcBef>
-                <a:spcPts val="400"/>
-              </a:spcBef>
-              <a:spcAft>
-                <a:spcPts val="200"/>
-              </a:spcAft>
-            </a:pPr>
-            <a:r>
-              <a:rPr sz="1200">
-                <a:solidFill>
-                  <a:srgbClr val="3D5466"/>
-                </a:solidFill>
-                <a:latin typeface="Arial"/>
-              </a:rPr>
-              <a:t>## 4.7 Praxiscase: Team Ostbayern</a:t>
-            </a:r>
-          </a:p>
-          <a:p>
-            <a:pPr>
-              <a:spcBef>
-                <a:spcPts val="400"/>
-              </a:spcBef>
-              <a:spcAft>
-                <a:spcPts val="200"/>
-              </a:spcAft>
-            </a:pPr>
-            <a:r>
-              <a:rPr sz="1200">
-                <a:solidFill>
-                  <a:srgbClr val="3D5466"/>
-                </a:solidFill>
-                <a:latin typeface="Arial"/>
-              </a:rPr>
-              <a:t>Ausgangssituation</a:t>
-            </a:r>
-          </a:p>
-          <a:p>
-            <a:pPr>
-              <a:spcBef>
-                <a:spcPts val="400"/>
-              </a:spcBef>
-              <a:spcAft>
-                <a:spcPts val="200"/>
-              </a:spcAft>
-            </a:pPr>
-            <a:r>
-              <a:rPr sz="1200">
-                <a:solidFill>
-                  <a:srgbClr val="3D5466"/>
-                </a:solidFill>
-                <a:latin typeface="Arial"/>
-              </a:rPr>
-              <a:t>Gleichzeitig sind drei jüngere Berater seit 2–4 Jahren im Team. Sie beherrschen agree gut, kennen aber die regionalen Besonderheiten kaum.</a:t>
-            </a:r>
-          </a:p>
-          <a:p>
-            <a:pPr>
-              <a:spcBef>
-                <a:spcPts val="400"/>
-              </a:spcBef>
-              <a:spcAft>
-                <a:spcPts val="200"/>
-              </a:spcAft>
-            </a:pPr>
-            <a:r>
-              <a:rPr sz="1200">
-                <a:solidFill>
-                  <a:srgbClr val="3D5466"/>
-                </a:solidFill>
-                <a:latin typeface="Arial"/>
-              </a:rPr>
-              <a:t>Maßnahmen von Claudia Möller</a:t>
-            </a:r>
-          </a:p>
-          <a:p>
-            <a:pPr>
-              <a:spcBef>
-                <a:spcPts val="400"/>
-              </a:spcBef>
-              <a:spcAft>
-                <a:spcPts val="200"/>
-              </a:spcAft>
-            </a:pPr>
-            <a:r>
-              <a:rPr sz="1200">
-                <a:solidFill>
-                  <a:srgbClr val="3D5466"/>
-                </a:solidFill>
-                <a:latin typeface="Arial"/>
-              </a:rPr>
-              <a:t>Schritt 1 – Wissenslandkarte erstellen (Monat 1):</a:t>
-            </a:r>
-          </a:p>
-          <a:p>
-            <a:pPr>
-              <a:spcBef>
-                <a:spcPts val="400"/>
-              </a:spcBef>
-              <a:spcAft>
-                <a:spcPts val="200"/>
-              </a:spcAft>
-            </a:pPr>
-            <a:r>
-              <a:rPr sz="1200">
-                <a:solidFill>
-                  <a:srgbClr val="3D5466"/>
-                </a:solidFill>
-                <a:latin typeface="Arial"/>
-              </a:rPr>
-              <a:t>Schritt 2 – Tandem-Besuche einführen (Monat 2–3):</a:t>
-            </a:r>
-          </a:p>
-          <a:p>
-            <a:pPr>
-              <a:spcBef>
-                <a:spcPts val="400"/>
-              </a:spcBef>
-              <a:spcAft>
-                <a:spcPts val="200"/>
-              </a:spcAft>
-            </a:pPr>
-            <a:r>
-              <a:rPr sz="1200">
-                <a:solidFill>
-                  <a:srgbClr val="3D5466"/>
-                </a:solidFill>
-                <a:latin typeface="Arial"/>
-              </a:rPr>
-              <a:t>Schritt 3 – Monatliche Fallbesprechung (ab Monat 2):</a:t>
-            </a:r>
-          </a:p>
-          <a:p>
-            <a:pPr>
-              <a:spcBef>
-                <a:spcPts val="400"/>
-              </a:spcBef>
-              <a:spcAft>
-                <a:spcPts val="200"/>
-              </a:spcAft>
-            </a:pPr>
-            <a:r>
-              <a:rPr sz="1200">
-                <a:solidFill>
-                  <a:srgbClr val="3D5466"/>
-                </a:solidFill>
-                <a:latin typeface="Arial"/>
-              </a:rPr>
-              <a:t>Ergebnis nach 6 Monaten</a:t>
+              <a:t>▸  Viele VR-Bank-FK-Teams arbeiten inzwischen über mehrere Geschäftsstellen verteilt oder hybrid. Die o.g. Methoden funktionieren auch auf Distanz – mit kleinen Anpassungen:</a:t>
             </a:r>
           </a:p>
         </p:txBody>
@@ -5862,14 +5622,265 @@
                 </a:solidFill>
                 <a:latin typeface="Source Serif 4"/>
               </a:rPr>
-              <a:t>Arbeitsblatt 1: Wissenslandkarte – eigener Steckbrief</a:t>
-            </a:r>
-          </a:p>
-        </p:txBody>
-      </p:sp>
-      <p:sp>
-        <p:nvSpPr>
-          <p:cNvPr id="8" name="Rectangle 7"/>
+              <a:t>Methode 5: Reverse Mentoring</a:t>
+            </a:r>
+          </a:p>
+        </p:txBody>
+      </p:sp>
+      <p:sp>
+        <p:nvSpPr>
+          <p:cNvPr id="8" name="TextBox 7"/>
+          <p:cNvSpPr txBox="1"/>
+          <p:nvPr/>
+        </p:nvSpPr>
+        <p:spPr>
+          <a:xfrm>
+            <a:off x="685800" y="1417320"/>
+            <a:ext cx="10817352" cy="5029200"/>
+          </a:xfrm>
+          <a:prstGeom prst="rect">
+            <a:avLst/>
+          </a:prstGeom>
+          <a:noFill/>
+        </p:spPr>
+        <p:txBody>
+          <a:bodyPr wrap="square">
+            <a:spAutoFit/>
+          </a:bodyPr>
+          <a:lstStyle/>
+          <a:p>
+            <a:pPr>
+              <a:spcBef>
+                <a:spcPts val="400"/>
+              </a:spcBef>
+              <a:spcAft>
+                <a:spcPts val="200"/>
+              </a:spcAft>
+            </a:pPr>
+            <a:r>
+              <a:rPr sz="1300">
+                <a:solidFill>
+                  <a:srgbClr val="3D5466"/>
+                </a:solidFill>
+                <a:latin typeface="Arial"/>
+              </a:rPr>
+              <a:t>▸  Was: Jüngere/neuere Berater unterweisen erfahrene Berater in Digitalthemen oder neuen Systemfunktionen.</a:t>
+            </a:r>
+          </a:p>
+          <a:p>
+            <a:pPr>
+              <a:spcBef>
+                <a:spcPts val="400"/>
+              </a:spcBef>
+              <a:spcAft>
+                <a:spcPts val="200"/>
+              </a:spcAft>
+            </a:pPr>
+            <a:r>
+              <a:rPr sz="1300">
+                <a:solidFill>
+                  <a:srgbClr val="3D5466"/>
+                </a:solidFill>
+                <a:latin typeface="Arial"/>
+              </a:rPr>
+              <a:t>▸  Wann: Bei Einführung neuer Tools (z.B. agree-Updates, CRM-Erweiterungen).</a:t>
+            </a:r>
+          </a:p>
+          <a:p>
+            <a:pPr>
+              <a:spcBef>
+                <a:spcPts val="400"/>
+              </a:spcBef>
+              <a:spcAft>
+                <a:spcPts val="200"/>
+              </a:spcAft>
+            </a:pPr>
+            <a:r>
+              <a:rPr sz="1300">
+                <a:solidFill>
+                  <a:srgbClr val="3D5466"/>
+                </a:solidFill>
+                <a:latin typeface="Arial"/>
+              </a:rPr>
+              <a:t>▸  Nutzen: Durchbricht die Hierarchie als Wissensbarriere; wertet beide Seiten auf.</a:t>
+            </a:r>
+          </a:p>
+          <a:p>
+            <a:pPr>
+              <a:spcBef>
+                <a:spcPts val="400"/>
+              </a:spcBef>
+              <a:spcAft>
+                <a:spcPts val="200"/>
+              </a:spcAft>
+            </a:pPr>
+            <a:r>
+              <a:rPr sz="1300">
+                <a:solidFill>
+                  <a:srgbClr val="3D5466"/>
+                </a:solidFill>
+                <a:latin typeface="Arial"/>
+              </a:rPr>
+              <a:t>▸  ## 4.6 Typische Transferbarrieren und Gegenmaßnahmen</a:t>
+            </a:r>
+          </a:p>
+          <a:p>
+            <a:pPr>
+              <a:spcBef>
+                <a:spcPts val="400"/>
+              </a:spcBef>
+              <a:spcAft>
+                <a:spcPts val="200"/>
+              </a:spcAft>
+            </a:pPr>
+            <a:r>
+              <a:rPr sz="1300">
+                <a:solidFill>
+                  <a:srgbClr val="3D5466"/>
+                </a:solidFill>
+                <a:latin typeface="Arial"/>
+              </a:rPr>
+              <a:t>▸  ## 4.7 Praxiscase: Team Ostbayern</a:t>
+            </a:r>
+          </a:p>
+          <a:p>
+            <a:pPr>
+              <a:spcBef>
+                <a:spcPts val="400"/>
+              </a:spcBef>
+              <a:spcAft>
+                <a:spcPts val="200"/>
+              </a:spcAft>
+            </a:pPr>
+            <a:r>
+              <a:rPr sz="1300">
+                <a:solidFill>
+                  <a:srgbClr val="3D5466"/>
+                </a:solidFill>
+                <a:latin typeface="Arial"/>
+              </a:rPr>
+              <a:t>▸  Ausgangssituation</a:t>
+            </a:r>
+          </a:p>
+          <a:p>
+            <a:pPr>
+              <a:spcBef>
+                <a:spcPts val="400"/>
+              </a:spcBef>
+              <a:spcAft>
+                <a:spcPts val="200"/>
+              </a:spcAft>
+            </a:pPr>
+            <a:r>
+              <a:rPr sz="1300">
+                <a:solidFill>
+                  <a:srgbClr val="3D5466"/>
+                </a:solidFill>
+                <a:latin typeface="Arial"/>
+              </a:rPr>
+              <a:t>▸  Gleichzeitig sind drei jüngere Berater seit 2–4 Jahren im Team. Sie beherrschen agree gut, kennen aber die regionalen Besonderheiten kaum.</a:t>
+            </a:r>
+          </a:p>
+          <a:p>
+            <a:pPr>
+              <a:spcBef>
+                <a:spcPts val="400"/>
+              </a:spcBef>
+              <a:spcAft>
+                <a:spcPts val="200"/>
+              </a:spcAft>
+            </a:pPr>
+            <a:r>
+              <a:rPr sz="1300">
+                <a:solidFill>
+                  <a:srgbClr val="3D5466"/>
+                </a:solidFill>
+                <a:latin typeface="Arial"/>
+              </a:rPr>
+              <a:t>▸  Maßnahmen von Claudia Möller</a:t>
+            </a:r>
+          </a:p>
+          <a:p>
+            <a:pPr>
+              <a:spcBef>
+                <a:spcPts val="400"/>
+              </a:spcBef>
+              <a:spcAft>
+                <a:spcPts val="200"/>
+              </a:spcAft>
+            </a:pPr>
+            <a:r>
+              <a:rPr sz="1300">
+                <a:solidFill>
+                  <a:srgbClr val="3D5466"/>
+                </a:solidFill>
+                <a:latin typeface="Arial"/>
+              </a:rPr>
+              <a:t>▸  Schritt 1 – Wissenslandkarte erstellen (Monat 1):</a:t>
+            </a:r>
+          </a:p>
+          <a:p>
+            <a:pPr>
+              <a:spcBef>
+                <a:spcPts val="400"/>
+              </a:spcBef>
+              <a:spcAft>
+                <a:spcPts val="200"/>
+              </a:spcAft>
+            </a:pPr>
+            <a:r>
+              <a:rPr sz="1300">
+                <a:solidFill>
+                  <a:srgbClr val="3D5466"/>
+                </a:solidFill>
+                <a:latin typeface="Arial"/>
+              </a:rPr>
+              <a:t>▸  Schritt 2 – Tandem-Besuche einführen (Monat 2–3):</a:t>
+            </a:r>
+          </a:p>
+          <a:p>
+            <a:pPr>
+              <a:spcBef>
+                <a:spcPts val="400"/>
+              </a:spcBef>
+              <a:spcAft>
+                <a:spcPts val="200"/>
+              </a:spcAft>
+            </a:pPr>
+            <a:r>
+              <a:rPr sz="1300">
+                <a:solidFill>
+                  <a:srgbClr val="3D5466"/>
+                </a:solidFill>
+                <a:latin typeface="Arial"/>
+              </a:rPr>
+              <a:t>▸  Schritt 3 – Monatliche Fallbesprechung (ab Monat 2):</a:t>
+            </a:r>
+          </a:p>
+          <a:p>
+            <a:pPr>
+              <a:spcBef>
+                <a:spcPts val="400"/>
+              </a:spcBef>
+              <a:spcAft>
+                <a:spcPts val="200"/>
+              </a:spcAft>
+            </a:pPr>
+            <a:r>
+              <a:rPr sz="1300">
+                <a:solidFill>
+                  <a:srgbClr val="3D5466"/>
+                </a:solidFill>
+                <a:latin typeface="Arial"/>
+              </a:rPr>
+              <a:t>▸  Ergebnis nach 6 Monaten</a:t>
+            </a:r>
+          </a:p>
+        </p:txBody>
+      </p:sp>
+      <p:sp>
+        <p:nvSpPr>
+          <p:cNvPr id="9" name="Rectangle 8"/>
           <p:cNvSpPr/>
           <p:nvPr/>
         </p:nvSpPr>
@@ -5912,7 +5923,7 @@
       </p:sp>
       <p:sp>
         <p:nvSpPr>
-          <p:cNvPr id="9" name="TextBox 8"/>
+          <p:cNvPr id="10" name="TextBox 9"/>
           <p:cNvSpPr txBox="1"/>
           <p:nvPr/>
         </p:nvSpPr>
@@ -5978,7 +5989,7 @@
             <a:avLst/>
           </a:prstGeom>
           <a:solidFill>
-            <a:srgbClr val="EDEDF3"/>
+            <a:srgbClr val="FFFFFF"/>
           </a:solidFill>
           <a:ln>
             <a:noFill/>
@@ -6079,51 +6090,43 @@
                 </a:solidFill>
                 <a:latin typeface="JetBrains Mono"/>
               </a:rPr>
-              <a:t>M19  ·  INHALT</a:t>
-            </a:r>
-          </a:p>
-        </p:txBody>
-      </p:sp>
-      <p:sp>
-        <p:nvSpPr>
-          <p:cNvPr id="5" name="Rectangle 4"/>
-          <p:cNvSpPr/>
-          <p:nvPr/>
-        </p:nvSpPr>
-        <p:spPr>
-          <a:xfrm>
-            <a:off x="0" y="1234440"/>
-            <a:ext cx="12188952" cy="12700"/>
-          </a:xfrm>
-          <a:prstGeom prst="rect">
-            <a:avLst/>
-          </a:prstGeom>
-          <a:solidFill>
-            <a:srgbClr val="D8DFE4"/>
-          </a:solidFill>
-          <a:ln>
-            <a:noFill/>
-          </a:ln>
-        </p:spPr>
-        <p:style>
-          <a:lnRef idx="1">
-            <a:schemeClr val="accent1"/>
-          </a:lnRef>
-          <a:fillRef idx="3">
-            <a:schemeClr val="accent1"/>
-          </a:fillRef>
-          <a:effectRef idx="2">
-            <a:schemeClr val="accent1"/>
-          </a:effectRef>
-          <a:fontRef idx="minor">
-            <a:schemeClr val="lt1"/>
-          </a:fontRef>
-        </p:style>
-        <p:txBody>
-          <a:bodyPr rtlCol="0" anchor="ctr"/>
-          <a:lstStyle/>
-          <a:p>
-            <a:pPr algn="ctr"/>
+              <a:t>M19  ·  ÜBERSICHT</a:t>
+            </a:r>
+          </a:p>
+        </p:txBody>
+      </p:sp>
+      <p:sp>
+        <p:nvSpPr>
+          <p:cNvPr id="5" name="TextBox 4"/>
+          <p:cNvSpPr txBox="1"/>
+          <p:nvPr/>
+        </p:nvSpPr>
+        <p:spPr>
+          <a:xfrm>
+            <a:off x="685800" y="502920"/>
+            <a:ext cx="10817352" cy="594360"/>
+          </a:xfrm>
+          <a:prstGeom prst="rect">
+            <a:avLst/>
+          </a:prstGeom>
+          <a:noFill/>
+        </p:spPr>
+        <p:txBody>
+          <a:bodyPr wrap="square">
+            <a:spAutoFit/>
+          </a:bodyPr>
+          <a:lstStyle/>
+          <a:p>
+            <a:pPr algn="l"/>
+            <a:r>
+              <a:rPr sz="2000" b="1" i="0">
+                <a:solidFill>
+                  <a:srgbClr val="1F2C56"/>
+                </a:solidFill>
+                <a:latin typeface="Source Serif 4"/>
+              </a:rPr>
+              <a:t>Arbeitsblatt 1: Wissenslandkarte – eigener Steckbrief</a:t>
+            </a:r>
           </a:p>
         </p:txBody>
       </p:sp>
@@ -6135,8 +6138,8 @@
         </p:nvSpPr>
         <p:spPr>
           <a:xfrm>
-            <a:off x="685800" y="502920"/>
-            <a:ext cx="36576" cy="658368"/>
+            <a:off x="685800" y="1143000"/>
+            <a:ext cx="10817352" cy="25400"/>
           </a:xfrm>
           <a:prstGeom prst="rect">
             <a:avLst/>
@@ -6170,86 +6173,221 @@
           </a:p>
         </p:txBody>
       </p:sp>
-      <p:sp>
-        <p:nvSpPr>
-          <p:cNvPr id="7" name="TextBox 6"/>
-          <p:cNvSpPr txBox="1"/>
-          <p:nvPr/>
-        </p:nvSpPr>
-        <p:spPr>
-          <a:xfrm>
-            <a:off x="813816" y="502920"/>
-            <a:ext cx="10634472" cy="685800"/>
-          </a:xfrm>
-          <a:prstGeom prst="rect">
-            <a:avLst/>
-          </a:prstGeom>
-          <a:noFill/>
-        </p:spPr>
-        <p:txBody>
-          <a:bodyPr wrap="square">
-            <a:spAutoFit/>
-          </a:bodyPr>
-          <a:lstStyle/>
-          <a:p>
-            <a:pPr algn="l"/>
-            <a:r>
-              <a:rPr sz="2400" b="1" i="0">
-                <a:solidFill>
-                  <a:srgbClr val="1F2C56"/>
-                </a:solidFill>
-                <a:latin typeface="Source Serif 4"/>
-              </a:rPr>
-              <a:t>Arbeitsblatt 2: Fallbesprechung vorbereiten</a:t>
-            </a:r>
-          </a:p>
-        </p:txBody>
-      </p:sp>
-      <p:sp>
-        <p:nvSpPr>
-          <p:cNvPr id="8" name="TextBox 7"/>
-          <p:cNvSpPr txBox="1"/>
-          <p:nvPr/>
-        </p:nvSpPr>
-        <p:spPr>
-          <a:xfrm>
-            <a:off x="685800" y="1417320"/>
-            <a:ext cx="10817352" cy="5029200"/>
-          </a:xfrm>
-          <a:prstGeom prst="rect">
-            <a:avLst/>
-          </a:prstGeom>
-          <a:noFill/>
-        </p:spPr>
-        <p:txBody>
-          <a:bodyPr wrap="square">
-            <a:spAutoFit/>
-          </a:bodyPr>
-          <a:lstStyle/>
-          <a:p>
-            <a:pPr>
-              <a:spcBef>
-                <a:spcPts val="400"/>
-              </a:spcBef>
-              <a:spcAft>
-                <a:spcPts val="200"/>
-              </a:spcAft>
-            </a:pPr>
-            <a:r>
-              <a:rPr sz="1200">
-                <a:solidFill>
-                  <a:srgbClr val="3D5466"/>
-                </a:solidFill>
-                <a:latin typeface="Arial"/>
-              </a:rPr>
-              <a:t>(für den Fallbringer)</a:t>
-            </a:r>
-          </a:p>
-        </p:txBody>
-      </p:sp>
-      <p:sp>
-        <p:nvSpPr>
-          <p:cNvPr id="9" name="Rectangle 8"/>
+      <p:graphicFrame>
+        <p:nvGraphicFramePr>
+          <p:cNvPr id="7" name="Table 6"/>
+          <p:cNvGraphicFramePr>
+            <a:graphicFrameLocks noGrp="1"/>
+          </p:cNvGraphicFramePr>
+          <p:nvPr/>
+        </p:nvGraphicFramePr>
+        <p:xfrm>
+          <a:off x="685800" y="1417320"/>
+          <a:ext cx="10817352" cy="2304288"/>
+        </p:xfrm>
+        <a:graphic>
+          <a:graphicData uri="http://schemas.openxmlformats.org/drawingml/2006/table">
+            <a:tbl>
+              <a:tblPr firstRow="1" bandRow="1">
+                <a:tableStyleId>{5C22544A-7EE6-4342-B048-85BDC9FD1C3A}</a:tableStyleId>
+              </a:tblPr>
+              <a:tblGrid>
+                <a:gridCol w="5408676"/>
+                <a:gridCol w="5408676"/>
+              </a:tblGrid>
+              <a:tr h="384048">
+                <a:tc>
+                  <a:txBody>
+                    <a:bodyPr/>
+                    <a:lstStyle/>
+                    <a:p>
+                      <a:r>
+                        <a:rPr sz="1100" b="1">
+                          <a:solidFill>
+                            <a:srgbClr val="FFFFFF"/>
+                          </a:solidFill>
+                          <a:latin typeface="Arial"/>
+                        </a:rPr>
+                        <a:t>Frage</a:t>
+                      </a:r>
+                    </a:p>
+                  </a:txBody>
+                  <a:tcPr>
+                    <a:solidFill>
+                      <a:srgbClr val="1F2C56"/>
+                    </a:solidFill>
+                  </a:tcPr>
+                </a:tc>
+                <a:tc>
+                  <a:txBody>
+                    <a:bodyPr/>
+                    <a:lstStyle/>
+                    <a:p>
+                      <a:r>
+                        <a:rPr sz="1100" b="1">
+                          <a:solidFill>
+                            <a:srgbClr val="FFFFFF"/>
+                          </a:solidFill>
+                          <a:latin typeface="Arial"/>
+                        </a:rPr>
+                        <a:t>Ihre Antwort</a:t>
+                      </a:r>
+                    </a:p>
+                  </a:txBody>
+                  <a:tcPr>
+                    <a:solidFill>
+                      <a:srgbClr val="1F2C56"/>
+                    </a:solidFill>
+                  </a:tcPr>
+                </a:tc>
+              </a:tr>
+              <a:tr h="384048">
+                <a:tc>
+                  <a:txBody>
+                    <a:bodyPr/>
+                    <a:lstStyle/>
+                    <a:p>
+                      <a:r>
+                        <a:rPr sz="1050">
+                          <a:solidFill>
+                            <a:srgbClr val="3D5466"/>
+                          </a:solidFill>
+                          <a:latin typeface="Arial"/>
+                        </a:rPr>
+                        <a:t>Meine Branchenschwerpunkte (Top 3)</a:t>
+                      </a:r>
+                    </a:p>
+                  </a:txBody>
+                  <a:tcPr/>
+                </a:tc>
+                <a:tc>
+                  <a:txBody>
+                    <a:bodyPr/>
+                    <a:lstStyle/>
+                    <a:p/>
+                  </a:txBody>
+                  <a:tcPr/>
+                </a:tc>
+              </a:tr>
+              <a:tr h="384048">
+                <a:tc>
+                  <a:txBody>
+                    <a:bodyPr/>
+                    <a:lstStyle/>
+                    <a:p>
+                      <a:r>
+                        <a:rPr sz="1050">
+                          <a:solidFill>
+                            <a:srgbClr val="3D5466"/>
+                          </a:solidFill>
+                          <a:latin typeface="Arial"/>
+                        </a:rPr>
+                        <a:t>Wissen, das ich habe und andere kaum (implizit)</a:t>
+                      </a:r>
+                    </a:p>
+                  </a:txBody>
+                  <a:tcPr/>
+                </a:tc>
+                <a:tc>
+                  <a:txBody>
+                    <a:bodyPr/>
+                    <a:lstStyle/>
+                    <a:p/>
+                  </a:txBody>
+                  <a:tcPr/>
+                </a:tc>
+              </a:tr>
+              <a:tr h="384048">
+                <a:tc>
+                  <a:txBody>
+                    <a:bodyPr/>
+                    <a:lstStyle/>
+                    <a:p>
+                      <a:r>
+                        <a:rPr sz="1050">
+                          <a:solidFill>
+                            <a:srgbClr val="3D5466"/>
+                          </a:solidFill>
+                          <a:latin typeface="Arial"/>
+                        </a:rPr>
+                        <a:t>Erfahrungen, die ich gerne weitergeben würde</a:t>
+                      </a:r>
+                    </a:p>
+                  </a:txBody>
+                  <a:tcPr/>
+                </a:tc>
+                <a:tc>
+                  <a:txBody>
+                    <a:bodyPr/>
+                    <a:lstStyle/>
+                    <a:p/>
+                  </a:txBody>
+                  <a:tcPr/>
+                </a:tc>
+              </a:tr>
+              <a:tr h="384048">
+                <a:tc>
+                  <a:txBody>
+                    <a:bodyPr/>
+                    <a:lstStyle/>
+                    <a:p>
+                      <a:r>
+                        <a:rPr sz="1050">
+                          <a:solidFill>
+                            <a:srgbClr val="3D5466"/>
+                          </a:solidFill>
+                          <a:latin typeface="Arial"/>
+                        </a:rPr>
+                        <a:t>Themen, bei denen ich von anderen lernen möchte</a:t>
+                      </a:r>
+                    </a:p>
+                  </a:txBody>
+                  <a:tcPr/>
+                </a:tc>
+                <a:tc>
+                  <a:txBody>
+                    <a:bodyPr/>
+                    <a:lstStyle/>
+                    <a:p/>
+                  </a:txBody>
+                  <a:tcPr/>
+                </a:tc>
+              </a:tr>
+              <a:tr h="384048">
+                <a:tc>
+                  <a:txBody>
+                    <a:bodyPr/>
+                    <a:lstStyle/>
+                    <a:p>
+                      <a:r>
+                        <a:rPr sz="1050">
+                          <a:solidFill>
+                            <a:srgbClr val="3D5466"/>
+                          </a:solidFill>
+                          <a:latin typeface="Arial"/>
+                        </a:rPr>
+                        <a:t>Kollegen, die ich gerne als Tandem-Partner hätte</a:t>
+                      </a:r>
+                    </a:p>
+                  </a:txBody>
+                  <a:tcPr/>
+                </a:tc>
+                <a:tc>
+                  <a:txBody>
+                    <a:bodyPr/>
+                    <a:lstStyle/>
+                    <a:p/>
+                  </a:txBody>
+                  <a:tcPr/>
+                </a:tc>
+              </a:tr>
+            </a:tbl>
+          </a:graphicData>
+        </a:graphic>
+      </p:graphicFrame>
+      <p:sp>
+        <p:nvSpPr>
+          <p:cNvPr id="8" name="Rectangle 7"/>
           <p:cNvSpPr/>
           <p:nvPr/>
         </p:nvSpPr>
@@ -6292,7 +6430,7 @@
       </p:sp>
       <p:sp>
         <p:nvSpPr>
-          <p:cNvPr id="10" name="TextBox 9"/>
+          <p:cNvPr id="9" name="TextBox 8"/>
           <p:cNvSpPr txBox="1"/>
           <p:nvPr/>
         </p:nvSpPr>
@@ -6321,6 +6459,41 @@
                 <a:latin typeface="JetBrains Mono"/>
               </a:rPr>
               <a:t>Benedikt Zoller Coaching  ·  FKB Campus  ·  M19</a:t>
+            </a:r>
+          </a:p>
+        </p:txBody>
+      </p:sp>
+      <p:sp>
+        <p:nvSpPr>
+          <p:cNvPr id="10" name="TextBox 9"/>
+          <p:cNvSpPr txBox="1"/>
+          <p:nvPr/>
+        </p:nvSpPr>
+        <p:spPr>
+          <a:xfrm>
+            <a:off x="7176211" y="6583680"/>
+            <a:ext cx="4326940" cy="256032"/>
+          </a:xfrm>
+          <a:prstGeom prst="rect">
+            <a:avLst/>
+          </a:prstGeom>
+          <a:noFill/>
+        </p:spPr>
+        <p:txBody>
+          <a:bodyPr wrap="none">
+            <a:spAutoFit/>
+          </a:bodyPr>
+          <a:lstStyle/>
+          <a:p>
+            <a:pPr algn="r"/>
+            <a:r>
+              <a:rPr sz="700">
+                <a:solidFill>
+                  <a:srgbClr val="A0B4D2"/>
+                </a:solidFill>
+                <a:latin typeface="JetBrains Mono"/>
+              </a:rPr>
+              <a:t>Übersicht</a:t>
             </a:r>
           </a:p>
         </p:txBody>
@@ -6580,14 +6753,56 @@
                 </a:solidFill>
                 <a:latin typeface="Source Serif 4"/>
               </a:rPr>
-              <a:t>Arbeitsblatt 3: Wissenstransfer-Maßnahmenplan</a:t>
-            </a:r>
-          </a:p>
-        </p:txBody>
-      </p:sp>
-      <p:sp>
-        <p:nvSpPr>
-          <p:cNvPr id="8" name="Rectangle 7"/>
+              <a:t>Arbeitsblatt 2: Fallbesprechung vorbereiten</a:t>
+            </a:r>
+          </a:p>
+        </p:txBody>
+      </p:sp>
+      <p:sp>
+        <p:nvSpPr>
+          <p:cNvPr id="8" name="TextBox 7"/>
+          <p:cNvSpPr txBox="1"/>
+          <p:nvPr/>
+        </p:nvSpPr>
+        <p:spPr>
+          <a:xfrm>
+            <a:off x="685800" y="1417320"/>
+            <a:ext cx="10817352" cy="5029200"/>
+          </a:xfrm>
+          <a:prstGeom prst="rect">
+            <a:avLst/>
+          </a:prstGeom>
+          <a:noFill/>
+        </p:spPr>
+        <p:txBody>
+          <a:bodyPr wrap="square">
+            <a:spAutoFit/>
+          </a:bodyPr>
+          <a:lstStyle/>
+          <a:p>
+            <a:pPr>
+              <a:spcBef>
+                <a:spcPts val="400"/>
+              </a:spcBef>
+              <a:spcAft>
+                <a:spcPts val="200"/>
+              </a:spcAft>
+            </a:pPr>
+            <a:r>
+              <a:rPr sz="1300">
+                <a:solidFill>
+                  <a:srgbClr val="3D5466"/>
+                </a:solidFill>
+                <a:latin typeface="Arial"/>
+              </a:rPr>
+              <a:t>▸  (für den Fallbringer)</a:t>
+            </a:r>
+          </a:p>
+        </p:txBody>
+      </p:sp>
+      <p:sp>
+        <p:nvSpPr>
+          <p:cNvPr id="9" name="Rectangle 8"/>
           <p:cNvSpPr/>
           <p:nvPr/>
         </p:nvSpPr>
@@ -6630,7 +6845,7 @@
       </p:sp>
       <p:sp>
         <p:nvSpPr>
-          <p:cNvPr id="9" name="TextBox 8"/>
+          <p:cNvPr id="10" name="TextBox 9"/>
           <p:cNvSpPr txBox="1"/>
           <p:nvPr/>
         </p:nvSpPr>
@@ -6659,6 +6874,737 @@
                 <a:latin typeface="JetBrains Mono"/>
               </a:rPr>
               <a:t>Benedikt Zoller Coaching  ·  FKB Campus  ·  M19</a:t>
+            </a:r>
+          </a:p>
+        </p:txBody>
+      </p:sp>
+    </p:spTree>
+  </p:cSld>
+  <p:clrMapOvr>
+    <a:masterClrMapping/>
+  </p:clrMapOvr>
+</p:sld>
+</file>
+
+<file path=ppt/slides/slide15.xml><?xml version="1.0" encoding="utf-8"?>
+<p:sld xmlns:a="http://schemas.openxmlformats.org/drawingml/2006/main" xmlns:p="http://schemas.openxmlformats.org/presentationml/2006/main" xmlns:r="http://schemas.openxmlformats.org/officeDocument/2006/relationships">
+  <p:cSld>
+    <p:spTree>
+      <p:nvGrpSpPr>
+        <p:cNvPr id="1" name=""/>
+        <p:cNvGrpSpPr/>
+        <p:nvPr/>
+      </p:nvGrpSpPr>
+      <p:grpSpPr/>
+      <p:sp>
+        <p:nvSpPr>
+          <p:cNvPr id="2" name="Rectangle 1"/>
+          <p:cNvSpPr/>
+          <p:nvPr/>
+        </p:nvSpPr>
+        <p:spPr>
+          <a:xfrm>
+            <a:off x="0" y="0"/>
+            <a:ext cx="12188952" cy="6858000"/>
+          </a:xfrm>
+          <a:prstGeom prst="rect">
+            <a:avLst/>
+          </a:prstGeom>
+          <a:solidFill>
+            <a:srgbClr val="FFFFFF"/>
+          </a:solidFill>
+          <a:ln>
+            <a:noFill/>
+          </a:ln>
+        </p:spPr>
+        <p:style>
+          <a:lnRef idx="1">
+            <a:schemeClr val="accent1"/>
+          </a:lnRef>
+          <a:fillRef idx="3">
+            <a:schemeClr val="accent1"/>
+          </a:fillRef>
+          <a:effectRef idx="2">
+            <a:schemeClr val="accent1"/>
+          </a:effectRef>
+          <a:fontRef idx="minor">
+            <a:schemeClr val="lt1"/>
+          </a:fontRef>
+        </p:style>
+        <p:txBody>
+          <a:bodyPr rtlCol="0" anchor="ctr"/>
+          <a:lstStyle/>
+          <a:p>
+            <a:pPr algn="ctr"/>
+          </a:p>
+        </p:txBody>
+      </p:sp>
+      <p:sp>
+        <p:nvSpPr>
+          <p:cNvPr id="3" name="Rectangle 2"/>
+          <p:cNvSpPr/>
+          <p:nvPr/>
+        </p:nvSpPr>
+        <p:spPr>
+          <a:xfrm>
+            <a:off x="0" y="0"/>
+            <a:ext cx="12188952" cy="50292"/>
+          </a:xfrm>
+          <a:prstGeom prst="rect">
+            <a:avLst/>
+          </a:prstGeom>
+          <a:solidFill>
+            <a:srgbClr val="1F2C56"/>
+          </a:solidFill>
+          <a:ln>
+            <a:noFill/>
+          </a:ln>
+        </p:spPr>
+        <p:style>
+          <a:lnRef idx="1">
+            <a:schemeClr val="accent1"/>
+          </a:lnRef>
+          <a:fillRef idx="3">
+            <a:schemeClr val="accent1"/>
+          </a:fillRef>
+          <a:effectRef idx="2">
+            <a:schemeClr val="accent1"/>
+          </a:effectRef>
+          <a:fontRef idx="minor">
+            <a:schemeClr val="lt1"/>
+          </a:fontRef>
+        </p:style>
+        <p:txBody>
+          <a:bodyPr rtlCol="0" anchor="ctr"/>
+          <a:lstStyle/>
+          <a:p>
+            <a:pPr algn="ctr"/>
+          </a:p>
+        </p:txBody>
+      </p:sp>
+      <p:sp>
+        <p:nvSpPr>
+          <p:cNvPr id="4" name="TextBox 3"/>
+          <p:cNvSpPr txBox="1"/>
+          <p:nvPr/>
+        </p:nvSpPr>
+        <p:spPr>
+          <a:xfrm>
+            <a:off x="685800" y="109728"/>
+            <a:ext cx="10817352" cy="228600"/>
+          </a:xfrm>
+          <a:prstGeom prst="rect">
+            <a:avLst/>
+          </a:prstGeom>
+          <a:noFill/>
+        </p:spPr>
+        <p:txBody>
+          <a:bodyPr wrap="none">
+            <a:spAutoFit/>
+          </a:bodyPr>
+          <a:lstStyle/>
+          <a:p>
+            <a:pPr algn="l"/>
+            <a:r>
+              <a:rPr sz="750">
+                <a:solidFill>
+                  <a:srgbClr val="78808C"/>
+                </a:solidFill>
+                <a:latin typeface="JetBrains Mono"/>
+              </a:rPr>
+              <a:t>M19  ·  ÜBERSICHT</a:t>
+            </a:r>
+          </a:p>
+        </p:txBody>
+      </p:sp>
+      <p:sp>
+        <p:nvSpPr>
+          <p:cNvPr id="5" name="TextBox 4"/>
+          <p:cNvSpPr txBox="1"/>
+          <p:nvPr/>
+        </p:nvSpPr>
+        <p:spPr>
+          <a:xfrm>
+            <a:off x="685800" y="502920"/>
+            <a:ext cx="10817352" cy="594360"/>
+          </a:xfrm>
+          <a:prstGeom prst="rect">
+            <a:avLst/>
+          </a:prstGeom>
+          <a:noFill/>
+        </p:spPr>
+        <p:txBody>
+          <a:bodyPr wrap="square">
+            <a:spAutoFit/>
+          </a:bodyPr>
+          <a:lstStyle/>
+          <a:p>
+            <a:pPr algn="l"/>
+            <a:r>
+              <a:rPr sz="2000" b="1" i="0">
+                <a:solidFill>
+                  <a:srgbClr val="1F2C56"/>
+                </a:solidFill>
+                <a:latin typeface="Source Serif 4"/>
+              </a:rPr>
+              <a:t>Arbeitsblatt 3: Wissenstransfer-Maßnahmenplan</a:t>
+            </a:r>
+          </a:p>
+        </p:txBody>
+      </p:sp>
+      <p:sp>
+        <p:nvSpPr>
+          <p:cNvPr id="6" name="Rectangle 5"/>
+          <p:cNvSpPr/>
+          <p:nvPr/>
+        </p:nvSpPr>
+        <p:spPr>
+          <a:xfrm>
+            <a:off x="685800" y="1143000"/>
+            <a:ext cx="10817352" cy="25400"/>
+          </a:xfrm>
+          <a:prstGeom prst="rect">
+            <a:avLst/>
+          </a:prstGeom>
+          <a:solidFill>
+            <a:srgbClr val="D9C089"/>
+          </a:solidFill>
+          <a:ln>
+            <a:noFill/>
+          </a:ln>
+        </p:spPr>
+        <p:style>
+          <a:lnRef idx="1">
+            <a:schemeClr val="accent1"/>
+          </a:lnRef>
+          <a:fillRef idx="3">
+            <a:schemeClr val="accent1"/>
+          </a:fillRef>
+          <a:effectRef idx="2">
+            <a:schemeClr val="accent1"/>
+          </a:effectRef>
+          <a:fontRef idx="minor">
+            <a:schemeClr val="lt1"/>
+          </a:fontRef>
+        </p:style>
+        <p:txBody>
+          <a:bodyPr rtlCol="0" anchor="ctr"/>
+          <a:lstStyle/>
+          <a:p>
+            <a:pPr algn="ctr"/>
+          </a:p>
+        </p:txBody>
+      </p:sp>
+      <p:graphicFrame>
+        <p:nvGraphicFramePr>
+          <p:cNvPr id="7" name="Table 6"/>
+          <p:cNvGraphicFramePr>
+            <a:graphicFrameLocks noGrp="1"/>
+          </p:cNvGraphicFramePr>
+          <p:nvPr/>
+        </p:nvGraphicFramePr>
+        <p:xfrm>
+          <a:off x="685800" y="1417320"/>
+          <a:ext cx="10817352" cy="2304288"/>
+        </p:xfrm>
+        <a:graphic>
+          <a:graphicData uri="http://schemas.openxmlformats.org/drawingml/2006/table">
+            <a:tbl>
+              <a:tblPr firstRow="1" bandRow="1">
+                <a:tableStyleId>{5C22544A-7EE6-4342-B048-85BDC9FD1C3A}</a:tableStyleId>
+              </a:tblPr>
+              <a:tblGrid>
+                <a:gridCol w="2163470"/>
+                <a:gridCol w="2163470"/>
+                <a:gridCol w="2163470"/>
+                <a:gridCol w="2163470"/>
+                <a:gridCol w="2163472"/>
+              </a:tblGrid>
+              <a:tr h="384048">
+                <a:tc>
+                  <a:txBody>
+                    <a:bodyPr/>
+                    <a:lstStyle/>
+                    <a:p>
+                      <a:r>
+                        <a:rPr sz="1100" b="1">
+                          <a:solidFill>
+                            <a:srgbClr val="FFFFFF"/>
+                          </a:solidFill>
+                          <a:latin typeface="Arial"/>
+                        </a:rPr>
+                        <a:t>Methode</a:t>
+                      </a:r>
+                    </a:p>
+                  </a:txBody>
+                  <a:tcPr>
+                    <a:solidFill>
+                      <a:srgbClr val="1F2C56"/>
+                    </a:solidFill>
+                  </a:tcPr>
+                </a:tc>
+                <a:tc>
+                  <a:txBody>
+                    <a:bodyPr/>
+                    <a:lstStyle/>
+                    <a:p>
+                      <a:r>
+                        <a:rPr sz="1100" b="1">
+                          <a:solidFill>
+                            <a:srgbClr val="FFFFFF"/>
+                          </a:solidFill>
+                          <a:latin typeface="Arial"/>
+                        </a:rPr>
+                        <a:t>Wann?</a:t>
+                      </a:r>
+                    </a:p>
+                  </a:txBody>
+                  <a:tcPr>
+                    <a:solidFill>
+                      <a:srgbClr val="1F2C56"/>
+                    </a:solidFill>
+                  </a:tcPr>
+                </a:tc>
+                <a:tc>
+                  <a:txBody>
+                    <a:bodyPr/>
+                    <a:lstStyle/>
+                    <a:p>
+                      <a:r>
+                        <a:rPr sz="1100" b="1">
+                          <a:solidFill>
+                            <a:srgbClr val="FFFFFF"/>
+                          </a:solidFill>
+                          <a:latin typeface="Arial"/>
+                        </a:rPr>
+                        <a:t>Wer organisiert?</a:t>
+                      </a:r>
+                    </a:p>
+                  </a:txBody>
+                  <a:tcPr>
+                    <a:solidFill>
+                      <a:srgbClr val="1F2C56"/>
+                    </a:solidFill>
+                  </a:tcPr>
+                </a:tc>
+                <a:tc>
+                  <a:txBody>
+                    <a:bodyPr/>
+                    <a:lstStyle/>
+                    <a:p>
+                      <a:r>
+                        <a:rPr sz="1100" b="1">
+                          <a:solidFill>
+                            <a:srgbClr val="FFFFFF"/>
+                          </a:solidFill>
+                          <a:latin typeface="Arial"/>
+                        </a:rPr>
+                        <a:t>Wer nimmt teil?</a:t>
+                      </a:r>
+                    </a:p>
+                  </a:txBody>
+                  <a:tcPr>
+                    <a:solidFill>
+                      <a:srgbClr val="1F2C56"/>
+                    </a:solidFill>
+                  </a:tcPr>
+                </a:tc>
+                <a:tc>
+                  <a:txBody>
+                    <a:bodyPr/>
+                    <a:lstStyle/>
+                    <a:p>
+                      <a:r>
+                        <a:rPr sz="1100" b="1">
+                          <a:solidFill>
+                            <a:srgbClr val="FFFFFF"/>
+                          </a:solidFill>
+                          <a:latin typeface="Arial"/>
+                        </a:rPr>
+                        <a:t>Erfolgskriterium</a:t>
+                      </a:r>
+                    </a:p>
+                  </a:txBody>
+                  <a:tcPr>
+                    <a:solidFill>
+                      <a:srgbClr val="1F2C56"/>
+                    </a:solidFill>
+                  </a:tcPr>
+                </a:tc>
+              </a:tr>
+              <a:tr h="384048">
+                <a:tc>
+                  <a:txBody>
+                    <a:bodyPr/>
+                    <a:lstStyle/>
+                    <a:p>
+                      <a:r>
+                        <a:rPr sz="1050">
+                          <a:solidFill>
+                            <a:srgbClr val="3D5466"/>
+                          </a:solidFill>
+                          <a:latin typeface="Arial"/>
+                        </a:rPr>
+                        <a:t>Tandem-Besuche</a:t>
+                      </a:r>
+                    </a:p>
+                  </a:txBody>
+                  <a:tcPr/>
+                </a:tc>
+                <a:tc>
+                  <a:txBody>
+                    <a:bodyPr/>
+                    <a:lstStyle/>
+                    <a:p/>
+                  </a:txBody>
+                  <a:tcPr/>
+                </a:tc>
+                <a:tc>
+                  <a:txBody>
+                    <a:bodyPr/>
+                    <a:lstStyle/>
+                    <a:p/>
+                  </a:txBody>
+                  <a:tcPr/>
+                </a:tc>
+                <a:tc>
+                  <a:txBody>
+                    <a:bodyPr/>
+                    <a:lstStyle/>
+                    <a:p/>
+                  </a:txBody>
+                  <a:tcPr/>
+                </a:tc>
+                <a:tc>
+                  <a:txBody>
+                    <a:bodyPr/>
+                    <a:lstStyle/>
+                    <a:p/>
+                  </a:txBody>
+                  <a:tcPr/>
+                </a:tc>
+              </a:tr>
+              <a:tr h="384048">
+                <a:tc>
+                  <a:txBody>
+                    <a:bodyPr/>
+                    <a:lstStyle/>
+                    <a:p>
+                      <a:r>
+                        <a:rPr sz="1050">
+                          <a:solidFill>
+                            <a:srgbClr val="3D5466"/>
+                          </a:solidFill>
+                          <a:latin typeface="Arial"/>
+                        </a:rPr>
+                        <a:t>Monatliche Fallbesprechung</a:t>
+                      </a:r>
+                    </a:p>
+                  </a:txBody>
+                  <a:tcPr/>
+                </a:tc>
+                <a:tc>
+                  <a:txBody>
+                    <a:bodyPr/>
+                    <a:lstStyle/>
+                    <a:p/>
+                  </a:txBody>
+                  <a:tcPr/>
+                </a:tc>
+                <a:tc>
+                  <a:txBody>
+                    <a:bodyPr/>
+                    <a:lstStyle/>
+                    <a:p/>
+                  </a:txBody>
+                  <a:tcPr/>
+                </a:tc>
+                <a:tc>
+                  <a:txBody>
+                    <a:bodyPr/>
+                    <a:lstStyle/>
+                    <a:p/>
+                  </a:txBody>
+                  <a:tcPr/>
+                </a:tc>
+                <a:tc>
+                  <a:txBody>
+                    <a:bodyPr/>
+                    <a:lstStyle/>
+                    <a:p/>
+                  </a:txBody>
+                  <a:tcPr/>
+                </a:tc>
+              </a:tr>
+              <a:tr h="384048">
+                <a:tc>
+                  <a:txBody>
+                    <a:bodyPr/>
+                    <a:lstStyle/>
+                    <a:p>
+                      <a:r>
+                        <a:rPr sz="1050">
+                          <a:solidFill>
+                            <a:srgbClr val="3D5466"/>
+                          </a:solidFill>
+                          <a:latin typeface="Arial"/>
+                        </a:rPr>
+                        <a:t>Wissenslandkarte</a:t>
+                      </a:r>
+                    </a:p>
+                  </a:txBody>
+                  <a:tcPr/>
+                </a:tc>
+                <a:tc>
+                  <a:txBody>
+                    <a:bodyPr/>
+                    <a:lstStyle/>
+                    <a:p/>
+                  </a:txBody>
+                  <a:tcPr/>
+                </a:tc>
+                <a:tc>
+                  <a:txBody>
+                    <a:bodyPr/>
+                    <a:lstStyle/>
+                    <a:p/>
+                  </a:txBody>
+                  <a:tcPr/>
+                </a:tc>
+                <a:tc>
+                  <a:txBody>
+                    <a:bodyPr/>
+                    <a:lstStyle/>
+                    <a:p/>
+                  </a:txBody>
+                  <a:tcPr/>
+                </a:tc>
+                <a:tc>
+                  <a:txBody>
+                    <a:bodyPr/>
+                    <a:lstStyle/>
+                    <a:p/>
+                  </a:txBody>
+                  <a:tcPr/>
+                </a:tc>
+              </a:tr>
+              <a:tr h="384048">
+                <a:tc>
+                  <a:txBody>
+                    <a:bodyPr/>
+                    <a:lstStyle/>
+                    <a:p>
+                      <a:r>
+                        <a:rPr sz="1050">
+                          <a:solidFill>
+                            <a:srgbClr val="3D5466"/>
+                          </a:solidFill>
+                          <a:latin typeface="Arial"/>
+                        </a:rPr>
+                        <a:t>Lunch-and-Learn</a:t>
+                      </a:r>
+                    </a:p>
+                  </a:txBody>
+                  <a:tcPr/>
+                </a:tc>
+                <a:tc>
+                  <a:txBody>
+                    <a:bodyPr/>
+                    <a:lstStyle/>
+                    <a:p/>
+                  </a:txBody>
+                  <a:tcPr/>
+                </a:tc>
+                <a:tc>
+                  <a:txBody>
+                    <a:bodyPr/>
+                    <a:lstStyle/>
+                    <a:p/>
+                  </a:txBody>
+                  <a:tcPr/>
+                </a:tc>
+                <a:tc>
+                  <a:txBody>
+                    <a:bodyPr/>
+                    <a:lstStyle/>
+                    <a:p/>
+                  </a:txBody>
+                  <a:tcPr/>
+                </a:tc>
+                <a:tc>
+                  <a:txBody>
+                    <a:bodyPr/>
+                    <a:lstStyle/>
+                    <a:p/>
+                  </a:txBody>
+                  <a:tcPr/>
+                </a:tc>
+              </a:tr>
+              <a:tr h="384048">
+                <a:tc>
+                  <a:txBody>
+                    <a:bodyPr/>
+                    <a:lstStyle/>
+                    <a:p>
+                      <a:r>
+                        <a:rPr sz="1050">
+                          <a:solidFill>
+                            <a:srgbClr val="3D5466"/>
+                          </a:solidFill>
+                          <a:latin typeface="Arial"/>
+                        </a:rPr>
+                        <a:t>Reverse Mentoring</a:t>
+                      </a:r>
+                    </a:p>
+                  </a:txBody>
+                  <a:tcPr/>
+                </a:tc>
+                <a:tc>
+                  <a:txBody>
+                    <a:bodyPr/>
+                    <a:lstStyle/>
+                    <a:p/>
+                  </a:txBody>
+                  <a:tcPr/>
+                </a:tc>
+                <a:tc>
+                  <a:txBody>
+                    <a:bodyPr/>
+                    <a:lstStyle/>
+                    <a:p/>
+                  </a:txBody>
+                  <a:tcPr/>
+                </a:tc>
+                <a:tc>
+                  <a:txBody>
+                    <a:bodyPr/>
+                    <a:lstStyle/>
+                    <a:p/>
+                  </a:txBody>
+                  <a:tcPr/>
+                </a:tc>
+                <a:tc>
+                  <a:txBody>
+                    <a:bodyPr/>
+                    <a:lstStyle/>
+                    <a:p/>
+                  </a:txBody>
+                  <a:tcPr/>
+                </a:tc>
+              </a:tr>
+            </a:tbl>
+          </a:graphicData>
+        </a:graphic>
+      </p:graphicFrame>
+      <p:sp>
+        <p:nvSpPr>
+          <p:cNvPr id="8" name="Rectangle 7"/>
+          <p:cNvSpPr/>
+          <p:nvPr/>
+        </p:nvSpPr>
+        <p:spPr>
+          <a:xfrm>
+            <a:off x="0" y="6510528"/>
+            <a:ext cx="12188952" cy="347472"/>
+          </a:xfrm>
+          <a:prstGeom prst="rect">
+            <a:avLst/>
+          </a:prstGeom>
+          <a:solidFill>
+            <a:srgbClr val="0A1937"/>
+          </a:solidFill>
+          <a:ln>
+            <a:noFill/>
+          </a:ln>
+        </p:spPr>
+        <p:style>
+          <a:lnRef idx="1">
+            <a:schemeClr val="accent1"/>
+          </a:lnRef>
+          <a:fillRef idx="3">
+            <a:schemeClr val="accent1"/>
+          </a:fillRef>
+          <a:effectRef idx="2">
+            <a:schemeClr val="accent1"/>
+          </a:effectRef>
+          <a:fontRef idx="minor">
+            <a:schemeClr val="lt1"/>
+          </a:fontRef>
+        </p:style>
+        <p:txBody>
+          <a:bodyPr rtlCol="0" anchor="ctr"/>
+          <a:lstStyle/>
+          <a:p>
+            <a:pPr algn="ctr"/>
+          </a:p>
+        </p:txBody>
+      </p:sp>
+      <p:sp>
+        <p:nvSpPr>
+          <p:cNvPr id="9" name="TextBox 8"/>
+          <p:cNvSpPr txBox="1"/>
+          <p:nvPr/>
+        </p:nvSpPr>
+        <p:spPr>
+          <a:xfrm>
+            <a:off x="685800" y="6583680"/>
+            <a:ext cx="6490411" cy="256032"/>
+          </a:xfrm>
+          <a:prstGeom prst="rect">
+            <a:avLst/>
+          </a:prstGeom>
+          <a:noFill/>
+        </p:spPr>
+        <p:txBody>
+          <a:bodyPr wrap="none">
+            <a:spAutoFit/>
+          </a:bodyPr>
+          <a:lstStyle/>
+          <a:p>
+            <a:pPr algn="l"/>
+            <a:r>
+              <a:rPr sz="700">
+                <a:solidFill>
+                  <a:srgbClr val="A0B4D2"/>
+                </a:solidFill>
+                <a:latin typeface="JetBrains Mono"/>
+              </a:rPr>
+              <a:t>Benedikt Zoller Coaching  ·  FKB Campus  ·  M19</a:t>
+            </a:r>
+          </a:p>
+        </p:txBody>
+      </p:sp>
+      <p:sp>
+        <p:nvSpPr>
+          <p:cNvPr id="10" name="TextBox 9"/>
+          <p:cNvSpPr txBox="1"/>
+          <p:nvPr/>
+        </p:nvSpPr>
+        <p:spPr>
+          <a:xfrm>
+            <a:off x="7176211" y="6583680"/>
+            <a:ext cx="4326940" cy="256032"/>
+          </a:xfrm>
+          <a:prstGeom prst="rect">
+            <a:avLst/>
+          </a:prstGeom>
+          <a:noFill/>
+        </p:spPr>
+        <p:txBody>
+          <a:bodyPr wrap="none">
+            <a:spAutoFit/>
+          </a:bodyPr>
+          <a:lstStyle/>
+          <a:p>
+            <a:pPr algn="r"/>
+            <a:r>
+              <a:rPr sz="700">
+                <a:solidFill>
+                  <a:srgbClr val="A0B4D2"/>
+                </a:solidFill>
+                <a:latin typeface="JetBrains Mono"/>
+              </a:rPr>
+              <a:t>Übersicht</a:t>
             </a:r>
           </a:p>
         </p:txBody>
@@ -7475,7 +8421,7 @@
             <a:avLst/>
           </a:prstGeom>
           <a:solidFill>
-            <a:srgbClr val="FFFFFF"/>
+            <a:srgbClr val="EDEDF3"/>
           </a:solidFill>
           <a:ln>
             <a:noFill/>
@@ -7576,62 +8522,27 @@
                 </a:solidFill>
                 <a:latin typeface="JetBrains Mono"/>
               </a:rPr>
-              <a:t>M19  ·  SCHAUBILD</a:t>
-            </a:r>
-          </a:p>
-        </p:txBody>
-      </p:sp>
-      <p:sp>
-        <p:nvSpPr>
-          <p:cNvPr id="5" name="TextBox 4"/>
-          <p:cNvSpPr txBox="1"/>
-          <p:nvPr/>
-        </p:nvSpPr>
-        <p:spPr>
-          <a:xfrm>
-            <a:off x="685800" y="502920"/>
-            <a:ext cx="10817352" cy="594360"/>
-          </a:xfrm>
-          <a:prstGeom prst="rect">
-            <a:avLst/>
-          </a:prstGeom>
-          <a:noFill/>
-        </p:spPr>
-        <p:txBody>
-          <a:bodyPr wrap="square">
-            <a:spAutoFit/>
-          </a:bodyPr>
-          <a:lstStyle/>
-          <a:p>
-            <a:pPr algn="l"/>
-            <a:r>
-              <a:rPr sz="2000" b="1" i="0">
-                <a:solidFill>
-                  <a:srgbClr val="1F2C56"/>
-                </a:solidFill>
-                <a:latin typeface="Source Serif 4"/>
-              </a:rPr>
-              <a:t>SECI-Modell Wissensspirale nach Nonaka &amp; Takeuchi</a:t>
-            </a:r>
-          </a:p>
-        </p:txBody>
-      </p:sp>
-      <p:sp>
-        <p:nvSpPr>
-          <p:cNvPr id="6" name="Rectangle 5"/>
+              <a:t>AGENDA  ·  M19</a:t>
+            </a:r>
+          </a:p>
+        </p:txBody>
+      </p:sp>
+      <p:sp>
+        <p:nvSpPr>
+          <p:cNvPr id="5" name="Rectangle 4"/>
           <p:cNvSpPr/>
           <p:nvPr/>
         </p:nvSpPr>
         <p:spPr>
           <a:xfrm>
-            <a:off x="685800" y="1143000"/>
-            <a:ext cx="10817352" cy="25400"/>
+            <a:off x="0" y="1234440"/>
+            <a:ext cx="12188952" cy="12700"/>
           </a:xfrm>
           <a:prstGeom prst="rect">
             <a:avLst/>
           </a:prstGeom>
           <a:solidFill>
-            <a:srgbClr val="D9C089"/>
+            <a:srgbClr val="D8DFE4"/>
           </a:solidFill>
           <a:ln>
             <a:noFill/>
@@ -7659,30 +8570,425 @@
           </a:p>
         </p:txBody>
       </p:sp>
-      <p:pic>
-        <p:nvPicPr>
-          <p:cNvPr id="7" name="Picture 6" descr="image.png"/>
-          <p:cNvPicPr>
-            <a:picLocks noChangeAspect="1"/>
-          </p:cNvPicPr>
-          <p:nvPr/>
-        </p:nvPicPr>
-        <p:blipFill>
-          <a:blip r:embed="rId2"/>
-          <a:stretch>
-            <a:fillRect/>
-          </a:stretch>
-        </p:blipFill>
-        <p:spPr>
-          <a:xfrm>
-            <a:off x="2554863" y="1325880"/>
-            <a:ext cx="7079225" cy="4937760"/>
-          </a:xfrm>
-          <a:prstGeom prst="rect">
-            <a:avLst/>
-          </a:prstGeom>
-        </p:spPr>
-      </p:pic>
+      <p:sp>
+        <p:nvSpPr>
+          <p:cNvPr id="6" name="TextBox 5"/>
+          <p:cNvSpPr txBox="1"/>
+          <p:nvPr/>
+        </p:nvSpPr>
+        <p:spPr>
+          <a:xfrm>
+            <a:off x="685800" y="502920"/>
+            <a:ext cx="10817352" cy="658368"/>
+          </a:xfrm>
+          <a:prstGeom prst="rect">
+            <a:avLst/>
+          </a:prstGeom>
+          <a:noFill/>
+        </p:spPr>
+        <p:txBody>
+          <a:bodyPr wrap="square">
+            <a:spAutoFit/>
+          </a:bodyPr>
+          <a:lstStyle/>
+          <a:p>
+            <a:pPr algn="l"/>
+            <a:r>
+              <a:rPr sz="2600" b="1" i="0">
+                <a:solidFill>
+                  <a:srgbClr val="1F2C56"/>
+                </a:solidFill>
+                <a:latin typeface="Source Serif 4"/>
+              </a:rPr>
+              <a:t>So läuft das Modul</a:t>
+            </a:r>
+          </a:p>
+        </p:txBody>
+      </p:sp>
+      <p:sp>
+        <p:nvSpPr>
+          <p:cNvPr id="7" name="TextBox 6"/>
+          <p:cNvSpPr txBox="1"/>
+          <p:nvPr/>
+        </p:nvSpPr>
+        <p:spPr>
+          <a:xfrm>
+            <a:off x="685800" y="1463040"/>
+            <a:ext cx="10817352" cy="4937760"/>
+          </a:xfrm>
+          <a:prstGeom prst="rect">
+            <a:avLst/>
+          </a:prstGeom>
+          <a:noFill/>
+        </p:spPr>
+        <p:txBody>
+          <a:bodyPr wrap="square">
+            <a:spAutoFit/>
+          </a:bodyPr>
+          <a:lstStyle/>
+          <a:p>
+            <a:pPr>
+              <a:spcBef>
+                <a:spcPts val="400"/>
+              </a:spcBef>
+              <a:spcAft>
+                <a:spcPts val="100"/>
+              </a:spcAft>
+            </a:pPr>
+            <a:r>
+              <a:rPr sz="900">
+                <a:solidFill>
+                  <a:srgbClr val="78808C"/>
+                </a:solidFill>
+                <a:latin typeface="Consolas"/>
+              </a:rPr>
+              <a:t>00:00       </a:t>
+            </a:r>
+            <a:r>
+              <a:rPr sz="1200" b="1">
+                <a:solidFill>
+                  <a:srgbClr val="3D5466"/>
+                </a:solidFill>
+                <a:latin typeface="Arial"/>
+              </a:rPr>
+              <a:t>  Einstieg: Wissens-Inventur</a:t>
+            </a:r>
+            <a:r>
+              <a:rPr sz="900">
+                <a:solidFill>
+                  <a:srgbClr val="78808C"/>
+                </a:solidFill>
+                <a:latin typeface="Arial"/>
+              </a:rPr>
+              <a:t>  ·  Einzelarbeit + Sammlung</a:t>
+            </a:r>
+          </a:p>
+          <a:p>
+            <a:pPr>
+              <a:spcBef>
+                <a:spcPts val="400"/>
+              </a:spcBef>
+              <a:spcAft>
+                <a:spcPts val="100"/>
+              </a:spcAft>
+            </a:pPr>
+            <a:r>
+              <a:rPr sz="900">
+                <a:solidFill>
+                  <a:srgbClr val="78808C"/>
+                </a:solidFill>
+                <a:latin typeface="Consolas"/>
+              </a:rPr>
+              <a:t>00:10       </a:t>
+            </a:r>
+            <a:r>
+              <a:rPr sz="1200" b="1">
+                <a:solidFill>
+                  <a:srgbClr val="3D5466"/>
+                </a:solidFill>
+                <a:latin typeface="Arial"/>
+              </a:rPr>
+              <a:t>  Theorie-Block I</a:t>
+            </a:r>
+            <a:r>
+              <a:rPr sz="900">
+                <a:solidFill>
+                  <a:srgbClr val="78808C"/>
+                </a:solidFill>
+                <a:latin typeface="Arial"/>
+              </a:rPr>
+              <a:t>  ·  Vortrag + Folie</a:t>
+            </a:r>
+          </a:p>
+          <a:p>
+            <a:pPr>
+              <a:spcBef>
+                <a:spcPts val="400"/>
+              </a:spcBef>
+              <a:spcAft>
+                <a:spcPts val="100"/>
+              </a:spcAft>
+            </a:pPr>
+            <a:r>
+              <a:rPr sz="900">
+                <a:solidFill>
+                  <a:srgbClr val="78808C"/>
+                </a:solidFill>
+                <a:latin typeface="Consolas"/>
+              </a:rPr>
+              <a:t>00:30       </a:t>
+            </a:r>
+            <a:r>
+              <a:rPr sz="1200" b="1">
+                <a:solidFill>
+                  <a:srgbClr val="3D5466"/>
+                </a:solidFill>
+                <a:latin typeface="Arial"/>
+              </a:rPr>
+              <a:t>  Wissenslandkarte</a:t>
+            </a:r>
+            <a:r>
+              <a:rPr sz="900">
+                <a:solidFill>
+                  <a:srgbClr val="78808C"/>
+                </a:solidFill>
+                <a:latin typeface="Arial"/>
+              </a:rPr>
+              <a:t>  ·  Gruppenarbeit (Pinnwand)</a:t>
+            </a:r>
+          </a:p>
+          <a:p>
+            <a:pPr>
+              <a:spcBef>
+                <a:spcPts val="400"/>
+              </a:spcBef>
+              <a:spcAft>
+                <a:spcPts val="100"/>
+              </a:spcAft>
+            </a:pPr>
+            <a:r>
+              <a:rPr sz="900">
+                <a:solidFill>
+                  <a:srgbClr val="78808C"/>
+                </a:solidFill>
+                <a:latin typeface="Consolas"/>
+              </a:rPr>
+              <a:t>00:45       </a:t>
+            </a:r>
+            <a:r>
+              <a:rPr sz="1200" b="1">
+                <a:solidFill>
+                  <a:srgbClr val="3D5466"/>
+                </a:solidFill>
+                <a:latin typeface="Arial"/>
+              </a:rPr>
+              <a:t>  Theorie-Block II</a:t>
+            </a:r>
+            <a:r>
+              <a:rPr sz="900">
+                <a:solidFill>
+                  <a:srgbClr val="78808C"/>
+                </a:solidFill>
+                <a:latin typeface="Arial"/>
+              </a:rPr>
+              <a:t>  ·  Vortrag + Methodenblatt</a:t>
+            </a:r>
+          </a:p>
+          <a:p>
+            <a:pPr>
+              <a:spcBef>
+                <a:spcPts val="400"/>
+              </a:spcBef>
+              <a:spcAft>
+                <a:spcPts val="100"/>
+              </a:spcAft>
+            </a:pPr>
+            <a:r>
+              <a:rPr sz="900">
+                <a:solidFill>
+                  <a:srgbClr val="78808C"/>
+                </a:solidFill>
+                <a:latin typeface="Consolas"/>
+              </a:rPr>
+              <a:t>00:55       </a:t>
+            </a:r>
+            <a:r>
+              <a:rPr sz="1200" b="1">
+                <a:solidFill>
+                  <a:srgbClr val="3D5466"/>
+                </a:solidFill>
+                <a:latin typeface="Arial"/>
+              </a:rPr>
+              <a:t>  Methoden-Auswahl</a:t>
+            </a:r>
+            <a:r>
+              <a:rPr sz="900">
+                <a:solidFill>
+                  <a:srgbClr val="78808C"/>
+                </a:solidFill>
+                <a:latin typeface="Arial"/>
+              </a:rPr>
+              <a:t>  ·  Gruppenarbeit</a:t>
+            </a:r>
+          </a:p>
+          <a:p>
+            <a:pPr>
+              <a:spcBef>
+                <a:spcPts val="400"/>
+              </a:spcBef>
+              <a:spcAft>
+                <a:spcPts val="100"/>
+              </a:spcAft>
+            </a:pPr>
+            <a:r>
+              <a:rPr sz="900">
+                <a:solidFill>
+                  <a:srgbClr val="78808C"/>
+                </a:solidFill>
+                <a:latin typeface="Consolas"/>
+              </a:rPr>
+              <a:t>01:05       </a:t>
+            </a:r>
+            <a:r>
+              <a:rPr sz="1200" b="1">
+                <a:solidFill>
+                  <a:srgbClr val="3D5466"/>
+                </a:solidFill>
+                <a:latin typeface="Arial"/>
+              </a:rPr>
+              <a:t>  Kurzpräsentationen</a:t>
+            </a:r>
+            <a:r>
+              <a:rPr sz="900">
+                <a:solidFill>
+                  <a:srgbClr val="78808C"/>
+                </a:solidFill>
+                <a:latin typeface="Arial"/>
+              </a:rPr>
+              <a:t>  ·  Plenum</a:t>
+            </a:r>
+          </a:p>
+          <a:p>
+            <a:pPr>
+              <a:spcBef>
+                <a:spcPts val="400"/>
+              </a:spcBef>
+              <a:spcAft>
+                <a:spcPts val="100"/>
+              </a:spcAft>
+            </a:pPr>
+            <a:r>
+              <a:rPr sz="900">
+                <a:solidFill>
+                  <a:srgbClr val="78808C"/>
+                </a:solidFill>
+                <a:latin typeface="Consolas"/>
+              </a:rPr>
+              <a:t>01:15       </a:t>
+            </a:r>
+            <a:r>
+              <a:rPr sz="1200" b="1">
+                <a:solidFill>
+                  <a:srgbClr val="3D5466"/>
+                </a:solidFill>
+                <a:latin typeface="Arial"/>
+              </a:rPr>
+              <a:t>  Transfer &amp; Commitment</a:t>
+            </a:r>
+            <a:r>
+              <a:rPr sz="900">
+                <a:solidFill>
+                  <a:srgbClr val="78808C"/>
+                </a:solidFill>
+                <a:latin typeface="Arial"/>
+              </a:rPr>
+              <a:t>  ·  Einzelarbeit schriftlich</a:t>
+            </a:r>
+          </a:p>
+          <a:p>
+            <a:pPr>
+              <a:spcBef>
+                <a:spcPts val="400"/>
+              </a:spcBef>
+              <a:spcAft>
+                <a:spcPts val="100"/>
+              </a:spcAft>
+            </a:pPr>
+            <a:r>
+              <a:rPr sz="900">
+                <a:solidFill>
+                  <a:srgbClr val="78808C"/>
+                </a:solidFill>
+                <a:latin typeface="Consolas"/>
+              </a:rPr>
+              <a:t>01:20       </a:t>
+            </a:r>
+            <a:r>
+              <a:rPr sz="1200" b="1">
+                <a:solidFill>
+                  <a:srgbClr val="3D5466"/>
+                </a:solidFill>
+                <a:latin typeface="Arial"/>
+              </a:rPr>
+              <a:t>  Abschluss</a:t>
+            </a:r>
+            <a:r>
+              <a:rPr sz="900">
+                <a:solidFill>
+                  <a:srgbClr val="78808C"/>
+                </a:solidFill>
+                <a:latin typeface="Arial"/>
+              </a:rPr>
+              <a:t>  ·  Plenum</a:t>
+            </a:r>
+          </a:p>
+          <a:p>
+            <a:pPr>
+              <a:spcBef>
+                <a:spcPts val="400"/>
+              </a:spcBef>
+              <a:spcAft>
+                <a:spcPts val="100"/>
+              </a:spcAft>
+            </a:pPr>
+            <a:r>
+              <a:rPr sz="900">
+                <a:solidFill>
+                  <a:srgbClr val="78808C"/>
+                </a:solidFill>
+                <a:latin typeface="Consolas"/>
+              </a:rPr>
+              <a:t>01:25       </a:t>
+            </a:r>
+            <a:r>
+              <a:rPr sz="1200" b="1">
+                <a:solidFill>
+                  <a:srgbClr val="3D5466"/>
+                </a:solidFill>
+                <a:latin typeface="Arial"/>
+              </a:rPr>
+              <a:t>  Feedbackbogen</a:t>
+            </a:r>
+            <a:r>
+              <a:rPr sz="900">
+                <a:solidFill>
+                  <a:srgbClr val="78808C"/>
+                </a:solidFill>
+                <a:latin typeface="Arial"/>
+              </a:rPr>
+              <a:t>  ·  Einzeln</a:t>
+            </a:r>
+          </a:p>
+          <a:p>
+            <a:pPr>
+              <a:spcBef>
+                <a:spcPts val="400"/>
+              </a:spcBef>
+              <a:spcAft>
+                <a:spcPts val="100"/>
+              </a:spcAft>
+            </a:pPr>
+            <a:r>
+              <a:rPr sz="900">
+                <a:solidFill>
+                  <a:srgbClr val="78808C"/>
+                </a:solidFill>
+                <a:latin typeface="Consolas"/>
+              </a:rPr>
+              <a:t>01:30       </a:t>
+            </a:r>
+            <a:r>
+              <a:rPr sz="1200" b="1">
+                <a:solidFill>
+                  <a:srgbClr val="3D5466"/>
+                </a:solidFill>
+                <a:latin typeface="Arial"/>
+              </a:rPr>
+              <a:t>  Ende</a:t>
+            </a:r>
+          </a:p>
+        </p:txBody>
+      </p:sp>
       <p:sp>
         <p:nvSpPr>
           <p:cNvPr id="8" name="Rectangle 7"/>
@@ -7757,41 +9063,6 @@
                 <a:latin typeface="JetBrains Mono"/>
               </a:rPr>
               <a:t>Benedikt Zoller Coaching  ·  FKB Campus  ·  M19</a:t>
-            </a:r>
-          </a:p>
-        </p:txBody>
-      </p:sp>
-      <p:sp>
-        <p:nvSpPr>
-          <p:cNvPr id="10" name="TextBox 9"/>
-          <p:cNvSpPr txBox="1"/>
-          <p:nvPr/>
-        </p:nvSpPr>
-        <p:spPr>
-          <a:xfrm>
-            <a:off x="7176211" y="6583680"/>
-            <a:ext cx="4326940" cy="256032"/>
-          </a:xfrm>
-          <a:prstGeom prst="rect">
-            <a:avLst/>
-          </a:prstGeom>
-          <a:noFill/>
-        </p:spPr>
-        <p:txBody>
-          <a:bodyPr wrap="none">
-            <a:spAutoFit/>
-          </a:bodyPr>
-          <a:lstStyle/>
-          <a:p>
-            <a:pPr algn="r"/>
-            <a:r>
-              <a:rPr sz="700">
-                <a:solidFill>
-                  <a:srgbClr val="A0B4D2"/>
-                </a:solidFill>
-                <a:latin typeface="JetBrains Mono"/>
-              </a:rPr>
-              <a:t>Schaubild</a:t>
             </a:r>
           </a:p>
         </p:txBody>
@@ -7965,7 +9236,7 @@
                 </a:solidFill>
                 <a:latin typeface="Source Serif 4"/>
               </a:rPr>
-              <a:t>Kolb-Lernzyklus</a:t>
+              <a:t>SECI-Modell Wissensspirale nach Nonaka &amp; Takeuchi</a:t>
             </a:r>
           </a:p>
         </p:txBody>
@@ -8183,7 +9454,7 @@
             <a:avLst/>
           </a:prstGeom>
           <a:solidFill>
-            <a:srgbClr val="EDEDF3"/>
+            <a:srgbClr val="FFFFFF"/>
           </a:solidFill>
           <a:ln>
             <a:noFill/>
@@ -8284,51 +9555,43 @@
                 </a:solidFill>
                 <a:latin typeface="JetBrains Mono"/>
               </a:rPr>
-              <a:t>M19  ·  INHALT</a:t>
-            </a:r>
-          </a:p>
-        </p:txBody>
-      </p:sp>
-      <p:sp>
-        <p:nvSpPr>
-          <p:cNvPr id="5" name="Rectangle 4"/>
-          <p:cNvSpPr/>
-          <p:nvPr/>
-        </p:nvSpPr>
-        <p:spPr>
-          <a:xfrm>
-            <a:off x="0" y="1234440"/>
-            <a:ext cx="12188952" cy="12700"/>
-          </a:xfrm>
-          <a:prstGeom prst="rect">
-            <a:avLst/>
-          </a:prstGeom>
-          <a:solidFill>
-            <a:srgbClr val="D8DFE4"/>
-          </a:solidFill>
-          <a:ln>
-            <a:noFill/>
-          </a:ln>
-        </p:spPr>
-        <p:style>
-          <a:lnRef idx="1">
-            <a:schemeClr val="accent1"/>
-          </a:lnRef>
-          <a:fillRef idx="3">
-            <a:schemeClr val="accent1"/>
-          </a:fillRef>
-          <a:effectRef idx="2">
-            <a:schemeClr val="accent1"/>
-          </a:effectRef>
-          <a:fontRef idx="minor">
-            <a:schemeClr val="lt1"/>
-          </a:fontRef>
-        </p:style>
-        <p:txBody>
-          <a:bodyPr rtlCol="0" anchor="ctr"/>
-          <a:lstStyle/>
-          <a:p>
-            <a:pPr algn="ctr"/>
+              <a:t>M19  ·  SCHAUBILD</a:t>
+            </a:r>
+          </a:p>
+        </p:txBody>
+      </p:sp>
+      <p:sp>
+        <p:nvSpPr>
+          <p:cNvPr id="5" name="TextBox 4"/>
+          <p:cNvSpPr txBox="1"/>
+          <p:nvPr/>
+        </p:nvSpPr>
+        <p:spPr>
+          <a:xfrm>
+            <a:off x="685800" y="502920"/>
+            <a:ext cx="10817352" cy="594360"/>
+          </a:xfrm>
+          <a:prstGeom prst="rect">
+            <a:avLst/>
+          </a:prstGeom>
+          <a:noFill/>
+        </p:spPr>
+        <p:txBody>
+          <a:bodyPr wrap="square">
+            <a:spAutoFit/>
+          </a:bodyPr>
+          <a:lstStyle/>
+          <a:p>
+            <a:pPr algn="l"/>
+            <a:r>
+              <a:rPr sz="2000" b="1" i="0">
+                <a:solidFill>
+                  <a:srgbClr val="1F2C56"/>
+                </a:solidFill>
+                <a:latin typeface="Source Serif 4"/>
+              </a:rPr>
+              <a:t>Kolb-Lernzyklus</a:t>
+            </a:r>
           </a:p>
         </p:txBody>
       </p:sp>
@@ -8340,8 +9603,8 @@
         </p:nvSpPr>
         <p:spPr>
           <a:xfrm>
-            <a:off x="685800" y="502920"/>
-            <a:ext cx="36576" cy="658368"/>
+            <a:off x="685800" y="1143000"/>
+            <a:ext cx="10817352" cy="25400"/>
           </a:xfrm>
           <a:prstGeom prst="rect">
             <a:avLst/>
@@ -8375,200 +9638,33 @@
           </a:p>
         </p:txBody>
       </p:sp>
-      <p:sp>
-        <p:nvSpPr>
-          <p:cNvPr id="7" name="TextBox 6"/>
-          <p:cNvSpPr txBox="1"/>
-          <p:nvPr/>
-        </p:nvSpPr>
-        <p:spPr>
-          <a:xfrm>
-            <a:off x="813816" y="502920"/>
-            <a:ext cx="10634472" cy="685800"/>
-          </a:xfrm>
-          <a:prstGeom prst="rect">
-            <a:avLst/>
-          </a:prstGeom>
-          <a:noFill/>
-        </p:spPr>
-        <p:txBody>
-          <a:bodyPr wrap="square">
-            <a:spAutoFit/>
-          </a:bodyPr>
-          <a:lstStyle/>
-          <a:p>
-            <a:pPr algn="l"/>
-            <a:r>
-              <a:rPr sz="2400" b="1" i="0">
-                <a:solidFill>
-                  <a:srgbClr val="1F2C56"/>
-                </a:solidFill>
-                <a:latin typeface="Source Serif 4"/>
-              </a:rPr>
-              <a:t>Methode 1: Tandem-Kundenbesuch</a:t>
-            </a:r>
-          </a:p>
-        </p:txBody>
-      </p:sp>
-      <p:sp>
-        <p:nvSpPr>
-          <p:cNvPr id="8" name="TextBox 7"/>
-          <p:cNvSpPr txBox="1"/>
-          <p:nvPr/>
-        </p:nvSpPr>
-        <p:spPr>
-          <a:xfrm>
-            <a:off x="685800" y="1417320"/>
-            <a:ext cx="10817352" cy="5029200"/>
-          </a:xfrm>
-          <a:prstGeom prst="rect">
-            <a:avLst/>
-          </a:prstGeom>
-          <a:noFill/>
-        </p:spPr>
-        <p:txBody>
-          <a:bodyPr wrap="square">
-            <a:spAutoFit/>
-          </a:bodyPr>
-          <a:lstStyle/>
-          <a:p>
-            <a:pPr>
-              <a:spcBef>
-                <a:spcPts val="400"/>
-              </a:spcBef>
-              <a:spcAft>
-                <a:spcPts val="200"/>
-              </a:spcAft>
-            </a:pPr>
-            <a:r>
-              <a:rPr sz="1200">
-                <a:solidFill>
-                  <a:srgbClr val="3D5466"/>
-                </a:solidFill>
-                <a:latin typeface="Arial"/>
-              </a:rPr>
-              <a:t>Was: Zwei Berater besuchen gemeinsam einen Kunden – einer führt, einer beobachtet.</a:t>
-            </a:r>
-          </a:p>
-          <a:p>
-            <a:pPr>
-              <a:spcBef>
-                <a:spcPts val="400"/>
-              </a:spcBef>
-              <a:spcAft>
-                <a:spcPts val="200"/>
-              </a:spcAft>
-            </a:pPr>
-            <a:r>
-              <a:rPr sz="1200">
-                <a:solidFill>
-                  <a:srgbClr val="3D5466"/>
-                </a:solidFill>
-                <a:latin typeface="Arial"/>
-              </a:rPr>
-              <a:t>Wann: Bei speziellem Branchenwissen oder neuem Kundensegment.</a:t>
-            </a:r>
-          </a:p>
-          <a:p>
-            <a:pPr>
-              <a:spcBef>
-                <a:spcPts val="400"/>
-              </a:spcBef>
-              <a:spcAft>
-                <a:spcPts val="200"/>
-              </a:spcAft>
-            </a:pPr>
-            <a:r>
-              <a:rPr sz="1200">
-                <a:solidFill>
-                  <a:srgbClr val="3D5466"/>
-                </a:solidFill>
-                <a:latin typeface="Arial"/>
-              </a:rPr>
-              <a:t>Ablauf:</a:t>
-            </a:r>
-          </a:p>
-          <a:p>
-            <a:pPr>
-              <a:spcBef>
-                <a:spcPts val="400"/>
-              </a:spcBef>
-              <a:spcAft>
-                <a:spcPts val="200"/>
-              </a:spcAft>
-            </a:pPr>
-            <a:r>
-              <a:rPr sz="1300">
-                <a:solidFill>
-                  <a:srgbClr val="3D5466"/>
-                </a:solidFill>
-                <a:latin typeface="Arial"/>
-              </a:rPr>
-              <a:t>▸  Kurze Vorbesprechung (10 Min.): Wer übernimmt welche Rolle? Welche Beobachtungsaufgabe hat der Gast?</a:t>
-            </a:r>
-          </a:p>
-          <a:p>
-            <a:pPr>
-              <a:spcBef>
-                <a:spcPts val="400"/>
-              </a:spcBef>
-              <a:spcAft>
-                <a:spcPts val="200"/>
-              </a:spcAft>
-            </a:pPr>
-            <a:r>
-              <a:rPr sz="1300">
-                <a:solidFill>
-                  <a:srgbClr val="3D5466"/>
-                </a:solidFill>
-                <a:latin typeface="Arial"/>
-              </a:rPr>
-              <a:t>▸  Kundenbesuch (gemeinsam, einer führt)</a:t>
-            </a:r>
-          </a:p>
-          <a:p>
-            <a:pPr>
-              <a:spcBef>
-                <a:spcPts val="400"/>
-              </a:spcBef>
-              <a:spcAft>
-                <a:spcPts val="200"/>
-              </a:spcAft>
-            </a:pPr>
-            <a:r>
-              <a:rPr sz="1300">
-                <a:solidFill>
-                  <a:srgbClr val="3D5466"/>
-                </a:solidFill>
-                <a:latin typeface="Arial"/>
-              </a:rPr>
-              <a:t>▸  Nachbesprechung (15 Min.): Beobachter gibt strukturiertes Feedback; Berater teilt Hintergrundwissen</a:t>
-            </a:r>
-          </a:p>
-          <a:p>
-            <a:pPr>
-              <a:spcBef>
-                <a:spcPts val="400"/>
-              </a:spcBef>
-              <a:spcAft>
-                <a:spcPts val="200"/>
-              </a:spcAft>
-            </a:pPr>
-            <a:r>
-              <a:rPr sz="1200">
-                <a:solidFill>
-                  <a:srgbClr val="3D5466"/>
-                </a:solidFill>
-                <a:latin typeface="Arial"/>
-              </a:rPr>
-              <a:t>Qualitätsfaktor: Der Beobachter hat vorab eine konkrete Beobachtungsaufgabe (z.B. „achte auf, wie der Kollege das Thema Nachfolge einführt").</a:t>
-            </a:r>
-          </a:p>
-        </p:txBody>
-      </p:sp>
-      <p:sp>
-        <p:nvSpPr>
-          <p:cNvPr id="9" name="Rectangle 8"/>
+      <p:pic>
+        <p:nvPicPr>
+          <p:cNvPr id="7" name="Picture 6" descr="image.png"/>
+          <p:cNvPicPr>
+            <a:picLocks noChangeAspect="1"/>
+          </p:cNvPicPr>
+          <p:nvPr/>
+        </p:nvPicPr>
+        <p:blipFill>
+          <a:blip r:embed="rId2"/>
+          <a:stretch>
+            <a:fillRect/>
+          </a:stretch>
+        </p:blipFill>
+        <p:spPr>
+          <a:xfrm>
+            <a:off x="2554863" y="1325880"/>
+            <a:ext cx="7079225" cy="4937760"/>
+          </a:xfrm>
+          <a:prstGeom prst="rect">
+            <a:avLst/>
+          </a:prstGeom>
+        </p:spPr>
+      </p:pic>
+      <p:sp>
+        <p:nvSpPr>
+          <p:cNvPr id="8" name="Rectangle 7"/>
           <p:cNvSpPr/>
           <p:nvPr/>
         </p:nvSpPr>
@@ -8611,7 +9707,7 @@
       </p:sp>
       <p:sp>
         <p:nvSpPr>
-          <p:cNvPr id="10" name="TextBox 9"/>
+          <p:cNvPr id="9" name="TextBox 8"/>
           <p:cNvSpPr txBox="1"/>
           <p:nvPr/>
         </p:nvSpPr>
@@ -8640,6 +9736,41 @@
                 <a:latin typeface="JetBrains Mono"/>
               </a:rPr>
               <a:t>Benedikt Zoller Coaching  ·  FKB Campus  ·  M19</a:t>
+            </a:r>
+          </a:p>
+        </p:txBody>
+      </p:sp>
+      <p:sp>
+        <p:nvSpPr>
+          <p:cNvPr id="10" name="TextBox 9"/>
+          <p:cNvSpPr txBox="1"/>
+          <p:nvPr/>
+        </p:nvSpPr>
+        <p:spPr>
+          <a:xfrm>
+            <a:off x="7176211" y="6583680"/>
+            <a:ext cx="4326940" cy="256032"/>
+          </a:xfrm>
+          <a:prstGeom prst="rect">
+            <a:avLst/>
+          </a:prstGeom>
+          <a:noFill/>
+        </p:spPr>
+        <p:txBody>
+          <a:bodyPr wrap="none">
+            <a:spAutoFit/>
+          </a:bodyPr>
+          <a:lstStyle/>
+          <a:p>
+            <a:pPr algn="r"/>
+            <a:r>
+              <a:rPr sz="700">
+                <a:solidFill>
+                  <a:srgbClr val="A0B4D2"/>
+                </a:solidFill>
+                <a:latin typeface="JetBrains Mono"/>
+              </a:rPr>
+              <a:t>Schaubild</a:t>
             </a:r>
           </a:p>
         </p:txBody>
@@ -8899,7 +10030,7 @@
                 </a:solidFill>
                 <a:latin typeface="Source Serif 4"/>
               </a:rPr>
-              <a:t>Methode 2: Strukturierte Fallbesprechung</a:t>
+              <a:t>Methode 1: Tandem-Kundenbesuch</a:t>
             </a:r>
           </a:p>
         </p:txBody>
@@ -8935,13 +10066,13 @@
               </a:spcAft>
             </a:pPr>
             <a:r>
-              <a:rPr sz="1200">
+              <a:rPr sz="1300">
                 <a:solidFill>
                   <a:srgbClr val="3D5466"/>
                 </a:solidFill>
                 <a:latin typeface="Arial"/>
               </a:rPr>
-              <a:t>Was: 45-minütiges Team-Format, in dem ein Berater einen aktuellen Fall vorstellt und das Team kollektiv reflektiert.</a:t>
+              <a:t>▸  Was: Zwei Berater besuchen gemeinsam einen Kunden – einer führt, einer beobachtet.</a:t>
             </a:r>
           </a:p>
           <a:p>
@@ -8954,13 +10085,13 @@
               </a:spcAft>
             </a:pPr>
             <a:r>
-              <a:rPr sz="1200">
+              <a:rPr sz="1300">
                 <a:solidFill>
                   <a:srgbClr val="3D5466"/>
                 </a:solidFill>
                 <a:latin typeface="Arial"/>
               </a:rPr>
-              <a:t>Struktur:</a:t>
+              <a:t>▸  Wann: Bei speziellem Branchenwissen oder neuem Kundensegment.</a:t>
             </a:r>
           </a:p>
           <a:p>
@@ -8973,13 +10104,89 @@
               </a:spcAft>
             </a:pPr>
             <a:r>
-              <a:rPr sz="1200">
+              <a:rPr sz="1300">
                 <a:solidFill>
                   <a:srgbClr val="3D5466"/>
                 </a:solidFill>
                 <a:latin typeface="Arial"/>
               </a:rPr>
-              <a:t>Qualitätsfaktor: Die stille Reflexion vor der Diskussion verhindert Gruppendenken (Anchoring-Bias).</a:t>
+              <a:t>▸  Ablauf:</a:t>
+            </a:r>
+          </a:p>
+          <a:p>
+            <a:pPr>
+              <a:spcBef>
+                <a:spcPts val="400"/>
+              </a:spcBef>
+              <a:spcAft>
+                <a:spcPts val="200"/>
+              </a:spcAft>
+            </a:pPr>
+            <a:r>
+              <a:rPr sz="1300">
+                <a:solidFill>
+                  <a:srgbClr val="3D5466"/>
+                </a:solidFill>
+                <a:latin typeface="Arial"/>
+              </a:rPr>
+              <a:t>▸  Kurze Vorbesprechung (10 Min.): Wer übernimmt welche Rolle? Welche Beobachtungsaufgabe hat der Gast?</a:t>
+            </a:r>
+          </a:p>
+          <a:p>
+            <a:pPr>
+              <a:spcBef>
+                <a:spcPts val="400"/>
+              </a:spcBef>
+              <a:spcAft>
+                <a:spcPts val="200"/>
+              </a:spcAft>
+            </a:pPr>
+            <a:r>
+              <a:rPr sz="1300">
+                <a:solidFill>
+                  <a:srgbClr val="3D5466"/>
+                </a:solidFill>
+                <a:latin typeface="Arial"/>
+              </a:rPr>
+              <a:t>▸  Kundenbesuch (gemeinsam, einer führt)</a:t>
+            </a:r>
+          </a:p>
+          <a:p>
+            <a:pPr>
+              <a:spcBef>
+                <a:spcPts val="400"/>
+              </a:spcBef>
+              <a:spcAft>
+                <a:spcPts val="200"/>
+              </a:spcAft>
+            </a:pPr>
+            <a:r>
+              <a:rPr sz="1300">
+                <a:solidFill>
+                  <a:srgbClr val="3D5466"/>
+                </a:solidFill>
+                <a:latin typeface="Arial"/>
+              </a:rPr>
+              <a:t>▸  Nachbesprechung (15 Min.): Beobachter gibt strukturiertes Feedback; Berater teilt Hintergrundwissen</a:t>
+            </a:r>
+          </a:p>
+          <a:p>
+            <a:pPr>
+              <a:spcBef>
+                <a:spcPts val="400"/>
+              </a:spcBef>
+              <a:spcAft>
+                <a:spcPts val="200"/>
+              </a:spcAft>
+            </a:pPr>
+            <a:r>
+              <a:rPr sz="1300">
+                <a:solidFill>
+                  <a:srgbClr val="3D5466"/>
+                </a:solidFill>
+                <a:latin typeface="Arial"/>
+              </a:rPr>
+              <a:t>▸  Qualitätsfaktor: Der Beobachter hat vorab eine konkrete Beobachtungsaufgabe (z.B. „achte auf, wie der Kollege das Thema Nachfolge einführt").</a:t>
             </a:r>
           </a:p>
         </p:txBody>
@@ -9317,7 +10524,7 @@
                 </a:solidFill>
                 <a:latin typeface="Source Serif 4"/>
               </a:rPr>
-              <a:t>Methode 3: Wissenslandkarte</a:t>
+              <a:t>Methode 2: Strukturierte Fallbesprechung</a:t>
             </a:r>
           </a:p>
         </p:txBody>
@@ -9353,13 +10560,13 @@
               </a:spcAft>
             </a:pPr>
             <a:r>
-              <a:rPr sz="1200">
+              <a:rPr sz="1300">
                 <a:solidFill>
                   <a:srgbClr val="3D5466"/>
                 </a:solidFill>
                 <a:latin typeface="Arial"/>
               </a:rPr>
-              <a:t>Was: Visualisierung, wer im Team über welches Spezialwissen verfügt.</a:t>
+              <a:t>▸  Was: 45-minütiges Team-Format, in dem ein Berater einen aktuellen Fall vorstellt und das Team kollektiv reflektiert.</a:t>
             </a:r>
           </a:p>
           <a:p>
@@ -9372,13 +10579,13 @@
               </a:spcAft>
             </a:pPr>
             <a:r>
-              <a:rPr sz="1200">
+              <a:rPr sz="1300">
                 <a:solidFill>
                   <a:srgbClr val="3D5466"/>
                 </a:solidFill>
                 <a:latin typeface="Arial"/>
               </a:rPr>
-              <a:t>Wann: Einmalig erstellen, halbjährlich aktualisieren.</a:t>
+              <a:t>▸  Struktur:</a:t>
             </a:r>
           </a:p>
           <a:p>
@@ -9391,32 +10598,13 @@
               </a:spcAft>
             </a:pPr>
             <a:r>
-              <a:rPr sz="1200">
+              <a:rPr sz="1300">
                 <a:solidFill>
                   <a:srgbClr val="3D5466"/>
                 </a:solidFill>
                 <a:latin typeface="Arial"/>
               </a:rPr>
-              <a:t>Inhalt: Pro Berater: Branchenexpertise, Sonderwissen (z.B. Nachfolge, Landwirtschaft, Heilberufe), bevorzugte Methoden, Kontaktnetzwerk.</a:t>
-            </a:r>
-          </a:p>
-          <a:p>
-            <a:pPr>
-              <a:spcBef>
-                <a:spcPts val="400"/>
-              </a:spcBef>
-              <a:spcAft>
-                <a:spcPts val="200"/>
-              </a:spcAft>
-            </a:pPr>
-            <a:r>
-              <a:rPr sz="1200">
-                <a:solidFill>
-                  <a:srgbClr val="3D5466"/>
-                </a:solidFill>
-                <a:latin typeface="Arial"/>
-              </a:rPr>
-              <a:t>Nutzen: Neue Berater wissen sofort, wen sie bei welchem Thema fragen sollen. Der Teamleiter erkennt Wissensinseln und -lücken.</a:t>
+              <a:t>▸  Qualitätsfaktor: Die stille Reflexion vor der Diskussion verhindert Gruppendenken (Anchoring-Bias).</a:t>
             </a:r>
           </a:p>
         </p:txBody>
@@ -9754,7 +10942,7 @@
                 </a:solidFill>
                 <a:latin typeface="Source Serif 4"/>
               </a:rPr>
-              <a:t>Methode 4: Lunch-and-Learn (15 Minuten)</a:t>
+              <a:t>Methode 3: Wissenslandkarte</a:t>
             </a:r>
           </a:p>
         </p:txBody>
@@ -9790,13 +10978,13 @@
               </a:spcAft>
             </a:pPr>
             <a:r>
-              <a:rPr sz="1200">
+              <a:rPr sz="1300">
                 <a:solidFill>
                   <a:srgbClr val="3D5466"/>
                 </a:solidFill>
                 <a:latin typeface="Arial"/>
               </a:rPr>
-              <a:t>Was: Kurzes, informelles Wissensformat – ein Berater erklärt an einem konkreten Beispiel eine Technik oder ein Konzept.</a:t>
+              <a:t>▸  Was: Visualisierung, wer im Team über welches Spezialwissen verfügt.</a:t>
             </a:r>
           </a:p>
           <a:p>
@@ -9809,13 +10997,13 @@
               </a:spcAft>
             </a:pPr>
             <a:r>
-              <a:rPr sz="1200">
+              <a:rPr sz="1300">
                 <a:solidFill>
                   <a:srgbClr val="3D5466"/>
                 </a:solidFill>
                 <a:latin typeface="Arial"/>
               </a:rPr>
-              <a:t>Wann: Spontan oder geplant, 1–2× pro Monat.</a:t>
+              <a:t>▸  Wann: Einmalig erstellen, halbjährlich aktualisieren.</a:t>
             </a:r>
           </a:p>
           <a:p>
@@ -9828,13 +11016,32 @@
               </a:spcAft>
             </a:pPr>
             <a:r>
-              <a:rPr sz="1200">
+              <a:rPr sz="1300">
                 <a:solidFill>
                   <a:srgbClr val="3D5466"/>
                 </a:solidFill>
                 <a:latin typeface="Arial"/>
               </a:rPr>
-              <a:t>Qualitätsfaktor: Keine Präsentation, keine Vorbereitung – nur Erzählen + Fragen.</a:t>
+              <a:t>▸  Inhalt: Pro Berater: Branchenexpertise, Sonderwissen (z.B. Nachfolge, Landwirtschaft, Heilberufe), bevorzugte Methoden, Kontaktnetzwerk.</a:t>
+            </a:r>
+          </a:p>
+          <a:p>
+            <a:pPr>
+              <a:spcBef>
+                <a:spcPts val="400"/>
+              </a:spcBef>
+              <a:spcAft>
+                <a:spcPts val="200"/>
+              </a:spcAft>
+            </a:pPr>
+            <a:r>
+              <a:rPr sz="1300">
+                <a:solidFill>
+                  <a:srgbClr val="3D5466"/>
+                </a:solidFill>
+                <a:latin typeface="Arial"/>
+              </a:rPr>
+              <a:t>▸  Nutzen: Neue Berater wissen sofort, wen sie bei welchem Thema fragen sollen. Der Teamleiter erkennt Wissensinseln und -lücken.</a:t>
             </a:r>
           </a:p>
         </p:txBody>

--- a/protected-downloads/praesentation/M19.pptx
+++ b/protected-downloads/praesentation/M19.pptx
@@ -4529,7 +4529,7 @@
                 </a:solidFill>
                 <a:latin typeface="JetBrains Mono"/>
               </a:rPr>
-              <a:t>Benedikt Zoller Coaching  ·  FKB Campus  ·  2026</a:t>
+              <a:t>FKB Campus  ·  2026</a:t>
             </a:r>
           </a:p>
         </p:txBody>
@@ -4982,7 +4982,7 @@
                 </a:solidFill>
                 <a:latin typeface="JetBrains Mono"/>
               </a:rPr>
-              <a:t>Benedikt Zoller Coaching  ·  FKB Campus  ·  M19</a:t>
+              <a:t>FKB Campus  ·  M19</a:t>
             </a:r>
           </a:p>
         </p:txBody>
@@ -5362,7 +5362,7 @@
                 </a:solidFill>
                 <a:latin typeface="JetBrains Mono"/>
               </a:rPr>
-              <a:t>Benedikt Zoller Coaching  ·  FKB Campus  ·  M19</a:t>
+              <a:t>FKB Campus  ·  M19</a:t>
             </a:r>
           </a:p>
         </p:txBody>
@@ -5951,7 +5951,7 @@
                 </a:solidFill>
                 <a:latin typeface="JetBrains Mono"/>
               </a:rPr>
-              <a:t>Benedikt Zoller Coaching  ·  FKB Campus  ·  M19</a:t>
+              <a:t>FKB Campus  ·  M19</a:t>
             </a:r>
           </a:p>
         </p:txBody>
@@ -6458,7 +6458,7 @@
                 </a:solidFill>
                 <a:latin typeface="JetBrains Mono"/>
               </a:rPr>
-              <a:t>Benedikt Zoller Coaching  ·  FKB Campus  ·  M19</a:t>
+              <a:t>FKB Campus  ·  M19</a:t>
             </a:r>
           </a:p>
         </p:txBody>
@@ -6873,7 +6873,7 @@
                 </a:solidFill>
                 <a:latin typeface="JetBrains Mono"/>
               </a:rPr>
-              <a:t>Benedikt Zoller Coaching  ·  FKB Campus  ·  M19</a:t>
+              <a:t>FKB Campus  ·  M19</a:t>
             </a:r>
           </a:p>
         </p:txBody>
@@ -7569,7 +7569,7 @@
                 </a:solidFill>
                 <a:latin typeface="JetBrains Mono"/>
               </a:rPr>
-              <a:t>Benedikt Zoller Coaching  ·  FKB Campus  ·  M19</a:t>
+              <a:t>FKB Campus  ·  M19</a:t>
             </a:r>
           </a:p>
         </p:txBody>
@@ -7970,7 +7970,7 @@
                 </a:solidFill>
                 <a:latin typeface="JetBrains Mono"/>
               </a:rPr>
-              <a:t>Benedikt Zoller Coaching  ·  FKB Campus  ·  M19</a:t>
+              <a:t>FKB Campus  ·  M19</a:t>
             </a:r>
           </a:p>
         </p:txBody>
@@ -8383,7 +8383,7 @@
                 </a:solidFill>
                 <a:latin typeface="JetBrains Mono"/>
               </a:rPr>
-              <a:t>Benedikt Zoller Coaching  ·  FKB Campus  ·  M19</a:t>
+              <a:t>FKB Campus  ·  M19</a:t>
             </a:r>
           </a:p>
         </p:txBody>
@@ -9062,7 +9062,7 @@
                 </a:solidFill>
                 <a:latin typeface="JetBrains Mono"/>
               </a:rPr>
-              <a:t>Benedikt Zoller Coaching  ·  FKB Campus  ·  M19</a:t>
+              <a:t>FKB Campus  ·  M19</a:t>
             </a:r>
           </a:p>
         </p:txBody>
@@ -9381,7 +9381,7 @@
                 </a:solidFill>
                 <a:latin typeface="JetBrains Mono"/>
               </a:rPr>
-              <a:t>Benedikt Zoller Coaching  ·  FKB Campus  ·  M19</a:t>
+              <a:t>FKB Campus  ·  M19</a:t>
             </a:r>
           </a:p>
         </p:txBody>
@@ -9735,7 +9735,7 @@
                 </a:solidFill>
                 <a:latin typeface="JetBrains Mono"/>
               </a:rPr>
-              <a:t>Benedikt Zoller Coaching  ·  FKB Campus  ·  M19</a:t>
+              <a:t>FKB Campus  ·  M19</a:t>
             </a:r>
           </a:p>
         </p:txBody>
@@ -10264,7 +10264,7 @@
                 </a:solidFill>
                 <a:latin typeface="JetBrains Mono"/>
               </a:rPr>
-              <a:t>Benedikt Zoller Coaching  ·  FKB Campus  ·  M19</a:t>
+              <a:t>FKB Campus  ·  M19</a:t>
             </a:r>
           </a:p>
         </p:txBody>
@@ -10682,7 +10682,7 @@
                 </a:solidFill>
                 <a:latin typeface="JetBrains Mono"/>
               </a:rPr>
-              <a:t>Benedikt Zoller Coaching  ·  FKB Campus  ·  M19</a:t>
+              <a:t>FKB Campus  ·  M19</a:t>
             </a:r>
           </a:p>
         </p:txBody>
@@ -11119,7 +11119,7 @@
                 </a:solidFill>
                 <a:latin typeface="JetBrains Mono"/>
               </a:rPr>
-              <a:t>Benedikt Zoller Coaching  ·  FKB Campus  ·  M19</a:t>
+              <a:t>FKB Campus  ·  M19</a:t>
             </a:r>
           </a:p>
         </p:txBody>

--- a/protected-downloads/praesentation/M19.pptx
+++ b/protected-downloads/praesentation/M19.pptx
@@ -8229,7 +8229,7 @@
                 </a:solidFill>
                 <a:latin typeface="Arial"/>
               </a:rPr>
-              <a:t>▸  Explizites von implizitem Wissen unterscheiden und ungenutzte Transferbereiche identifizieren</a:t>
+              <a:t>▸  Explizites und implizites Wissen im Beratungsalltag analysieren und ungenutzte Transferbereiche identifizieren</a:t>
             </a:r>
           </a:p>
           <a:p>
@@ -8753,7 +8753,7 @@
                 </a:solidFill>
                 <a:latin typeface="Consolas"/>
               </a:rPr>
-              <a:t>00:45       </a:t>
+              <a:t>00:40       </a:t>
             </a:r>
             <a:r>
               <a:rPr sz="1200" b="1">

--- a/protected-downloads/praesentation/M19.pptx
+++ b/protected-downloads/praesentation/M19.pptx
@@ -4451,7 +4451,7 @@
                 </a:solidFill>
                 <a:latin typeface="Arial"/>
               </a:rPr>
-              <a:t>v0.4</a:t>
+              <a:t>v1.0</a:t>
             </a:r>
           </a:p>
         </p:txBody>

--- a/protected-downloads/praesentation/M19.pptx
+++ b/protected-downloads/praesentation/M19.pptx
@@ -726,7 +726,7 @@
           <a:lstStyle/>
           <a:p>
             <a:r>
-              <a:t>Siehe Trainerhandbuch (Sektion 3) für Moderationshinweise, Timing und erwartete Teilnehmerreaktionen.</a:t>
+              <a:t>Moderation (HB Sec 3): Kein fertiges Tool – Pinnwand und Moderationskarten reichen Anleitung: Jede Person des Teams als Feld, darunter ihre Kernwissensgebiete notieren; Lücken rot markieren Häufiges Ergebnis: TN erkennen, dass Schlüsselwissen bei einer Person liegt (Single Point of Failure) Für neue Berater (&lt; 3 Jahre im Team): Wenn TN ihr Team noch nicht gut kennen, umformulieren: „Tragen Sie ein, was Sie wissen – und markieren Sie rot, was Sie nicht wissen. Dieses Ergebnis ist genauso wertvoll: Es zeigt die Wissenstransparenz-Lücke in Ihrem Team." Das „Nicht-Wissen" ist kein Scheitern, sondern das ehrlichste Ergebnis der Übung.</a:t>
             </a:r>
           </a:p>
         </p:txBody>
@@ -6125,7 +6125,7 @@
                 </a:solidFill>
                 <a:latin typeface="Source Serif 4"/>
               </a:rPr>
-              <a:t>Arbeitsblatt 1: Wissenslandkarte – eigener Steckbrief</a:t>
+              <a:t>AB-1: Wissenslandkarte – eigener Steckbrief</a:t>
             </a:r>
           </a:p>
         </p:txBody>
@@ -6753,7 +6753,7 @@
                 </a:solidFill>
                 <a:latin typeface="Source Serif 4"/>
               </a:rPr>
-              <a:t>Arbeitsblatt 2: Fallbesprechung vorbereiten</a:t>
+              <a:t>AB-2: Fallbesprechung vorbereiten</a:t>
             </a:r>
           </a:p>
         </p:txBody>
@@ -7047,7 +7047,7 @@
                 </a:solidFill>
                 <a:latin typeface="Source Serif 4"/>
               </a:rPr>
-              <a:t>Arbeitsblatt 3: Wissenstransfer-Maßnahmenplan</a:t>
+              <a:t>AB-3: Wissenstransfer-Maßnahmenplan</a:t>
             </a:r>
           </a:p>
         </p:txBody>

--- a/protected-downloads/praesentation/M19.pptx
+++ b/protected-downloads/praesentation/M19.pptx
@@ -4126,7 +4126,7 @@
                 <a:solidFill>
                   <a:srgbClr val="C8D2E6"/>
                 </a:solidFill>
-                <a:latin typeface="JetBrains Mono"/>
+                <a:latin typeface="Consolas"/>
               </a:rPr>
               <a:t>FKB CAMPUS  ·  FIRMENKUNDENAKADEMIE  ·  M19</a:t>
             </a:r>
@@ -4161,7 +4161,7 @@
                 <a:solidFill>
                   <a:srgbClr val="FFFFFF"/>
                 </a:solidFill>
-                <a:latin typeface="Source Serif 4"/>
+                <a:latin typeface="Arial"/>
               </a:rPr>
               <a:t>Wissenstransfer im Team</a:t>
             </a:r>
@@ -4196,7 +4196,7 @@
                 <a:solidFill>
                   <a:srgbClr val="BECDE6"/>
                 </a:solidFill>
-                <a:latin typeface="Source Serif 4"/>
+                <a:latin typeface="Arial"/>
               </a:rPr>
               <a:t>Implizites Expertenwissen systematisch weitergeben und Lerngemeinschaften im FK-Team aufbauen</a:t>
             </a:r>
@@ -4274,7 +4274,7 @@
                 <a:solidFill>
                   <a:srgbClr val="A0B4D2"/>
                 </a:solidFill>
-                <a:latin typeface="JetBrains Mono"/>
+                <a:latin typeface="Consolas"/>
               </a:rPr>
               <a:t>KOMPETENZFELD</a:t>
             </a:r>
@@ -4344,7 +4344,7 @@
                 <a:solidFill>
                   <a:srgbClr val="A0B4D2"/>
                 </a:solidFill>
-                <a:latin typeface="JetBrains Mono"/>
+                <a:latin typeface="Consolas"/>
               </a:rPr>
               <a:t>KOMPETENZSTUFE</a:t>
             </a:r>
@@ -4414,7 +4414,7 @@
                 <a:solidFill>
                   <a:srgbClr val="A0B4D2"/>
                 </a:solidFill>
-                <a:latin typeface="JetBrains Mono"/>
+                <a:latin typeface="Consolas"/>
               </a:rPr>
               <a:t>VERSION</a:t>
             </a:r>
@@ -4527,7 +4527,7 @@
                 <a:solidFill>
                   <a:srgbClr val="96A5BE"/>
                 </a:solidFill>
-                <a:latin typeface="JetBrains Mono"/>
+                <a:latin typeface="Consolas"/>
               </a:rPr>
               <a:t>FKB Campus  ·  2026</a:t>
             </a:r>
@@ -4562,7 +4562,7 @@
                 <a:solidFill>
                   <a:srgbClr val="96A5BE"/>
                 </a:solidFill>
-                <a:latin typeface="JetBrains Mono"/>
+                <a:latin typeface="Consolas"/>
               </a:rPr>
               <a:t>Trainer-Präsentation</a:t>
             </a:r>
@@ -4701,7 +4701,7 @@
                 <a:solidFill>
                   <a:srgbClr val="78808C"/>
                 </a:solidFill>
-                <a:latin typeface="JetBrains Mono"/>
+                <a:latin typeface="Consolas"/>
               </a:rPr>
               <a:t>M19  ·  INHALT</a:t>
             </a:r>
@@ -4822,7 +4822,7 @@
                 <a:solidFill>
                   <a:srgbClr val="1F2C56"/>
                 </a:solidFill>
-                <a:latin typeface="Source Serif 4"/>
+                <a:latin typeface="Arial"/>
               </a:rPr>
               <a:t>Methode 4: Lunch-and-Learn (15 Minuten)</a:t>
             </a:r>
@@ -4838,7 +4838,7 @@
         <p:spPr>
           <a:xfrm>
             <a:off x="685800" y="1417320"/>
-            <a:ext cx="10817352" cy="5029200"/>
+            <a:ext cx="10817352" cy="4892040"/>
           </a:xfrm>
           <a:prstGeom prst="rect">
             <a:avLst/>
@@ -4846,12 +4846,12 @@
           <a:noFill/>
         </p:spPr>
         <p:txBody>
-          <a:bodyPr wrap="square">
+          <a:bodyPr wrap="square" anchor="ctr">
             <a:spAutoFit/>
           </a:bodyPr>
           <a:lstStyle/>
           <a:p>
-            <a:pPr>
+            <a:pPr marL="190500" indent="-190500">
               <a:spcBef>
                 <a:spcPts val="400"/>
               </a:spcBef>
@@ -4870,7 +4870,7 @@
             </a:r>
           </a:p>
           <a:p>
-            <a:pPr>
+            <a:pPr marL="190500" indent="-190500">
               <a:spcBef>
                 <a:spcPts val="400"/>
               </a:spcBef>
@@ -4889,7 +4889,7 @@
             </a:r>
           </a:p>
           <a:p>
-            <a:pPr>
+            <a:pPr marL="190500" indent="-190500">
               <a:spcBef>
                 <a:spcPts val="400"/>
               </a:spcBef>
@@ -4980,7 +4980,7 @@
                 <a:solidFill>
                   <a:srgbClr val="A0B4D2"/>
                 </a:solidFill>
-                <a:latin typeface="JetBrains Mono"/>
+                <a:latin typeface="Consolas"/>
               </a:rPr>
               <a:t>FKB Campus  ·  M19</a:t>
             </a:r>
@@ -5119,7 +5119,7 @@
                 <a:solidFill>
                   <a:srgbClr val="78808C"/>
                 </a:solidFill>
-                <a:latin typeface="JetBrains Mono"/>
+                <a:latin typeface="Consolas"/>
               </a:rPr>
               <a:t>M19  ·  INHALT</a:t>
             </a:r>
@@ -5240,7 +5240,7 @@
                 <a:solidFill>
                   <a:srgbClr val="1F2C56"/>
                 </a:solidFill>
-                <a:latin typeface="Source Serif 4"/>
+                <a:latin typeface="Arial"/>
               </a:rPr>
               <a:t>Hinweis: Hybride und standortverteilte Teams</a:t>
             </a:r>
@@ -5256,7 +5256,7 @@
         <p:spPr>
           <a:xfrm>
             <a:off x="685800" y="1417320"/>
-            <a:ext cx="10817352" cy="5029200"/>
+            <a:ext cx="10817352" cy="4892040"/>
           </a:xfrm>
           <a:prstGeom prst="rect">
             <a:avLst/>
@@ -5264,12 +5264,12 @@
           <a:noFill/>
         </p:spPr>
         <p:txBody>
-          <a:bodyPr wrap="square">
+          <a:bodyPr wrap="square" anchor="ctr">
             <a:spAutoFit/>
           </a:bodyPr>
           <a:lstStyle/>
           <a:p>
-            <a:pPr>
+            <a:pPr marL="190500" indent="-190500">
               <a:spcBef>
                 <a:spcPts val="400"/>
               </a:spcBef>
@@ -5360,7 +5360,7 @@
                 <a:solidFill>
                   <a:srgbClr val="A0B4D2"/>
                 </a:solidFill>
-                <a:latin typeface="JetBrains Mono"/>
+                <a:latin typeface="Consolas"/>
               </a:rPr>
               <a:t>FKB Campus  ·  M19</a:t>
             </a:r>
@@ -5499,7 +5499,7 @@
                 <a:solidFill>
                   <a:srgbClr val="78808C"/>
                 </a:solidFill>
-                <a:latin typeface="JetBrains Mono"/>
+                <a:latin typeface="Consolas"/>
               </a:rPr>
               <a:t>M19  ·  INHALT</a:t>
             </a:r>
@@ -5620,7 +5620,7 @@
                 <a:solidFill>
                   <a:srgbClr val="1F2C56"/>
                 </a:solidFill>
-                <a:latin typeface="Source Serif 4"/>
+                <a:latin typeface="Arial"/>
               </a:rPr>
               <a:t>Methode 5: Reverse Mentoring</a:t>
             </a:r>
@@ -5636,7 +5636,7 @@
         <p:spPr>
           <a:xfrm>
             <a:off x="685800" y="1417320"/>
-            <a:ext cx="10817352" cy="5029200"/>
+            <a:ext cx="10817352" cy="4892040"/>
           </a:xfrm>
           <a:prstGeom prst="rect">
             <a:avLst/>
@@ -5649,7 +5649,7 @@
           </a:bodyPr>
           <a:lstStyle/>
           <a:p>
-            <a:pPr>
+            <a:pPr marL="190500" indent="-190500">
               <a:spcBef>
                 <a:spcPts val="400"/>
               </a:spcBef>
@@ -5668,7 +5668,7 @@
             </a:r>
           </a:p>
           <a:p>
-            <a:pPr>
+            <a:pPr marL="190500" indent="-190500">
               <a:spcBef>
                 <a:spcPts val="400"/>
               </a:spcBef>
@@ -5687,7 +5687,7 @@
             </a:r>
           </a:p>
           <a:p>
-            <a:pPr>
+            <a:pPr marL="190500" indent="-190500">
               <a:spcBef>
                 <a:spcPts val="400"/>
               </a:spcBef>
@@ -5706,7 +5706,7 @@
             </a:r>
           </a:p>
           <a:p>
-            <a:pPr>
+            <a:pPr marL="190500" indent="-190500">
               <a:spcBef>
                 <a:spcPts val="400"/>
               </a:spcBef>
@@ -5725,7 +5725,7 @@
             </a:r>
           </a:p>
           <a:p>
-            <a:pPr>
+            <a:pPr marL="190500" indent="-190500">
               <a:spcBef>
                 <a:spcPts val="400"/>
               </a:spcBef>
@@ -5744,7 +5744,7 @@
             </a:r>
           </a:p>
           <a:p>
-            <a:pPr>
+            <a:pPr marL="190500" indent="-190500">
               <a:spcBef>
                 <a:spcPts val="400"/>
               </a:spcBef>
@@ -5763,7 +5763,7 @@
             </a:r>
           </a:p>
           <a:p>
-            <a:pPr>
+            <a:pPr marL="190500" indent="-190500">
               <a:spcBef>
                 <a:spcPts val="400"/>
               </a:spcBef>
@@ -5782,7 +5782,7 @@
             </a:r>
           </a:p>
           <a:p>
-            <a:pPr>
+            <a:pPr marL="190500" indent="-190500">
               <a:spcBef>
                 <a:spcPts val="400"/>
               </a:spcBef>
@@ -5801,7 +5801,7 @@
             </a:r>
           </a:p>
           <a:p>
-            <a:pPr>
+            <a:pPr marL="190500" indent="-190500">
               <a:spcBef>
                 <a:spcPts val="400"/>
               </a:spcBef>
@@ -5820,7 +5820,7 @@
             </a:r>
           </a:p>
           <a:p>
-            <a:pPr>
+            <a:pPr marL="190500" indent="-190500">
               <a:spcBef>
                 <a:spcPts val="400"/>
               </a:spcBef>
@@ -5839,7 +5839,7 @@
             </a:r>
           </a:p>
           <a:p>
-            <a:pPr>
+            <a:pPr marL="190500" indent="-190500">
               <a:spcBef>
                 <a:spcPts val="400"/>
               </a:spcBef>
@@ -5858,7 +5858,7 @@
             </a:r>
           </a:p>
           <a:p>
-            <a:pPr>
+            <a:pPr marL="190500" indent="-190500">
               <a:spcBef>
                 <a:spcPts val="400"/>
               </a:spcBef>
@@ -5949,7 +5949,7 @@
                 <a:solidFill>
                   <a:srgbClr val="A0B4D2"/>
                 </a:solidFill>
-                <a:latin typeface="JetBrains Mono"/>
+                <a:latin typeface="Consolas"/>
               </a:rPr>
               <a:t>FKB Campus  ·  M19</a:t>
             </a:r>
@@ -6088,7 +6088,7 @@
                 <a:solidFill>
                   <a:srgbClr val="78808C"/>
                 </a:solidFill>
-                <a:latin typeface="JetBrains Mono"/>
+                <a:latin typeface="Consolas"/>
               </a:rPr>
               <a:t>M19  ·  ÜBERSICHT</a:t>
             </a:r>
@@ -6123,7 +6123,7 @@
                 <a:solidFill>
                   <a:srgbClr val="1F2C56"/>
                 </a:solidFill>
-                <a:latin typeface="Source Serif 4"/>
+                <a:latin typeface="Arial"/>
               </a:rPr>
               <a:t>AB-1: Wissenslandkarte – eigener Steckbrief</a:t>
             </a:r>
@@ -6456,7 +6456,7 @@
                 <a:solidFill>
                   <a:srgbClr val="A0B4D2"/>
                 </a:solidFill>
-                <a:latin typeface="JetBrains Mono"/>
+                <a:latin typeface="Consolas"/>
               </a:rPr>
               <a:t>FKB Campus  ·  M19</a:t>
             </a:r>
@@ -6491,7 +6491,7 @@
                 <a:solidFill>
                   <a:srgbClr val="A0B4D2"/>
                 </a:solidFill>
-                <a:latin typeface="JetBrains Mono"/>
+                <a:latin typeface="Consolas"/>
               </a:rPr>
               <a:t>Übersicht</a:t>
             </a:r>
@@ -6630,7 +6630,7 @@
                 <a:solidFill>
                   <a:srgbClr val="78808C"/>
                 </a:solidFill>
-                <a:latin typeface="JetBrains Mono"/>
+                <a:latin typeface="Consolas"/>
               </a:rPr>
               <a:t>M19  ·  INHALT</a:t>
             </a:r>
@@ -6751,7 +6751,7 @@
                 <a:solidFill>
                   <a:srgbClr val="1F2C56"/>
                 </a:solidFill>
-                <a:latin typeface="Source Serif 4"/>
+                <a:latin typeface="Arial"/>
               </a:rPr>
               <a:t>AB-2: Fallbesprechung vorbereiten</a:t>
             </a:r>
@@ -6767,7 +6767,7 @@
         <p:spPr>
           <a:xfrm>
             <a:off x="685800" y="1417320"/>
-            <a:ext cx="10817352" cy="5029200"/>
+            <a:ext cx="10817352" cy="4892040"/>
           </a:xfrm>
           <a:prstGeom prst="rect">
             <a:avLst/>
@@ -6775,12 +6775,12 @@
           <a:noFill/>
         </p:spPr>
         <p:txBody>
-          <a:bodyPr wrap="square">
+          <a:bodyPr wrap="square" anchor="ctr">
             <a:spAutoFit/>
           </a:bodyPr>
           <a:lstStyle/>
           <a:p>
-            <a:pPr>
+            <a:pPr marL="190500" indent="-190500">
               <a:spcBef>
                 <a:spcPts val="400"/>
               </a:spcBef>
@@ -6871,7 +6871,7 @@
                 <a:solidFill>
                   <a:srgbClr val="A0B4D2"/>
                 </a:solidFill>
-                <a:latin typeface="JetBrains Mono"/>
+                <a:latin typeface="Consolas"/>
               </a:rPr>
               <a:t>FKB Campus  ·  M19</a:t>
             </a:r>
@@ -7010,7 +7010,7 @@
                 <a:solidFill>
                   <a:srgbClr val="78808C"/>
                 </a:solidFill>
-                <a:latin typeface="JetBrains Mono"/>
+                <a:latin typeface="Consolas"/>
               </a:rPr>
               <a:t>M19  ·  ÜBERSICHT</a:t>
             </a:r>
@@ -7045,7 +7045,7 @@
                 <a:solidFill>
                   <a:srgbClr val="1F2C56"/>
                 </a:solidFill>
-                <a:latin typeface="Source Serif 4"/>
+                <a:latin typeface="Arial"/>
               </a:rPr>
               <a:t>AB-3: Wissenstransfer-Maßnahmenplan</a:t>
             </a:r>
@@ -7567,7 +7567,7 @@
                 <a:solidFill>
                   <a:srgbClr val="A0B4D2"/>
                 </a:solidFill>
-                <a:latin typeface="JetBrains Mono"/>
+                <a:latin typeface="Consolas"/>
               </a:rPr>
               <a:t>FKB Campus  ·  M19</a:t>
             </a:r>
@@ -7602,7 +7602,7 @@
                 <a:solidFill>
                   <a:srgbClr val="A0B4D2"/>
                 </a:solidFill>
-                <a:latin typeface="JetBrains Mono"/>
+                <a:latin typeface="Consolas"/>
               </a:rPr>
               <a:t>Übersicht</a:t>
             </a:r>
@@ -7741,7 +7741,7 @@
                 <a:solidFill>
                   <a:srgbClr val="78808C"/>
                 </a:solidFill>
-                <a:latin typeface="JetBrains Mono"/>
+                <a:latin typeface="Consolas"/>
               </a:rPr>
               <a:t>ÜBERBLICK  ·  M19</a:t>
             </a:r>
@@ -7819,7 +7819,7 @@
                 <a:solidFill>
                   <a:srgbClr val="1F2C56"/>
                 </a:solidFill>
-                <a:latin typeface="Source Serif 4"/>
+                <a:latin typeface="Arial"/>
               </a:rPr>
               <a:t>Worum geht es heute</a:t>
             </a:r>
@@ -7968,7 +7968,7 @@
                 <a:solidFill>
                   <a:srgbClr val="A0B4D2"/>
                 </a:solidFill>
-                <a:latin typeface="JetBrains Mono"/>
+                <a:latin typeface="Consolas"/>
               </a:rPr>
               <a:t>FKB Campus  ·  M19</a:t>
             </a:r>
@@ -8107,7 +8107,7 @@
                 <a:solidFill>
                   <a:srgbClr val="78808C"/>
                 </a:solidFill>
-                <a:latin typeface="JetBrains Mono"/>
+                <a:latin typeface="Consolas"/>
               </a:rPr>
               <a:t>LERNZIELE  ·  M19</a:t>
             </a:r>
@@ -8185,7 +8185,7 @@
                 <a:solidFill>
                   <a:srgbClr val="1F2C56"/>
                 </a:solidFill>
-                <a:latin typeface="Source Serif 4"/>
+                <a:latin typeface="Arial"/>
               </a:rPr>
               <a:t>Was Sie heute mitnehmen</a:t>
             </a:r>
@@ -8381,7 +8381,7 @@
                 <a:solidFill>
                   <a:srgbClr val="A0B4D2"/>
                 </a:solidFill>
-                <a:latin typeface="JetBrains Mono"/>
+                <a:latin typeface="Consolas"/>
               </a:rPr>
               <a:t>FKB Campus  ·  M19</a:t>
             </a:r>
@@ -8520,7 +8520,7 @@
                 <a:solidFill>
                   <a:srgbClr val="78808C"/>
                 </a:solidFill>
-                <a:latin typeface="JetBrains Mono"/>
+                <a:latin typeface="Consolas"/>
               </a:rPr>
               <a:t>AGENDA  ·  M19</a:t>
             </a:r>
@@ -8598,7 +8598,7 @@
                 <a:solidFill>
                   <a:srgbClr val="1F2C56"/>
                 </a:solidFill>
-                <a:latin typeface="Source Serif 4"/>
+                <a:latin typeface="Arial"/>
               </a:rPr>
               <a:t>So läuft das Modul</a:t>
             </a:r>
@@ -9060,7 +9060,7 @@
                 <a:solidFill>
                   <a:srgbClr val="A0B4D2"/>
                 </a:solidFill>
-                <a:latin typeface="JetBrains Mono"/>
+                <a:latin typeface="Consolas"/>
               </a:rPr>
               <a:t>FKB Campus  ·  M19</a:t>
             </a:r>
@@ -9199,7 +9199,7 @@
                 <a:solidFill>
                   <a:srgbClr val="78808C"/>
                 </a:solidFill>
-                <a:latin typeface="JetBrains Mono"/>
+                <a:latin typeface="Consolas"/>
               </a:rPr>
               <a:t>M19  ·  SCHAUBILD</a:t>
             </a:r>
@@ -9234,7 +9234,7 @@
                 <a:solidFill>
                   <a:srgbClr val="1F2C56"/>
                 </a:solidFill>
-                <a:latin typeface="Source Serif 4"/>
+                <a:latin typeface="Arial"/>
               </a:rPr>
               <a:t>SECI-Modell Wissensspirale nach Nonaka &amp; Takeuchi</a:t>
             </a:r>
@@ -9379,7 +9379,7 @@
                 <a:solidFill>
                   <a:srgbClr val="A0B4D2"/>
                 </a:solidFill>
-                <a:latin typeface="JetBrains Mono"/>
+                <a:latin typeface="Consolas"/>
               </a:rPr>
               <a:t>FKB Campus  ·  M19</a:t>
             </a:r>
@@ -9414,7 +9414,7 @@
                 <a:solidFill>
                   <a:srgbClr val="A0B4D2"/>
                 </a:solidFill>
-                <a:latin typeface="JetBrains Mono"/>
+                <a:latin typeface="Consolas"/>
               </a:rPr>
               <a:t>Schaubild</a:t>
             </a:r>
@@ -9553,7 +9553,7 @@
                 <a:solidFill>
                   <a:srgbClr val="78808C"/>
                 </a:solidFill>
-                <a:latin typeface="JetBrains Mono"/>
+                <a:latin typeface="Consolas"/>
               </a:rPr>
               <a:t>M19  ·  SCHAUBILD</a:t>
             </a:r>
@@ -9588,7 +9588,7 @@
                 <a:solidFill>
                   <a:srgbClr val="1F2C56"/>
                 </a:solidFill>
-                <a:latin typeface="Source Serif 4"/>
+                <a:latin typeface="Arial"/>
               </a:rPr>
               <a:t>Kolb-Lernzyklus</a:t>
             </a:r>
@@ -9733,7 +9733,7 @@
                 <a:solidFill>
                   <a:srgbClr val="A0B4D2"/>
                 </a:solidFill>
-                <a:latin typeface="JetBrains Mono"/>
+                <a:latin typeface="Consolas"/>
               </a:rPr>
               <a:t>FKB Campus  ·  M19</a:t>
             </a:r>
@@ -9768,7 +9768,7 @@
                 <a:solidFill>
                   <a:srgbClr val="A0B4D2"/>
                 </a:solidFill>
-                <a:latin typeface="JetBrains Mono"/>
+                <a:latin typeface="Consolas"/>
               </a:rPr>
               <a:t>Schaubild</a:t>
             </a:r>
@@ -9907,7 +9907,7 @@
                 <a:solidFill>
                   <a:srgbClr val="78808C"/>
                 </a:solidFill>
-                <a:latin typeface="JetBrains Mono"/>
+                <a:latin typeface="Consolas"/>
               </a:rPr>
               <a:t>M19  ·  INHALT</a:t>
             </a:r>
@@ -10028,7 +10028,7 @@
                 <a:solidFill>
                   <a:srgbClr val="1F2C56"/>
                 </a:solidFill>
-                <a:latin typeface="Source Serif 4"/>
+                <a:latin typeface="Arial"/>
               </a:rPr>
               <a:t>Methode 1: Tandem-Kundenbesuch</a:t>
             </a:r>
@@ -10044,7 +10044,7 @@
         <p:spPr>
           <a:xfrm>
             <a:off x="685800" y="1417320"/>
-            <a:ext cx="10817352" cy="5029200"/>
+            <a:ext cx="10817352" cy="4892040"/>
           </a:xfrm>
           <a:prstGeom prst="rect">
             <a:avLst/>
@@ -10057,7 +10057,7 @@
           </a:bodyPr>
           <a:lstStyle/>
           <a:p>
-            <a:pPr>
+            <a:pPr marL="190500" indent="-190500">
               <a:spcBef>
                 <a:spcPts val="400"/>
               </a:spcBef>
@@ -10076,7 +10076,7 @@
             </a:r>
           </a:p>
           <a:p>
-            <a:pPr>
+            <a:pPr marL="190500" indent="-190500">
               <a:spcBef>
                 <a:spcPts val="400"/>
               </a:spcBef>
@@ -10095,7 +10095,7 @@
             </a:r>
           </a:p>
           <a:p>
-            <a:pPr>
+            <a:pPr marL="190500" indent="-190500">
               <a:spcBef>
                 <a:spcPts val="400"/>
               </a:spcBef>
@@ -10114,7 +10114,7 @@
             </a:r>
           </a:p>
           <a:p>
-            <a:pPr>
+            <a:pPr marL="190500" indent="-190500">
               <a:spcBef>
                 <a:spcPts val="400"/>
               </a:spcBef>
@@ -10133,7 +10133,7 @@
             </a:r>
           </a:p>
           <a:p>
-            <a:pPr>
+            <a:pPr marL="190500" indent="-190500">
               <a:spcBef>
                 <a:spcPts val="400"/>
               </a:spcBef>
@@ -10152,7 +10152,7 @@
             </a:r>
           </a:p>
           <a:p>
-            <a:pPr>
+            <a:pPr marL="190500" indent="-190500">
               <a:spcBef>
                 <a:spcPts val="400"/>
               </a:spcBef>
@@ -10171,7 +10171,7 @@
             </a:r>
           </a:p>
           <a:p>
-            <a:pPr>
+            <a:pPr marL="190500" indent="-190500">
               <a:spcBef>
                 <a:spcPts val="400"/>
               </a:spcBef>
@@ -10262,7 +10262,7 @@
                 <a:solidFill>
                   <a:srgbClr val="A0B4D2"/>
                 </a:solidFill>
-                <a:latin typeface="JetBrains Mono"/>
+                <a:latin typeface="Consolas"/>
               </a:rPr>
               <a:t>FKB Campus  ·  M19</a:t>
             </a:r>
@@ -10401,7 +10401,7 @@
                 <a:solidFill>
                   <a:srgbClr val="78808C"/>
                 </a:solidFill>
-                <a:latin typeface="JetBrains Mono"/>
+                <a:latin typeface="Consolas"/>
               </a:rPr>
               <a:t>M19  ·  INHALT</a:t>
             </a:r>
@@ -10522,7 +10522,7 @@
                 <a:solidFill>
                   <a:srgbClr val="1F2C56"/>
                 </a:solidFill>
-                <a:latin typeface="Source Serif 4"/>
+                <a:latin typeface="Arial"/>
               </a:rPr>
               <a:t>Methode 2: Strukturierte Fallbesprechung</a:t>
             </a:r>
@@ -10538,7 +10538,7 @@
         <p:spPr>
           <a:xfrm>
             <a:off x="685800" y="1417320"/>
-            <a:ext cx="10817352" cy="5029200"/>
+            <a:ext cx="10817352" cy="4892040"/>
           </a:xfrm>
           <a:prstGeom prst="rect">
             <a:avLst/>
@@ -10546,12 +10546,12 @@
           <a:noFill/>
         </p:spPr>
         <p:txBody>
-          <a:bodyPr wrap="square">
+          <a:bodyPr wrap="square" anchor="ctr">
             <a:spAutoFit/>
           </a:bodyPr>
           <a:lstStyle/>
           <a:p>
-            <a:pPr>
+            <a:pPr marL="190500" indent="-190500">
               <a:spcBef>
                 <a:spcPts val="400"/>
               </a:spcBef>
@@ -10570,7 +10570,7 @@
             </a:r>
           </a:p>
           <a:p>
-            <a:pPr>
+            <a:pPr marL="190500" indent="-190500">
               <a:spcBef>
                 <a:spcPts val="400"/>
               </a:spcBef>
@@ -10589,7 +10589,7 @@
             </a:r>
           </a:p>
           <a:p>
-            <a:pPr>
+            <a:pPr marL="190500" indent="-190500">
               <a:spcBef>
                 <a:spcPts val="400"/>
               </a:spcBef>
@@ -10680,7 +10680,7 @@
                 <a:solidFill>
                   <a:srgbClr val="A0B4D2"/>
                 </a:solidFill>
-                <a:latin typeface="JetBrains Mono"/>
+                <a:latin typeface="Consolas"/>
               </a:rPr>
               <a:t>FKB Campus  ·  M19</a:t>
             </a:r>
@@ -10819,7 +10819,7 @@
                 <a:solidFill>
                   <a:srgbClr val="78808C"/>
                 </a:solidFill>
-                <a:latin typeface="JetBrains Mono"/>
+                <a:latin typeface="Consolas"/>
               </a:rPr>
               <a:t>M19  ·  INHALT</a:t>
             </a:r>
@@ -10940,7 +10940,7 @@
                 <a:solidFill>
                   <a:srgbClr val="1F2C56"/>
                 </a:solidFill>
-                <a:latin typeface="Source Serif 4"/>
+                <a:latin typeface="Arial"/>
               </a:rPr>
               <a:t>Methode 3: Wissenslandkarte</a:t>
             </a:r>
@@ -10956,7 +10956,7 @@
         <p:spPr>
           <a:xfrm>
             <a:off x="685800" y="1417320"/>
-            <a:ext cx="10817352" cy="5029200"/>
+            <a:ext cx="10817352" cy="4892040"/>
           </a:xfrm>
           <a:prstGeom prst="rect">
             <a:avLst/>
@@ -10964,12 +10964,12 @@
           <a:noFill/>
         </p:spPr>
         <p:txBody>
-          <a:bodyPr wrap="square">
+          <a:bodyPr wrap="square" anchor="ctr">
             <a:spAutoFit/>
           </a:bodyPr>
           <a:lstStyle/>
           <a:p>
-            <a:pPr>
+            <a:pPr marL="190500" indent="-190500">
               <a:spcBef>
                 <a:spcPts val="400"/>
               </a:spcBef>
@@ -10988,7 +10988,7 @@
             </a:r>
           </a:p>
           <a:p>
-            <a:pPr>
+            <a:pPr marL="190500" indent="-190500">
               <a:spcBef>
                 <a:spcPts val="400"/>
               </a:spcBef>
@@ -11007,7 +11007,7 @@
             </a:r>
           </a:p>
           <a:p>
-            <a:pPr>
+            <a:pPr marL="190500" indent="-190500">
               <a:spcBef>
                 <a:spcPts val="400"/>
               </a:spcBef>
@@ -11026,7 +11026,7 @@
             </a:r>
           </a:p>
           <a:p>
-            <a:pPr>
+            <a:pPr marL="190500" indent="-190500">
               <a:spcBef>
                 <a:spcPts val="400"/>
               </a:spcBef>
@@ -11117,7 +11117,7 @@
                 <a:solidFill>
                   <a:srgbClr val="A0B4D2"/>
                 </a:solidFill>
-                <a:latin typeface="JetBrains Mono"/>
+                <a:latin typeface="Consolas"/>
               </a:rPr>
               <a:t>FKB Campus  ·  M19</a:t>
             </a:r>

--- a/protected-downloads/praesentation/M19.pptx
+++ b/protected-downloads/praesentation/M19.pptx
@@ -19,7 +19,6 @@
     <p:sldId id="267" r:id="rId19"/>
     <p:sldId id="268" r:id="rId20"/>
     <p:sldId id="269" r:id="rId21"/>
-    <p:sldId id="270" r:id="rId22"/>
   </p:sldIdLst>
   <p:sldSz cx="12188952" cy="6858000" type="screen4x3"/>
   <p:notesSz cx="6858000" cy="9144000"/>
@@ -586,7 +585,7 @@
           <a:lstStyle/>
           <a:p>
             <a:r>
-              <a:t>Siehe Trainerhandbuch (Sektion 3) für Moderationshinweise, Timing und erwartete Teilnehmerreaktionen.</a:t>
+              <a:t>Einstieg: „Was wüsste Ihr Team nicht mehr, wenn Ihr erfahrenster Berater morgen ginge?"</a:t>
             </a:r>
           </a:p>
         </p:txBody>
@@ -656,7 +655,7 @@
           <a:lstStyle/>
           <a:p>
             <a:r>
-              <a:t>Siehe Trainerhandbuch (Sektion 3) für Moderationshinweise, Timing und erwartete Teilnehmerreaktionen.</a:t>
+              <a:t>SECI (Nonaka &amp; Takeuchi) zeigt, warum reines Dokumentieren nicht reicht – Wissen muss zirkulieren.</a:t>
             </a:r>
           </a:p>
         </p:txBody>
@@ -726,7 +725,7 @@
           <a:lstStyle/>
           <a:p>
             <a:r>
-              <a:t>Moderation (HB Sec 3): Kein fertiges Tool – Pinnwand und Moderationskarten reichen Anleitung: Jede Person des Teams als Feld, darunter ihre Kernwissensgebiete notieren; Lücken rot markieren Häufiges Ergebnis: TN erkennen, dass Schlüsselwissen bei einer Person liegt (Single Point of Failure) Für neue Berater (&lt; 3 Jahre im Team): Wenn TN ihr Team noch nicht gut kennen, umformulieren: „Tragen Sie ein, was Sie wissen – und markieren Sie rot, was Sie nicht wissen. Dieses Ergebnis ist genauso wertvoll: Es zeigt die Wissenstransparenz-Lücke in Ihrem Team." Das „Nicht-Wissen" ist kein Scheitern, sondern das ehrlichste Ergebnis der Übung.</a:t>
+              <a:t>Kolb verbindet die Transfermethoden: jede Methode setzt an einer anderen Stelle des Zyklus an.</a:t>
             </a:r>
           </a:p>
         </p:txBody>
@@ -796,7 +795,7 @@
           <a:lstStyle/>
           <a:p>
             <a:r>
-              <a:t>Siehe Trainerhandbuch (Sektion 3) für Moderationshinweise, Timing und erwartete Teilnehmerreaktionen.</a:t>
+              <a:t>Jede Methode ist niederschwellig und alltagstauglich; typische Transferbarrieren (Zeit, Konkurrenz, Scheu) gezielt adressieren.</a:t>
             </a:r>
           </a:p>
         </p:txBody>
@@ -866,7 +865,7 @@
           <a:lstStyle/>
           <a:p>
             <a:r>
-              <a:t>Siehe Trainerhandbuch (Sektion 3) für Moderationshinweise, Timing und erwartete Teilnehmerreaktionen.</a:t>
+              <a:t>Fall Team Ostbayern: verteiltes Wissen, kein Format zum Teilen. Lösung: passende Methode zur Barriere wählen, verbindlich terminieren.</a:t>
             </a:r>
           </a:p>
         </p:txBody>
@@ -936,7 +935,7 @@
           <a:lstStyle/>
           <a:p>
             <a:r>
-              <a:t>Siehe Trainerhandbuch (Sektion 3) für Moderationshinweise, Timing und erwartete Teilnehmerreaktionen.</a:t>
+              <a:t>Überleitung zum Maßnahmenplan und Selbstcheck.</a:t>
             </a:r>
           </a:p>
         </p:txBody>
@@ -1006,7 +1005,7 @@
           <a:lstStyle/>
           <a:p>
             <a:r>
-              <a:t>Siehe Trainerhandbuch (Sektion 3) für Moderationshinweise, Timing und erwartete Teilnehmerreaktionen.</a:t>
+              <a:t>Maßnahmenplan und Selbstcheck als Transferanker.</a:t>
             </a:r>
           </a:p>
         </p:txBody>
@@ -4824,7 +4823,7 @@
                 </a:solidFill>
                 <a:latin typeface="Arial"/>
               </a:rPr>
-              <a:t>Methode 4: Lunch-and-Learn (15 Minuten)</a:t>
+              <a:t>Fünf bewährte Transfermethoden im FK-Kontext</a:t>
             </a:r>
           </a:p>
         </p:txBody>
@@ -4850,6 +4849,25 @@
             <a:spAutoFit/>
           </a:bodyPr>
           <a:lstStyle/>
+          <a:p>
+            <a:pPr marL="177800" indent="-177800">
+              <a:spcBef>
+                <a:spcPts val="600"/>
+              </a:spcBef>
+              <a:spcAft>
+                <a:spcPts val="200"/>
+              </a:spcAft>
+            </a:pPr>
+            <a:r>
+              <a:rPr sz="1200" i="1">
+                <a:solidFill>
+                  <a:srgbClr val="3D5466"/>
+                </a:solidFill>
+                <a:latin typeface="Arial"/>
+              </a:rPr>
+              <a:t>→  Wissenstransfer braucht Formate – fünf niederschwellige Methoden, die im Alltag funktionieren.</a:t>
+            </a:r>
+          </a:p>
           <a:p>
             <a:pPr marL="190500" indent="-190500">
               <a:spcBef>
@@ -4866,7 +4884,7 @@
                 </a:solidFill>
                 <a:latin typeface="Arial"/>
               </a:rPr>
-              <a:t>▸  Was: Kurzes, informelles Wissensformat – ein Berater erklärt an einem konkreten Beispiel eine Technik oder ein Konzept.</a:t>
+              <a:t>▸  Tandem-Kundenbesuch, strukturierte Fallbesprechung, Wissenslandkarte.</a:t>
             </a:r>
           </a:p>
           <a:p>
@@ -4885,26 +4903,7 @@
                 </a:solidFill>
                 <a:latin typeface="Arial"/>
               </a:rPr>
-              <a:t>▸  Wann: Spontan oder geplant, 1–2× pro Monat.</a:t>
-            </a:r>
-          </a:p>
-          <a:p>
-            <a:pPr marL="190500" indent="-190500">
-              <a:spcBef>
-                <a:spcPts val="400"/>
-              </a:spcBef>
-              <a:spcAft>
-                <a:spcPts val="200"/>
-              </a:spcAft>
-            </a:pPr>
-            <a:r>
-              <a:rPr sz="1300">
-                <a:solidFill>
-                  <a:srgbClr val="3D5466"/>
-                </a:solidFill>
-                <a:latin typeface="Arial"/>
-              </a:rPr>
-              <a:t>▸  Qualitätsfaktor: Keine Präsentation, keine Vorbereitung – nur Erzählen + Fragen.</a:t>
+              <a:t>▸  Lunch-and-Learn (15 Minuten), Reverse Mentoring – auch für hybride Teams.</a:t>
             </a:r>
           </a:p>
         </p:txBody>
@@ -5020,7 +5019,7 @@
             <a:avLst/>
           </a:prstGeom>
           <a:solidFill>
-            <a:srgbClr val="EDEDF3"/>
+            <a:srgbClr val="1F2C56"/>
           </a:solidFill>
           <a:ln>
             <a:noFill/>
@@ -5050,57 +5049,14 @@
       </p:sp>
       <p:sp>
         <p:nvSpPr>
-          <p:cNvPr id="3" name="Rectangle 2"/>
-          <p:cNvSpPr/>
-          <p:nvPr/>
-        </p:nvSpPr>
-        <p:spPr>
-          <a:xfrm>
-            <a:off x="0" y="0"/>
-            <a:ext cx="12188952" cy="50292"/>
-          </a:xfrm>
-          <a:prstGeom prst="rect">
-            <a:avLst/>
-          </a:prstGeom>
-          <a:solidFill>
-            <a:srgbClr val="1F2C56"/>
-          </a:solidFill>
-          <a:ln>
-            <a:noFill/>
-          </a:ln>
-        </p:spPr>
-        <p:style>
-          <a:lnRef idx="1">
-            <a:schemeClr val="accent1"/>
-          </a:lnRef>
-          <a:fillRef idx="3">
-            <a:schemeClr val="accent1"/>
-          </a:fillRef>
-          <a:effectRef idx="2">
-            <a:schemeClr val="accent1"/>
-          </a:effectRef>
-          <a:fontRef idx="minor">
-            <a:schemeClr val="lt1"/>
-          </a:fontRef>
-        </p:style>
-        <p:txBody>
-          <a:bodyPr rtlCol="0" anchor="ctr"/>
-          <a:lstStyle/>
-          <a:p>
-            <a:pPr algn="ctr"/>
-          </a:p>
-        </p:txBody>
-      </p:sp>
-      <p:sp>
-        <p:nvSpPr>
-          <p:cNvPr id="4" name="TextBox 3"/>
+          <p:cNvPr id="3" name="TextBox 2"/>
           <p:cNvSpPr txBox="1"/>
           <p:nvPr/>
         </p:nvSpPr>
         <p:spPr>
           <a:xfrm>
-            <a:off x="685800" y="109728"/>
-            <a:ext cx="10817352" cy="228600"/>
+            <a:off x="685800" y="2377440"/>
+            <a:ext cx="10817352" cy="365760"/>
           </a:xfrm>
           <a:prstGeom prst="rect">
             <a:avLst/>
@@ -5115,70 +5071,27 @@
           <a:p>
             <a:pPr algn="l"/>
             <a:r>
-              <a:rPr sz="750">
-                <a:solidFill>
-                  <a:srgbClr val="78808C"/>
+              <a:rPr sz="1200">
+                <a:solidFill>
+                  <a:srgbClr val="D9C089"/>
                 </a:solidFill>
                 <a:latin typeface="Consolas"/>
               </a:rPr>
-              <a:t>M19  ·  INHALT</a:t>
-            </a:r>
-          </a:p>
-        </p:txBody>
-      </p:sp>
-      <p:sp>
-        <p:nvSpPr>
-          <p:cNvPr id="5" name="Rectangle 4"/>
+              <a:t>FALLARBEIT</a:t>
+            </a:r>
+          </a:p>
+        </p:txBody>
+      </p:sp>
+      <p:sp>
+        <p:nvSpPr>
+          <p:cNvPr id="4" name="Rectangle 3"/>
           <p:cNvSpPr/>
           <p:nvPr/>
         </p:nvSpPr>
         <p:spPr>
           <a:xfrm>
-            <a:off x="0" y="1234440"/>
-            <a:ext cx="12188952" cy="12700"/>
-          </a:xfrm>
-          <a:prstGeom prst="rect">
-            <a:avLst/>
-          </a:prstGeom>
-          <a:solidFill>
-            <a:srgbClr val="D8DFE4"/>
-          </a:solidFill>
-          <a:ln>
-            <a:noFill/>
-          </a:ln>
-        </p:spPr>
-        <p:style>
-          <a:lnRef idx="1">
-            <a:schemeClr val="accent1"/>
-          </a:lnRef>
-          <a:fillRef idx="3">
-            <a:schemeClr val="accent1"/>
-          </a:fillRef>
-          <a:effectRef idx="2">
-            <a:schemeClr val="accent1"/>
-          </a:effectRef>
-          <a:fontRef idx="minor">
-            <a:schemeClr val="lt1"/>
-          </a:fontRef>
-        </p:style>
-        <p:txBody>
-          <a:bodyPr rtlCol="0" anchor="ctr"/>
-          <a:lstStyle/>
-          <a:p>
-            <a:pPr algn="ctr"/>
-          </a:p>
-        </p:txBody>
-      </p:sp>
-      <p:sp>
-        <p:nvSpPr>
-          <p:cNvPr id="6" name="Rectangle 5"/>
-          <p:cNvSpPr/>
-          <p:nvPr/>
-        </p:nvSpPr>
-        <p:spPr>
-          <a:xfrm>
-            <a:off x="685800" y="502920"/>
-            <a:ext cx="36576" cy="658368"/>
+            <a:off x="685800" y="2788920"/>
+            <a:ext cx="548640" cy="38100"/>
           </a:xfrm>
           <a:prstGeom prst="rect">
             <a:avLst/>
@@ -5214,14 +5127,14 @@
       </p:sp>
       <p:sp>
         <p:nvSpPr>
-          <p:cNvPr id="7" name="TextBox 6"/>
+          <p:cNvPr id="5" name="TextBox 4"/>
           <p:cNvSpPr txBox="1"/>
           <p:nvPr/>
         </p:nvSpPr>
         <p:spPr>
           <a:xfrm>
-            <a:off x="813816" y="502920"/>
-            <a:ext cx="10634472" cy="685800"/>
+            <a:off x="685800" y="3017520"/>
+            <a:ext cx="10817352" cy="1463040"/>
           </a:xfrm>
           <a:prstGeom prst="rect">
             <a:avLst/>
@@ -5236,27 +5149,27 @@
           <a:p>
             <a:pPr algn="l"/>
             <a:r>
-              <a:rPr sz="2400" b="1" i="0">
-                <a:solidFill>
-                  <a:srgbClr val="1F2C56"/>
+              <a:rPr sz="4000" b="1" i="0">
+                <a:solidFill>
+                  <a:srgbClr val="FFFFFF"/>
                 </a:solidFill>
                 <a:latin typeface="Arial"/>
               </a:rPr>
-              <a:t>Hinweis: Hybride und standortverteilte Teams</a:t>
-            </a:r>
-          </a:p>
-        </p:txBody>
-      </p:sp>
-      <p:sp>
-        <p:nvSpPr>
-          <p:cNvPr id="8" name="TextBox 7"/>
+              <a:t>Praxiscase Team Ostbayern</a:t>
+            </a:r>
+          </a:p>
+        </p:txBody>
+      </p:sp>
+      <p:sp>
+        <p:nvSpPr>
+          <p:cNvPr id="6" name="TextBox 5"/>
           <p:cNvSpPr txBox="1"/>
           <p:nvPr/>
         </p:nvSpPr>
         <p:spPr>
           <a:xfrm>
-            <a:off x="685800" y="1417320"/>
-            <a:ext cx="10817352" cy="4892040"/>
+            <a:off x="685800" y="4480560"/>
+            <a:ext cx="8653881" cy="1280160"/>
           </a:xfrm>
           <a:prstGeom prst="rect">
             <a:avLst/>
@@ -5264,84 +5177,34 @@
           <a:noFill/>
         </p:spPr>
         <p:txBody>
-          <a:bodyPr wrap="square" anchor="ctr">
+          <a:bodyPr wrap="square">
             <a:spAutoFit/>
           </a:bodyPr>
           <a:lstStyle/>
           <a:p>
-            <a:pPr marL="190500" indent="-190500">
-              <a:spcBef>
-                <a:spcPts val="400"/>
-              </a:spcBef>
-              <a:spcAft>
-                <a:spcPts val="200"/>
-              </a:spcAft>
-            </a:pPr>
-            <a:r>
-              <a:rPr sz="1300">
-                <a:solidFill>
-                  <a:srgbClr val="3D5466"/>
+            <a:pPr algn="l"/>
+            <a:r>
+              <a:rPr sz="1600" b="0" i="0">
+                <a:solidFill>
+                  <a:srgbClr val="C8D2E6"/>
                 </a:solidFill>
                 <a:latin typeface="Arial"/>
               </a:rPr>
-              <a:t>▸  Viele VR-Bank-FK-Teams arbeiten inzwischen über mehrere Geschäftsstellen verteilt oder hybrid. Die o.g. Methoden funktionieren auch auf Distanz – mit kleinen Anpassungen:</a:t>
-            </a:r>
-          </a:p>
-        </p:txBody>
-      </p:sp>
-      <p:sp>
-        <p:nvSpPr>
-          <p:cNvPr id="9" name="Rectangle 8"/>
-          <p:cNvSpPr/>
-          <p:nvPr/>
-        </p:nvSpPr>
-        <p:spPr>
-          <a:xfrm>
-            <a:off x="0" y="6510528"/>
-            <a:ext cx="12188952" cy="347472"/>
-          </a:xfrm>
-          <a:prstGeom prst="rect">
-            <a:avLst/>
-          </a:prstGeom>
-          <a:solidFill>
-            <a:srgbClr val="0A1937"/>
-          </a:solidFill>
-          <a:ln>
-            <a:noFill/>
-          </a:ln>
-        </p:spPr>
-        <p:style>
-          <a:lnRef idx="1">
-            <a:schemeClr val="accent1"/>
-          </a:lnRef>
-          <a:fillRef idx="3">
-            <a:schemeClr val="accent1"/>
-          </a:fillRef>
-          <a:effectRef idx="2">
-            <a:schemeClr val="accent1"/>
-          </a:effectRef>
-          <a:fontRef idx="minor">
-            <a:schemeClr val="lt1"/>
-          </a:fontRef>
-        </p:style>
-        <p:txBody>
-          <a:bodyPr rtlCol="0" anchor="ctr"/>
-          <a:lstStyle/>
-          <a:p>
-            <a:pPr algn="ctr"/>
-          </a:p>
-        </p:txBody>
-      </p:sp>
-      <p:sp>
-        <p:nvSpPr>
-          <p:cNvPr id="10" name="TextBox 9"/>
+              <a:t>Einen konkreten Wissenstransfer-Plan für das eigene Team entwerfen.</a:t>
+            </a:r>
+          </a:p>
+        </p:txBody>
+      </p:sp>
+      <p:sp>
+        <p:nvSpPr>
+          <p:cNvPr id="7" name="TextBox 6"/>
           <p:cNvSpPr txBox="1"/>
           <p:nvPr/>
         </p:nvSpPr>
         <p:spPr>
           <a:xfrm>
-            <a:off x="685800" y="6583680"/>
-            <a:ext cx="6490411" cy="256032"/>
+            <a:off x="685800" y="6355080"/>
+            <a:ext cx="10817352" cy="274320"/>
           </a:xfrm>
           <a:prstGeom prst="rect">
             <a:avLst/>
@@ -5358,7 +5221,7 @@
             <a:r>
               <a:rPr sz="700">
                 <a:solidFill>
-                  <a:srgbClr val="A0B4D2"/>
+                  <a:srgbClr val="8CA0C3"/>
                 </a:solidFill>
                 <a:latin typeface="Consolas"/>
               </a:rPr>
@@ -5501,7 +5364,7 @@
                 </a:solidFill>
                 <a:latin typeface="Consolas"/>
               </a:rPr>
-              <a:t>M19  ·  INHALT</a:t>
+              <a:t>M19  ·  ARBEITSBLATT</a:t>
             </a:r>
           </a:p>
         </p:txBody>
@@ -5622,7 +5485,7 @@
                 </a:solidFill>
                 <a:latin typeface="Arial"/>
               </a:rPr>
-              <a:t>Methode 5: Reverse Mentoring</a:t>
+              <a:t>Wissenstransfer im Team bearbeiten</a:t>
             </a:r>
           </a:p>
         </p:txBody>
@@ -5635,8 +5498,8 @@
         </p:nvSpPr>
         <p:spPr>
           <a:xfrm>
-            <a:off x="685800" y="1417320"/>
-            <a:ext cx="10817352" cy="4892040"/>
+            <a:off x="685800" y="1554480"/>
+            <a:ext cx="10817352" cy="3840480"/>
           </a:xfrm>
           <a:prstGeom prst="rect">
             <a:avLst/>
@@ -5658,13 +5521,13 @@
               </a:spcAft>
             </a:pPr>
             <a:r>
-              <a:rPr sz="1300">
+              <a:rPr sz="1400">
                 <a:solidFill>
                   <a:srgbClr val="3D5466"/>
                 </a:solidFill>
                 <a:latin typeface="Arial"/>
               </a:rPr>
-              <a:t>▸  Was: Jüngere/neuere Berater unterweisen erfahrene Berater in Digitalthemen oder neuen Systemfunktionen.</a:t>
+              <a:t>▸  Erstellen Sie Ihren Wissenslandkarten-Steckbrief: Was können nur Sie? (AB-1)</a:t>
             </a:r>
           </a:p>
           <a:p>
@@ -5677,13 +5540,13 @@
               </a:spcAft>
             </a:pPr>
             <a:r>
-              <a:rPr sz="1300">
+              <a:rPr sz="1400">
                 <a:solidFill>
                   <a:srgbClr val="3D5466"/>
                 </a:solidFill>
                 <a:latin typeface="Arial"/>
               </a:rPr>
-              <a:t>▸  Wann: Bei Einführung neuer Tools (z.B. agree-Updates, CRM-Erweiterungen).</a:t>
+              <a:t>▸  Bereiten Sie eine strukturierte Fallbesprechung vor (AB-2).</a:t>
             </a:r>
           </a:p>
           <a:p>
@@ -5696,191 +5559,98 @@
               </a:spcAft>
             </a:pPr>
             <a:r>
-              <a:rPr sz="1300">
+              <a:rPr sz="1400">
                 <a:solidFill>
                   <a:srgbClr val="3D5466"/>
                 </a:solidFill>
                 <a:latin typeface="Arial"/>
               </a:rPr>
-              <a:t>▸  Nutzen: Durchbricht die Hierarchie als Wissensbarriere; wertet beide Seiten auf.</a:t>
-            </a:r>
-          </a:p>
-          <a:p>
-            <a:pPr marL="190500" indent="-190500">
-              <a:spcBef>
-                <a:spcPts val="400"/>
-              </a:spcBef>
-              <a:spcAft>
-                <a:spcPts val="200"/>
-              </a:spcAft>
-            </a:pPr>
-            <a:r>
-              <a:rPr sz="1300">
-                <a:solidFill>
-                  <a:srgbClr val="3D5466"/>
+              <a:t>▸  Entwerfen Sie einen Wissenstransfer-Maßnahmenplan für Ihr Team (AB-3).</a:t>
+            </a:r>
+          </a:p>
+        </p:txBody>
+      </p:sp>
+      <p:sp>
+        <p:nvSpPr>
+          <p:cNvPr id="9" name="Rectangle 8"/>
+          <p:cNvSpPr/>
+          <p:nvPr/>
+        </p:nvSpPr>
+        <p:spPr>
+          <a:xfrm>
+            <a:off x="685800" y="5486400"/>
+            <a:ext cx="10817352" cy="640080"/>
+          </a:xfrm>
+          <a:prstGeom prst="rect">
+            <a:avLst/>
+          </a:prstGeom>
+          <a:solidFill>
+            <a:srgbClr val="1F2C56"/>
+          </a:solidFill>
+          <a:ln>
+            <a:noFill/>
+          </a:ln>
+        </p:spPr>
+        <p:style>
+          <a:lnRef idx="1">
+            <a:schemeClr val="accent1"/>
+          </a:lnRef>
+          <a:fillRef idx="3">
+            <a:schemeClr val="accent1"/>
+          </a:fillRef>
+          <a:effectRef idx="2">
+            <a:schemeClr val="accent1"/>
+          </a:effectRef>
+          <a:fontRef idx="minor">
+            <a:schemeClr val="lt1"/>
+          </a:fontRef>
+        </p:style>
+        <p:txBody>
+          <a:bodyPr rtlCol="0" anchor="ctr"/>
+          <a:lstStyle/>
+          <a:p>
+            <a:pPr algn="ctr"/>
+          </a:p>
+        </p:txBody>
+      </p:sp>
+      <p:sp>
+        <p:nvSpPr>
+          <p:cNvPr id="10" name="TextBox 9"/>
+          <p:cNvSpPr txBox="1"/>
+          <p:nvPr/>
+        </p:nvSpPr>
+        <p:spPr>
+          <a:xfrm>
+            <a:off x="868680" y="5596128"/>
+            <a:ext cx="10451592" cy="457200"/>
+          </a:xfrm>
+          <a:prstGeom prst="rect">
+            <a:avLst/>
+          </a:prstGeom>
+          <a:noFill/>
+        </p:spPr>
+        <p:txBody>
+          <a:bodyPr wrap="square">
+            <a:spAutoFit/>
+          </a:bodyPr>
+          <a:lstStyle/>
+          <a:p>
+            <a:pPr algn="l"/>
+            <a:r>
+              <a:rPr sz="1300" b="1" i="0">
+                <a:solidFill>
+                  <a:srgbClr val="FFFFFF"/>
                 </a:solidFill>
                 <a:latin typeface="Arial"/>
               </a:rPr>
-              <a:t>▸  ## 4.6 Typische Transferbarrieren und Gegenmaßnahmen</a:t>
-            </a:r>
-          </a:p>
-          <a:p>
-            <a:pPr marL="190500" indent="-190500">
-              <a:spcBef>
-                <a:spcPts val="400"/>
-              </a:spcBef>
-              <a:spcAft>
-                <a:spcPts val="200"/>
-              </a:spcAft>
-            </a:pPr>
-            <a:r>
-              <a:rPr sz="1300">
-                <a:solidFill>
-                  <a:srgbClr val="3D5466"/>
-                </a:solidFill>
-                <a:latin typeface="Arial"/>
-              </a:rPr>
-              <a:t>▸  ## 4.7 Praxiscase: Team Ostbayern</a:t>
-            </a:r>
-          </a:p>
-          <a:p>
-            <a:pPr marL="190500" indent="-190500">
-              <a:spcBef>
-                <a:spcPts val="400"/>
-              </a:spcBef>
-              <a:spcAft>
-                <a:spcPts val="200"/>
-              </a:spcAft>
-            </a:pPr>
-            <a:r>
-              <a:rPr sz="1300">
-                <a:solidFill>
-                  <a:srgbClr val="3D5466"/>
-                </a:solidFill>
-                <a:latin typeface="Arial"/>
-              </a:rPr>
-              <a:t>▸  Ausgangssituation</a:t>
-            </a:r>
-          </a:p>
-          <a:p>
-            <a:pPr marL="190500" indent="-190500">
-              <a:spcBef>
-                <a:spcPts val="400"/>
-              </a:spcBef>
-              <a:spcAft>
-                <a:spcPts val="200"/>
-              </a:spcAft>
-            </a:pPr>
-            <a:r>
-              <a:rPr sz="1300">
-                <a:solidFill>
-                  <a:srgbClr val="3D5466"/>
-                </a:solidFill>
-                <a:latin typeface="Arial"/>
-              </a:rPr>
-              <a:t>▸  Gleichzeitig sind drei jüngere Berater seit 2–4 Jahren im Team. Sie beherrschen agree gut, kennen aber die regionalen Besonderheiten kaum.</a:t>
-            </a:r>
-          </a:p>
-          <a:p>
-            <a:pPr marL="190500" indent="-190500">
-              <a:spcBef>
-                <a:spcPts val="400"/>
-              </a:spcBef>
-              <a:spcAft>
-                <a:spcPts val="200"/>
-              </a:spcAft>
-            </a:pPr>
-            <a:r>
-              <a:rPr sz="1300">
-                <a:solidFill>
-                  <a:srgbClr val="3D5466"/>
-                </a:solidFill>
-                <a:latin typeface="Arial"/>
-              </a:rPr>
-              <a:t>▸  Maßnahmen von Claudia Möller</a:t>
-            </a:r>
-          </a:p>
-          <a:p>
-            <a:pPr marL="190500" indent="-190500">
-              <a:spcBef>
-                <a:spcPts val="400"/>
-              </a:spcBef>
-              <a:spcAft>
-                <a:spcPts val="200"/>
-              </a:spcAft>
-            </a:pPr>
-            <a:r>
-              <a:rPr sz="1300">
-                <a:solidFill>
-                  <a:srgbClr val="3D5466"/>
-                </a:solidFill>
-                <a:latin typeface="Arial"/>
-              </a:rPr>
-              <a:t>▸  Schritt 1 – Wissenslandkarte erstellen (Monat 1):</a:t>
-            </a:r>
-          </a:p>
-          <a:p>
-            <a:pPr marL="190500" indent="-190500">
-              <a:spcBef>
-                <a:spcPts val="400"/>
-              </a:spcBef>
-              <a:spcAft>
-                <a:spcPts val="200"/>
-              </a:spcAft>
-            </a:pPr>
-            <a:r>
-              <a:rPr sz="1300">
-                <a:solidFill>
-                  <a:srgbClr val="3D5466"/>
-                </a:solidFill>
-                <a:latin typeface="Arial"/>
-              </a:rPr>
-              <a:t>▸  Schritt 2 – Tandem-Besuche einführen (Monat 2–3):</a:t>
-            </a:r>
-          </a:p>
-          <a:p>
-            <a:pPr marL="190500" indent="-190500">
-              <a:spcBef>
-                <a:spcPts val="400"/>
-              </a:spcBef>
-              <a:spcAft>
-                <a:spcPts val="200"/>
-              </a:spcAft>
-            </a:pPr>
-            <a:r>
-              <a:rPr sz="1300">
-                <a:solidFill>
-                  <a:srgbClr val="3D5466"/>
-                </a:solidFill>
-                <a:latin typeface="Arial"/>
-              </a:rPr>
-              <a:t>▸  Schritt 3 – Monatliche Fallbesprechung (ab Monat 2):</a:t>
-            </a:r>
-          </a:p>
-          <a:p>
-            <a:pPr marL="190500" indent="-190500">
-              <a:spcBef>
-                <a:spcPts val="400"/>
-              </a:spcBef>
-              <a:spcAft>
-                <a:spcPts val="200"/>
-              </a:spcAft>
-            </a:pPr>
-            <a:r>
-              <a:rPr sz="1300">
-                <a:solidFill>
-                  <a:srgbClr val="3D5466"/>
-                </a:solidFill>
-                <a:latin typeface="Arial"/>
-              </a:rPr>
-              <a:t>▸  Ergebnis nach 6 Monaten</a:t>
-            </a:r>
-          </a:p>
-        </p:txBody>
-      </p:sp>
-      <p:sp>
-        <p:nvSpPr>
-          <p:cNvPr id="9" name="Rectangle 8"/>
+              <a:t>→  Bearbeitung im Teilnehmer-Workbook (Arbeitsblatt mit Ausfüllfeldern)</a:t>
+            </a:r>
+          </a:p>
+        </p:txBody>
+      </p:sp>
+      <p:sp>
+        <p:nvSpPr>
+          <p:cNvPr id="11" name="Rectangle 10"/>
           <p:cNvSpPr/>
           <p:nvPr/>
         </p:nvSpPr>
@@ -5923,7 +5693,7 @@
       </p:sp>
       <p:sp>
         <p:nvSpPr>
-          <p:cNvPr id="10" name="TextBox 9"/>
+          <p:cNvPr id="12" name="TextBox 11"/>
           <p:cNvSpPr txBox="1"/>
           <p:nvPr/>
         </p:nvSpPr>
@@ -5989,7 +5759,7 @@
             <a:avLst/>
           </a:prstGeom>
           <a:solidFill>
-            <a:srgbClr val="FFFFFF"/>
+            <a:srgbClr val="EDEDF3"/>
           </a:solidFill>
           <a:ln>
             <a:noFill/>
@@ -6090,43 +5860,51 @@
                 </a:solidFill>
                 <a:latin typeface="Consolas"/>
               </a:rPr>
-              <a:t>M19  ·  ÜBERSICHT</a:t>
-            </a:r>
-          </a:p>
-        </p:txBody>
-      </p:sp>
-      <p:sp>
-        <p:nvSpPr>
-          <p:cNvPr id="5" name="TextBox 4"/>
-          <p:cNvSpPr txBox="1"/>
-          <p:nvPr/>
-        </p:nvSpPr>
-        <p:spPr>
-          <a:xfrm>
-            <a:off x="685800" y="502920"/>
-            <a:ext cx="10817352" cy="594360"/>
-          </a:xfrm>
-          <a:prstGeom prst="rect">
-            <a:avLst/>
-          </a:prstGeom>
-          <a:noFill/>
-        </p:spPr>
-        <p:txBody>
-          <a:bodyPr wrap="square">
-            <a:spAutoFit/>
-          </a:bodyPr>
-          <a:lstStyle/>
-          <a:p>
-            <a:pPr algn="l"/>
-            <a:r>
-              <a:rPr sz="2000" b="1" i="0">
-                <a:solidFill>
-                  <a:srgbClr val="1F2C56"/>
-                </a:solidFill>
-                <a:latin typeface="Arial"/>
-              </a:rPr>
-              <a:t>AB-1: Wissenslandkarte – eigener Steckbrief</a:t>
-            </a:r>
+              <a:t>M19  ·  INHALT</a:t>
+            </a:r>
+          </a:p>
+        </p:txBody>
+      </p:sp>
+      <p:sp>
+        <p:nvSpPr>
+          <p:cNvPr id="5" name="Rectangle 4"/>
+          <p:cNvSpPr/>
+          <p:nvPr/>
+        </p:nvSpPr>
+        <p:spPr>
+          <a:xfrm>
+            <a:off x="0" y="1234440"/>
+            <a:ext cx="12188952" cy="12700"/>
+          </a:xfrm>
+          <a:prstGeom prst="rect">
+            <a:avLst/>
+          </a:prstGeom>
+          <a:solidFill>
+            <a:srgbClr val="D8DFE4"/>
+          </a:solidFill>
+          <a:ln>
+            <a:noFill/>
+          </a:ln>
+        </p:spPr>
+        <p:style>
+          <a:lnRef idx="1">
+            <a:schemeClr val="accent1"/>
+          </a:lnRef>
+          <a:fillRef idx="3">
+            <a:schemeClr val="accent1"/>
+          </a:fillRef>
+          <a:effectRef idx="2">
+            <a:schemeClr val="accent1"/>
+          </a:effectRef>
+          <a:fontRef idx="minor">
+            <a:schemeClr val="lt1"/>
+          </a:fontRef>
+        </p:style>
+        <p:txBody>
+          <a:bodyPr rtlCol="0" anchor="ctr"/>
+          <a:lstStyle/>
+          <a:p>
+            <a:pPr algn="ctr"/>
           </a:p>
         </p:txBody>
       </p:sp>
@@ -6138,8 +5916,8 @@
         </p:nvSpPr>
         <p:spPr>
           <a:xfrm>
-            <a:off x="685800" y="1143000"/>
-            <a:ext cx="10817352" cy="25400"/>
+            <a:off x="685800" y="502920"/>
+            <a:ext cx="36576" cy="658368"/>
           </a:xfrm>
           <a:prstGeom prst="rect">
             <a:avLst/>
@@ -6173,221 +5951,105 @@
           </a:p>
         </p:txBody>
       </p:sp>
-      <p:graphicFrame>
-        <p:nvGraphicFramePr>
-          <p:cNvPr id="7" name="Table 6"/>
-          <p:cNvGraphicFramePr>
-            <a:graphicFrameLocks noGrp="1"/>
-          </p:cNvGraphicFramePr>
-          <p:nvPr/>
-        </p:nvGraphicFramePr>
-        <p:xfrm>
-          <a:off x="685800" y="1417320"/>
-          <a:ext cx="10817352" cy="2304288"/>
-        </p:xfrm>
-        <a:graphic>
-          <a:graphicData uri="http://schemas.openxmlformats.org/drawingml/2006/table">
-            <a:tbl>
-              <a:tblPr firstRow="1" bandRow="1">
-                <a:tableStyleId>{5C22544A-7EE6-4342-B048-85BDC9FD1C3A}</a:tableStyleId>
-              </a:tblPr>
-              <a:tblGrid>
-                <a:gridCol w="5408676"/>
-                <a:gridCol w="5408676"/>
-              </a:tblGrid>
-              <a:tr h="384048">
-                <a:tc>
-                  <a:txBody>
-                    <a:bodyPr/>
-                    <a:lstStyle/>
-                    <a:p>
-                      <a:r>
-                        <a:rPr sz="1100" b="1">
-                          <a:solidFill>
-                            <a:srgbClr val="FFFFFF"/>
-                          </a:solidFill>
-                          <a:latin typeface="Arial"/>
-                        </a:rPr>
-                        <a:t>Frage</a:t>
-                      </a:r>
-                    </a:p>
-                  </a:txBody>
-                  <a:tcPr>
-                    <a:solidFill>
-                      <a:srgbClr val="1F2C56"/>
-                    </a:solidFill>
-                  </a:tcPr>
-                </a:tc>
-                <a:tc>
-                  <a:txBody>
-                    <a:bodyPr/>
-                    <a:lstStyle/>
-                    <a:p>
-                      <a:r>
-                        <a:rPr sz="1100" b="1">
-                          <a:solidFill>
-                            <a:srgbClr val="FFFFFF"/>
-                          </a:solidFill>
-                          <a:latin typeface="Arial"/>
-                        </a:rPr>
-                        <a:t>Ihre Antwort</a:t>
-                      </a:r>
-                    </a:p>
-                  </a:txBody>
-                  <a:tcPr>
-                    <a:solidFill>
-                      <a:srgbClr val="1F2C56"/>
-                    </a:solidFill>
-                  </a:tcPr>
-                </a:tc>
-              </a:tr>
-              <a:tr h="384048">
-                <a:tc>
-                  <a:txBody>
-                    <a:bodyPr/>
-                    <a:lstStyle/>
-                    <a:p>
-                      <a:r>
-                        <a:rPr sz="1050">
-                          <a:solidFill>
-                            <a:srgbClr val="3D5466"/>
-                          </a:solidFill>
-                          <a:latin typeface="Arial"/>
-                        </a:rPr>
-                        <a:t>Meine Branchenschwerpunkte (Top 3)</a:t>
-                      </a:r>
-                    </a:p>
-                  </a:txBody>
-                  <a:tcPr/>
-                </a:tc>
-                <a:tc>
-                  <a:txBody>
-                    <a:bodyPr/>
-                    <a:lstStyle/>
-                    <a:p/>
-                  </a:txBody>
-                  <a:tcPr/>
-                </a:tc>
-              </a:tr>
-              <a:tr h="384048">
-                <a:tc>
-                  <a:txBody>
-                    <a:bodyPr/>
-                    <a:lstStyle/>
-                    <a:p>
-                      <a:r>
-                        <a:rPr sz="1050">
-                          <a:solidFill>
-                            <a:srgbClr val="3D5466"/>
-                          </a:solidFill>
-                          <a:latin typeface="Arial"/>
-                        </a:rPr>
-                        <a:t>Wissen, das ich habe und andere kaum (implizit)</a:t>
-                      </a:r>
-                    </a:p>
-                  </a:txBody>
-                  <a:tcPr/>
-                </a:tc>
-                <a:tc>
-                  <a:txBody>
-                    <a:bodyPr/>
-                    <a:lstStyle/>
-                    <a:p/>
-                  </a:txBody>
-                  <a:tcPr/>
-                </a:tc>
-              </a:tr>
-              <a:tr h="384048">
-                <a:tc>
-                  <a:txBody>
-                    <a:bodyPr/>
-                    <a:lstStyle/>
-                    <a:p>
-                      <a:r>
-                        <a:rPr sz="1050">
-                          <a:solidFill>
-                            <a:srgbClr val="3D5466"/>
-                          </a:solidFill>
-                          <a:latin typeface="Arial"/>
-                        </a:rPr>
-                        <a:t>Erfahrungen, die ich gerne weitergeben würde</a:t>
-                      </a:r>
-                    </a:p>
-                  </a:txBody>
-                  <a:tcPr/>
-                </a:tc>
-                <a:tc>
-                  <a:txBody>
-                    <a:bodyPr/>
-                    <a:lstStyle/>
-                    <a:p/>
-                  </a:txBody>
-                  <a:tcPr/>
-                </a:tc>
-              </a:tr>
-              <a:tr h="384048">
-                <a:tc>
-                  <a:txBody>
-                    <a:bodyPr/>
-                    <a:lstStyle/>
-                    <a:p>
-                      <a:r>
-                        <a:rPr sz="1050">
-                          <a:solidFill>
-                            <a:srgbClr val="3D5466"/>
-                          </a:solidFill>
-                          <a:latin typeface="Arial"/>
-                        </a:rPr>
-                        <a:t>Themen, bei denen ich von anderen lernen möchte</a:t>
-                      </a:r>
-                    </a:p>
-                  </a:txBody>
-                  <a:tcPr/>
-                </a:tc>
-                <a:tc>
-                  <a:txBody>
-                    <a:bodyPr/>
-                    <a:lstStyle/>
-                    <a:p/>
-                  </a:txBody>
-                  <a:tcPr/>
-                </a:tc>
-              </a:tr>
-              <a:tr h="384048">
-                <a:tc>
-                  <a:txBody>
-                    <a:bodyPr/>
-                    <a:lstStyle/>
-                    <a:p>
-                      <a:r>
-                        <a:rPr sz="1050">
-                          <a:solidFill>
-                            <a:srgbClr val="3D5466"/>
-                          </a:solidFill>
-                          <a:latin typeface="Arial"/>
-                        </a:rPr>
-                        <a:t>Kollegen, die ich gerne als Tandem-Partner hätte</a:t>
-                      </a:r>
-                    </a:p>
-                  </a:txBody>
-                  <a:tcPr/>
-                </a:tc>
-                <a:tc>
-                  <a:txBody>
-                    <a:bodyPr/>
-                    <a:lstStyle/>
-                    <a:p/>
-                  </a:txBody>
-                  <a:tcPr/>
-                </a:tc>
-              </a:tr>
-            </a:tbl>
-          </a:graphicData>
-        </a:graphic>
-      </p:graphicFrame>
-      <p:sp>
-        <p:nvSpPr>
-          <p:cNvPr id="8" name="Rectangle 7"/>
+      <p:sp>
+        <p:nvSpPr>
+          <p:cNvPr id="7" name="TextBox 6"/>
+          <p:cNvSpPr txBox="1"/>
+          <p:nvPr/>
+        </p:nvSpPr>
+        <p:spPr>
+          <a:xfrm>
+            <a:off x="813816" y="502920"/>
+            <a:ext cx="10634472" cy="685800"/>
+          </a:xfrm>
+          <a:prstGeom prst="rect">
+            <a:avLst/>
+          </a:prstGeom>
+          <a:noFill/>
+        </p:spPr>
+        <p:txBody>
+          <a:bodyPr wrap="square">
+            <a:spAutoFit/>
+          </a:bodyPr>
+          <a:lstStyle/>
+          <a:p>
+            <a:pPr algn="l"/>
+            <a:r>
+              <a:rPr sz="2400" b="1" i="0">
+                <a:solidFill>
+                  <a:srgbClr val="1F2C56"/>
+                </a:solidFill>
+                <a:latin typeface="Arial"/>
+              </a:rPr>
+              <a:t>Prinzip dieses Moduls</a:t>
+            </a:r>
+          </a:p>
+        </p:txBody>
+      </p:sp>
+      <p:sp>
+        <p:nvSpPr>
+          <p:cNvPr id="8" name="TextBox 7"/>
+          <p:cNvSpPr txBox="1"/>
+          <p:nvPr/>
+        </p:nvSpPr>
+        <p:spPr>
+          <a:xfrm>
+            <a:off x="685800" y="1417320"/>
+            <a:ext cx="10817352" cy="4892040"/>
+          </a:xfrm>
+          <a:prstGeom prst="rect">
+            <a:avLst/>
+          </a:prstGeom>
+          <a:noFill/>
+        </p:spPr>
+        <p:txBody>
+          <a:bodyPr wrap="square" anchor="ctr">
+            <a:spAutoFit/>
+          </a:bodyPr>
+          <a:lstStyle/>
+          <a:p>
+            <a:pPr marL="177800" indent="-177800">
+              <a:spcBef>
+                <a:spcPts val="600"/>
+              </a:spcBef>
+              <a:spcAft>
+                <a:spcPts val="200"/>
+              </a:spcAft>
+            </a:pPr>
+            <a:r>
+              <a:rPr sz="1200" i="1">
+                <a:solidFill>
+                  <a:srgbClr val="3D5466"/>
+                </a:solidFill>
+                <a:latin typeface="Arial"/>
+              </a:rPr>
+              <a:t>→  Wissen, das nur in einem Kopf liegt, ist ein Risiko – kein Vorsprung.</a:t>
+            </a:r>
+          </a:p>
+          <a:p>
+            <a:pPr marL="190500" indent="-190500">
+              <a:spcBef>
+                <a:spcPts val="400"/>
+              </a:spcBef>
+              <a:spcAft>
+                <a:spcPts val="200"/>
+              </a:spcAft>
+            </a:pPr>
+            <a:r>
+              <a:rPr sz="1300">
+                <a:solidFill>
+                  <a:srgbClr val="3D5466"/>
+                </a:solidFill>
+                <a:latin typeface="Arial"/>
+              </a:rPr>
+              <a:t>▸  Erst geteiltes Wissen macht das Team stärker als die Summe seiner Berater; Transfer ist Führungsaufgabe.</a:t>
+            </a:r>
+          </a:p>
+        </p:txBody>
+      </p:sp>
+      <p:sp>
+        <p:nvSpPr>
+          <p:cNvPr id="9" name="Rectangle 8"/>
           <p:cNvSpPr/>
           <p:nvPr/>
         </p:nvSpPr>
@@ -6430,7 +6092,7 @@
       </p:sp>
       <p:sp>
         <p:nvSpPr>
-          <p:cNvPr id="9" name="TextBox 8"/>
+          <p:cNvPr id="10" name="TextBox 9"/>
           <p:cNvSpPr txBox="1"/>
           <p:nvPr/>
         </p:nvSpPr>
@@ -6459,41 +6121,6 @@
                 <a:latin typeface="Consolas"/>
               </a:rPr>
               <a:t>FKB Campus  ·  M19</a:t>
-            </a:r>
-          </a:p>
-        </p:txBody>
-      </p:sp>
-      <p:sp>
-        <p:nvSpPr>
-          <p:cNvPr id="10" name="TextBox 9"/>
-          <p:cNvSpPr txBox="1"/>
-          <p:nvPr/>
-        </p:nvSpPr>
-        <p:spPr>
-          <a:xfrm>
-            <a:off x="7176211" y="6583680"/>
-            <a:ext cx="4326940" cy="256032"/>
-          </a:xfrm>
-          <a:prstGeom prst="rect">
-            <a:avLst/>
-          </a:prstGeom>
-          <a:noFill/>
-        </p:spPr>
-        <p:txBody>
-          <a:bodyPr wrap="none">
-            <a:spAutoFit/>
-          </a:bodyPr>
-          <a:lstStyle/>
-          <a:p>
-            <a:pPr algn="r"/>
-            <a:r>
-              <a:rPr sz="700">
-                <a:solidFill>
-                  <a:srgbClr val="A0B4D2"/>
-                </a:solidFill>
-                <a:latin typeface="Consolas"/>
-              </a:rPr>
-              <a:t>Übersicht</a:t>
             </a:r>
           </a:p>
         </p:txBody>
@@ -6753,7 +6380,7 @@
                 </a:solidFill>
                 <a:latin typeface="Arial"/>
               </a:rPr>
-              <a:t>AB-2: Fallbesprechung vorbereiten</a:t>
+              <a:t>Reflexion und Selbstcheck</a:t>
             </a:r>
           </a:p>
         </p:txBody>
@@ -6795,7 +6422,45 @@
                 </a:solidFill>
                 <a:latin typeface="Arial"/>
               </a:rPr>
-              <a:t>▸  (für den Fallbringer)</a:t>
+              <a:t>▸  Welches Wissen in Ihrem Team liegt riskant in nur einem Kopf?</a:t>
+            </a:r>
+          </a:p>
+          <a:p>
+            <a:pPr marL="190500" indent="-190500">
+              <a:spcBef>
+                <a:spcPts val="400"/>
+              </a:spcBef>
+              <a:spcAft>
+                <a:spcPts val="200"/>
+              </a:spcAft>
+            </a:pPr>
+            <a:r>
+              <a:rPr sz="1300">
+                <a:solidFill>
+                  <a:srgbClr val="3D5466"/>
+                </a:solidFill>
+                <a:latin typeface="Arial"/>
+              </a:rPr>
+              <a:t>▸  Welche der fünf Methoden würde in Ihrem Team am ehesten funktionieren?</a:t>
+            </a:r>
+          </a:p>
+          <a:p>
+            <a:pPr marL="190500" indent="-190500">
+              <a:spcBef>
+                <a:spcPts val="400"/>
+              </a:spcBef>
+              <a:spcAft>
+                <a:spcPts val="200"/>
+              </a:spcAft>
+            </a:pPr>
+            <a:r>
+              <a:rPr sz="1300">
+                <a:solidFill>
+                  <a:srgbClr val="3D5466"/>
+                </a:solidFill>
+                <a:latin typeface="Arial"/>
+              </a:rPr>
+              <a:t>▸  Welche eine Transfer-Routine führen Sie im nächsten Monat verbindlich ein?</a:t>
             </a:r>
           </a:p>
         </p:txBody>
@@ -6874,737 +6539,6 @@
                 <a:latin typeface="Consolas"/>
               </a:rPr>
               <a:t>FKB Campus  ·  M19</a:t>
-            </a:r>
-          </a:p>
-        </p:txBody>
-      </p:sp>
-    </p:spTree>
-  </p:cSld>
-  <p:clrMapOvr>
-    <a:masterClrMapping/>
-  </p:clrMapOvr>
-</p:sld>
-</file>
-
-<file path=ppt/slides/slide15.xml><?xml version="1.0" encoding="utf-8"?>
-<p:sld xmlns:a="http://schemas.openxmlformats.org/drawingml/2006/main" xmlns:p="http://schemas.openxmlformats.org/presentationml/2006/main" xmlns:r="http://schemas.openxmlformats.org/officeDocument/2006/relationships">
-  <p:cSld>
-    <p:spTree>
-      <p:nvGrpSpPr>
-        <p:cNvPr id="1" name=""/>
-        <p:cNvGrpSpPr/>
-        <p:nvPr/>
-      </p:nvGrpSpPr>
-      <p:grpSpPr/>
-      <p:sp>
-        <p:nvSpPr>
-          <p:cNvPr id="2" name="Rectangle 1"/>
-          <p:cNvSpPr/>
-          <p:nvPr/>
-        </p:nvSpPr>
-        <p:spPr>
-          <a:xfrm>
-            <a:off x="0" y="0"/>
-            <a:ext cx="12188952" cy="6858000"/>
-          </a:xfrm>
-          <a:prstGeom prst="rect">
-            <a:avLst/>
-          </a:prstGeom>
-          <a:solidFill>
-            <a:srgbClr val="FFFFFF"/>
-          </a:solidFill>
-          <a:ln>
-            <a:noFill/>
-          </a:ln>
-        </p:spPr>
-        <p:style>
-          <a:lnRef idx="1">
-            <a:schemeClr val="accent1"/>
-          </a:lnRef>
-          <a:fillRef idx="3">
-            <a:schemeClr val="accent1"/>
-          </a:fillRef>
-          <a:effectRef idx="2">
-            <a:schemeClr val="accent1"/>
-          </a:effectRef>
-          <a:fontRef idx="minor">
-            <a:schemeClr val="lt1"/>
-          </a:fontRef>
-        </p:style>
-        <p:txBody>
-          <a:bodyPr rtlCol="0" anchor="ctr"/>
-          <a:lstStyle/>
-          <a:p>
-            <a:pPr algn="ctr"/>
-          </a:p>
-        </p:txBody>
-      </p:sp>
-      <p:sp>
-        <p:nvSpPr>
-          <p:cNvPr id="3" name="Rectangle 2"/>
-          <p:cNvSpPr/>
-          <p:nvPr/>
-        </p:nvSpPr>
-        <p:spPr>
-          <a:xfrm>
-            <a:off x="0" y="0"/>
-            <a:ext cx="12188952" cy="50292"/>
-          </a:xfrm>
-          <a:prstGeom prst="rect">
-            <a:avLst/>
-          </a:prstGeom>
-          <a:solidFill>
-            <a:srgbClr val="1F2C56"/>
-          </a:solidFill>
-          <a:ln>
-            <a:noFill/>
-          </a:ln>
-        </p:spPr>
-        <p:style>
-          <a:lnRef idx="1">
-            <a:schemeClr val="accent1"/>
-          </a:lnRef>
-          <a:fillRef idx="3">
-            <a:schemeClr val="accent1"/>
-          </a:fillRef>
-          <a:effectRef idx="2">
-            <a:schemeClr val="accent1"/>
-          </a:effectRef>
-          <a:fontRef idx="minor">
-            <a:schemeClr val="lt1"/>
-          </a:fontRef>
-        </p:style>
-        <p:txBody>
-          <a:bodyPr rtlCol="0" anchor="ctr"/>
-          <a:lstStyle/>
-          <a:p>
-            <a:pPr algn="ctr"/>
-          </a:p>
-        </p:txBody>
-      </p:sp>
-      <p:sp>
-        <p:nvSpPr>
-          <p:cNvPr id="4" name="TextBox 3"/>
-          <p:cNvSpPr txBox="1"/>
-          <p:nvPr/>
-        </p:nvSpPr>
-        <p:spPr>
-          <a:xfrm>
-            <a:off x="685800" y="109728"/>
-            <a:ext cx="10817352" cy="228600"/>
-          </a:xfrm>
-          <a:prstGeom prst="rect">
-            <a:avLst/>
-          </a:prstGeom>
-          <a:noFill/>
-        </p:spPr>
-        <p:txBody>
-          <a:bodyPr wrap="none">
-            <a:spAutoFit/>
-          </a:bodyPr>
-          <a:lstStyle/>
-          <a:p>
-            <a:pPr algn="l"/>
-            <a:r>
-              <a:rPr sz="750">
-                <a:solidFill>
-                  <a:srgbClr val="78808C"/>
-                </a:solidFill>
-                <a:latin typeface="Consolas"/>
-              </a:rPr>
-              <a:t>M19  ·  ÜBERSICHT</a:t>
-            </a:r>
-          </a:p>
-        </p:txBody>
-      </p:sp>
-      <p:sp>
-        <p:nvSpPr>
-          <p:cNvPr id="5" name="TextBox 4"/>
-          <p:cNvSpPr txBox="1"/>
-          <p:nvPr/>
-        </p:nvSpPr>
-        <p:spPr>
-          <a:xfrm>
-            <a:off x="685800" y="502920"/>
-            <a:ext cx="10817352" cy="594360"/>
-          </a:xfrm>
-          <a:prstGeom prst="rect">
-            <a:avLst/>
-          </a:prstGeom>
-          <a:noFill/>
-        </p:spPr>
-        <p:txBody>
-          <a:bodyPr wrap="square">
-            <a:spAutoFit/>
-          </a:bodyPr>
-          <a:lstStyle/>
-          <a:p>
-            <a:pPr algn="l"/>
-            <a:r>
-              <a:rPr sz="2000" b="1" i="0">
-                <a:solidFill>
-                  <a:srgbClr val="1F2C56"/>
-                </a:solidFill>
-                <a:latin typeface="Arial"/>
-              </a:rPr>
-              <a:t>AB-3: Wissenstransfer-Maßnahmenplan</a:t>
-            </a:r>
-          </a:p>
-        </p:txBody>
-      </p:sp>
-      <p:sp>
-        <p:nvSpPr>
-          <p:cNvPr id="6" name="Rectangle 5"/>
-          <p:cNvSpPr/>
-          <p:nvPr/>
-        </p:nvSpPr>
-        <p:spPr>
-          <a:xfrm>
-            <a:off x="685800" y="1143000"/>
-            <a:ext cx="10817352" cy="25400"/>
-          </a:xfrm>
-          <a:prstGeom prst="rect">
-            <a:avLst/>
-          </a:prstGeom>
-          <a:solidFill>
-            <a:srgbClr val="D9C089"/>
-          </a:solidFill>
-          <a:ln>
-            <a:noFill/>
-          </a:ln>
-        </p:spPr>
-        <p:style>
-          <a:lnRef idx="1">
-            <a:schemeClr val="accent1"/>
-          </a:lnRef>
-          <a:fillRef idx="3">
-            <a:schemeClr val="accent1"/>
-          </a:fillRef>
-          <a:effectRef idx="2">
-            <a:schemeClr val="accent1"/>
-          </a:effectRef>
-          <a:fontRef idx="minor">
-            <a:schemeClr val="lt1"/>
-          </a:fontRef>
-        </p:style>
-        <p:txBody>
-          <a:bodyPr rtlCol="0" anchor="ctr"/>
-          <a:lstStyle/>
-          <a:p>
-            <a:pPr algn="ctr"/>
-          </a:p>
-        </p:txBody>
-      </p:sp>
-      <p:graphicFrame>
-        <p:nvGraphicFramePr>
-          <p:cNvPr id="7" name="Table 6"/>
-          <p:cNvGraphicFramePr>
-            <a:graphicFrameLocks noGrp="1"/>
-          </p:cNvGraphicFramePr>
-          <p:nvPr/>
-        </p:nvGraphicFramePr>
-        <p:xfrm>
-          <a:off x="685800" y="1417320"/>
-          <a:ext cx="10817352" cy="2304288"/>
-        </p:xfrm>
-        <a:graphic>
-          <a:graphicData uri="http://schemas.openxmlformats.org/drawingml/2006/table">
-            <a:tbl>
-              <a:tblPr firstRow="1" bandRow="1">
-                <a:tableStyleId>{5C22544A-7EE6-4342-B048-85BDC9FD1C3A}</a:tableStyleId>
-              </a:tblPr>
-              <a:tblGrid>
-                <a:gridCol w="2163470"/>
-                <a:gridCol w="2163470"/>
-                <a:gridCol w="2163470"/>
-                <a:gridCol w="2163470"/>
-                <a:gridCol w="2163472"/>
-              </a:tblGrid>
-              <a:tr h="384048">
-                <a:tc>
-                  <a:txBody>
-                    <a:bodyPr/>
-                    <a:lstStyle/>
-                    <a:p>
-                      <a:r>
-                        <a:rPr sz="1100" b="1">
-                          <a:solidFill>
-                            <a:srgbClr val="FFFFFF"/>
-                          </a:solidFill>
-                          <a:latin typeface="Arial"/>
-                        </a:rPr>
-                        <a:t>Methode</a:t>
-                      </a:r>
-                    </a:p>
-                  </a:txBody>
-                  <a:tcPr>
-                    <a:solidFill>
-                      <a:srgbClr val="1F2C56"/>
-                    </a:solidFill>
-                  </a:tcPr>
-                </a:tc>
-                <a:tc>
-                  <a:txBody>
-                    <a:bodyPr/>
-                    <a:lstStyle/>
-                    <a:p>
-                      <a:r>
-                        <a:rPr sz="1100" b="1">
-                          <a:solidFill>
-                            <a:srgbClr val="FFFFFF"/>
-                          </a:solidFill>
-                          <a:latin typeface="Arial"/>
-                        </a:rPr>
-                        <a:t>Wann?</a:t>
-                      </a:r>
-                    </a:p>
-                  </a:txBody>
-                  <a:tcPr>
-                    <a:solidFill>
-                      <a:srgbClr val="1F2C56"/>
-                    </a:solidFill>
-                  </a:tcPr>
-                </a:tc>
-                <a:tc>
-                  <a:txBody>
-                    <a:bodyPr/>
-                    <a:lstStyle/>
-                    <a:p>
-                      <a:r>
-                        <a:rPr sz="1100" b="1">
-                          <a:solidFill>
-                            <a:srgbClr val="FFFFFF"/>
-                          </a:solidFill>
-                          <a:latin typeface="Arial"/>
-                        </a:rPr>
-                        <a:t>Wer organisiert?</a:t>
-                      </a:r>
-                    </a:p>
-                  </a:txBody>
-                  <a:tcPr>
-                    <a:solidFill>
-                      <a:srgbClr val="1F2C56"/>
-                    </a:solidFill>
-                  </a:tcPr>
-                </a:tc>
-                <a:tc>
-                  <a:txBody>
-                    <a:bodyPr/>
-                    <a:lstStyle/>
-                    <a:p>
-                      <a:r>
-                        <a:rPr sz="1100" b="1">
-                          <a:solidFill>
-                            <a:srgbClr val="FFFFFF"/>
-                          </a:solidFill>
-                          <a:latin typeface="Arial"/>
-                        </a:rPr>
-                        <a:t>Wer nimmt teil?</a:t>
-                      </a:r>
-                    </a:p>
-                  </a:txBody>
-                  <a:tcPr>
-                    <a:solidFill>
-                      <a:srgbClr val="1F2C56"/>
-                    </a:solidFill>
-                  </a:tcPr>
-                </a:tc>
-                <a:tc>
-                  <a:txBody>
-                    <a:bodyPr/>
-                    <a:lstStyle/>
-                    <a:p>
-                      <a:r>
-                        <a:rPr sz="1100" b="1">
-                          <a:solidFill>
-                            <a:srgbClr val="FFFFFF"/>
-                          </a:solidFill>
-                          <a:latin typeface="Arial"/>
-                        </a:rPr>
-                        <a:t>Erfolgskriterium</a:t>
-                      </a:r>
-                    </a:p>
-                  </a:txBody>
-                  <a:tcPr>
-                    <a:solidFill>
-                      <a:srgbClr val="1F2C56"/>
-                    </a:solidFill>
-                  </a:tcPr>
-                </a:tc>
-              </a:tr>
-              <a:tr h="384048">
-                <a:tc>
-                  <a:txBody>
-                    <a:bodyPr/>
-                    <a:lstStyle/>
-                    <a:p>
-                      <a:r>
-                        <a:rPr sz="1050">
-                          <a:solidFill>
-                            <a:srgbClr val="3D5466"/>
-                          </a:solidFill>
-                          <a:latin typeface="Arial"/>
-                        </a:rPr>
-                        <a:t>Tandem-Besuche</a:t>
-                      </a:r>
-                    </a:p>
-                  </a:txBody>
-                  <a:tcPr/>
-                </a:tc>
-                <a:tc>
-                  <a:txBody>
-                    <a:bodyPr/>
-                    <a:lstStyle/>
-                    <a:p/>
-                  </a:txBody>
-                  <a:tcPr/>
-                </a:tc>
-                <a:tc>
-                  <a:txBody>
-                    <a:bodyPr/>
-                    <a:lstStyle/>
-                    <a:p/>
-                  </a:txBody>
-                  <a:tcPr/>
-                </a:tc>
-                <a:tc>
-                  <a:txBody>
-                    <a:bodyPr/>
-                    <a:lstStyle/>
-                    <a:p/>
-                  </a:txBody>
-                  <a:tcPr/>
-                </a:tc>
-                <a:tc>
-                  <a:txBody>
-                    <a:bodyPr/>
-                    <a:lstStyle/>
-                    <a:p/>
-                  </a:txBody>
-                  <a:tcPr/>
-                </a:tc>
-              </a:tr>
-              <a:tr h="384048">
-                <a:tc>
-                  <a:txBody>
-                    <a:bodyPr/>
-                    <a:lstStyle/>
-                    <a:p>
-                      <a:r>
-                        <a:rPr sz="1050">
-                          <a:solidFill>
-                            <a:srgbClr val="3D5466"/>
-                          </a:solidFill>
-                          <a:latin typeface="Arial"/>
-                        </a:rPr>
-                        <a:t>Monatliche Fallbesprechung</a:t>
-                      </a:r>
-                    </a:p>
-                  </a:txBody>
-                  <a:tcPr/>
-                </a:tc>
-                <a:tc>
-                  <a:txBody>
-                    <a:bodyPr/>
-                    <a:lstStyle/>
-                    <a:p/>
-                  </a:txBody>
-                  <a:tcPr/>
-                </a:tc>
-                <a:tc>
-                  <a:txBody>
-                    <a:bodyPr/>
-                    <a:lstStyle/>
-                    <a:p/>
-                  </a:txBody>
-                  <a:tcPr/>
-                </a:tc>
-                <a:tc>
-                  <a:txBody>
-                    <a:bodyPr/>
-                    <a:lstStyle/>
-                    <a:p/>
-                  </a:txBody>
-                  <a:tcPr/>
-                </a:tc>
-                <a:tc>
-                  <a:txBody>
-                    <a:bodyPr/>
-                    <a:lstStyle/>
-                    <a:p/>
-                  </a:txBody>
-                  <a:tcPr/>
-                </a:tc>
-              </a:tr>
-              <a:tr h="384048">
-                <a:tc>
-                  <a:txBody>
-                    <a:bodyPr/>
-                    <a:lstStyle/>
-                    <a:p>
-                      <a:r>
-                        <a:rPr sz="1050">
-                          <a:solidFill>
-                            <a:srgbClr val="3D5466"/>
-                          </a:solidFill>
-                          <a:latin typeface="Arial"/>
-                        </a:rPr>
-                        <a:t>Wissenslandkarte</a:t>
-                      </a:r>
-                    </a:p>
-                  </a:txBody>
-                  <a:tcPr/>
-                </a:tc>
-                <a:tc>
-                  <a:txBody>
-                    <a:bodyPr/>
-                    <a:lstStyle/>
-                    <a:p/>
-                  </a:txBody>
-                  <a:tcPr/>
-                </a:tc>
-                <a:tc>
-                  <a:txBody>
-                    <a:bodyPr/>
-                    <a:lstStyle/>
-                    <a:p/>
-                  </a:txBody>
-                  <a:tcPr/>
-                </a:tc>
-                <a:tc>
-                  <a:txBody>
-                    <a:bodyPr/>
-                    <a:lstStyle/>
-                    <a:p/>
-                  </a:txBody>
-                  <a:tcPr/>
-                </a:tc>
-                <a:tc>
-                  <a:txBody>
-                    <a:bodyPr/>
-                    <a:lstStyle/>
-                    <a:p/>
-                  </a:txBody>
-                  <a:tcPr/>
-                </a:tc>
-              </a:tr>
-              <a:tr h="384048">
-                <a:tc>
-                  <a:txBody>
-                    <a:bodyPr/>
-                    <a:lstStyle/>
-                    <a:p>
-                      <a:r>
-                        <a:rPr sz="1050">
-                          <a:solidFill>
-                            <a:srgbClr val="3D5466"/>
-                          </a:solidFill>
-                          <a:latin typeface="Arial"/>
-                        </a:rPr>
-                        <a:t>Lunch-and-Learn</a:t>
-                      </a:r>
-                    </a:p>
-                  </a:txBody>
-                  <a:tcPr/>
-                </a:tc>
-                <a:tc>
-                  <a:txBody>
-                    <a:bodyPr/>
-                    <a:lstStyle/>
-                    <a:p/>
-                  </a:txBody>
-                  <a:tcPr/>
-                </a:tc>
-                <a:tc>
-                  <a:txBody>
-                    <a:bodyPr/>
-                    <a:lstStyle/>
-                    <a:p/>
-                  </a:txBody>
-                  <a:tcPr/>
-                </a:tc>
-                <a:tc>
-                  <a:txBody>
-                    <a:bodyPr/>
-                    <a:lstStyle/>
-                    <a:p/>
-                  </a:txBody>
-                  <a:tcPr/>
-                </a:tc>
-                <a:tc>
-                  <a:txBody>
-                    <a:bodyPr/>
-                    <a:lstStyle/>
-                    <a:p/>
-                  </a:txBody>
-                  <a:tcPr/>
-                </a:tc>
-              </a:tr>
-              <a:tr h="384048">
-                <a:tc>
-                  <a:txBody>
-                    <a:bodyPr/>
-                    <a:lstStyle/>
-                    <a:p>
-                      <a:r>
-                        <a:rPr sz="1050">
-                          <a:solidFill>
-                            <a:srgbClr val="3D5466"/>
-                          </a:solidFill>
-                          <a:latin typeface="Arial"/>
-                        </a:rPr>
-                        <a:t>Reverse Mentoring</a:t>
-                      </a:r>
-                    </a:p>
-                  </a:txBody>
-                  <a:tcPr/>
-                </a:tc>
-                <a:tc>
-                  <a:txBody>
-                    <a:bodyPr/>
-                    <a:lstStyle/>
-                    <a:p/>
-                  </a:txBody>
-                  <a:tcPr/>
-                </a:tc>
-                <a:tc>
-                  <a:txBody>
-                    <a:bodyPr/>
-                    <a:lstStyle/>
-                    <a:p/>
-                  </a:txBody>
-                  <a:tcPr/>
-                </a:tc>
-                <a:tc>
-                  <a:txBody>
-                    <a:bodyPr/>
-                    <a:lstStyle/>
-                    <a:p/>
-                  </a:txBody>
-                  <a:tcPr/>
-                </a:tc>
-                <a:tc>
-                  <a:txBody>
-                    <a:bodyPr/>
-                    <a:lstStyle/>
-                    <a:p/>
-                  </a:txBody>
-                  <a:tcPr/>
-                </a:tc>
-              </a:tr>
-            </a:tbl>
-          </a:graphicData>
-        </a:graphic>
-      </p:graphicFrame>
-      <p:sp>
-        <p:nvSpPr>
-          <p:cNvPr id="8" name="Rectangle 7"/>
-          <p:cNvSpPr/>
-          <p:nvPr/>
-        </p:nvSpPr>
-        <p:spPr>
-          <a:xfrm>
-            <a:off x="0" y="6510528"/>
-            <a:ext cx="12188952" cy="347472"/>
-          </a:xfrm>
-          <a:prstGeom prst="rect">
-            <a:avLst/>
-          </a:prstGeom>
-          <a:solidFill>
-            <a:srgbClr val="0A1937"/>
-          </a:solidFill>
-          <a:ln>
-            <a:noFill/>
-          </a:ln>
-        </p:spPr>
-        <p:style>
-          <a:lnRef idx="1">
-            <a:schemeClr val="accent1"/>
-          </a:lnRef>
-          <a:fillRef idx="3">
-            <a:schemeClr val="accent1"/>
-          </a:fillRef>
-          <a:effectRef idx="2">
-            <a:schemeClr val="accent1"/>
-          </a:effectRef>
-          <a:fontRef idx="minor">
-            <a:schemeClr val="lt1"/>
-          </a:fontRef>
-        </p:style>
-        <p:txBody>
-          <a:bodyPr rtlCol="0" anchor="ctr"/>
-          <a:lstStyle/>
-          <a:p>
-            <a:pPr algn="ctr"/>
-          </a:p>
-        </p:txBody>
-      </p:sp>
-      <p:sp>
-        <p:nvSpPr>
-          <p:cNvPr id="9" name="TextBox 8"/>
-          <p:cNvSpPr txBox="1"/>
-          <p:nvPr/>
-        </p:nvSpPr>
-        <p:spPr>
-          <a:xfrm>
-            <a:off x="685800" y="6583680"/>
-            <a:ext cx="6490411" cy="256032"/>
-          </a:xfrm>
-          <a:prstGeom prst="rect">
-            <a:avLst/>
-          </a:prstGeom>
-          <a:noFill/>
-        </p:spPr>
-        <p:txBody>
-          <a:bodyPr wrap="none">
-            <a:spAutoFit/>
-          </a:bodyPr>
-          <a:lstStyle/>
-          <a:p>
-            <a:pPr algn="l"/>
-            <a:r>
-              <a:rPr sz="700">
-                <a:solidFill>
-                  <a:srgbClr val="A0B4D2"/>
-                </a:solidFill>
-                <a:latin typeface="Consolas"/>
-              </a:rPr>
-              <a:t>FKB Campus  ·  M19</a:t>
-            </a:r>
-          </a:p>
-        </p:txBody>
-      </p:sp>
-      <p:sp>
-        <p:nvSpPr>
-          <p:cNvPr id="10" name="TextBox 9"/>
-          <p:cNvSpPr txBox="1"/>
-          <p:nvPr/>
-        </p:nvSpPr>
-        <p:spPr>
-          <a:xfrm>
-            <a:off x="7176211" y="6583680"/>
-            <a:ext cx="4326940" cy="256032"/>
-          </a:xfrm>
-          <a:prstGeom prst="rect">
-            <a:avLst/>
-          </a:prstGeom>
-          <a:noFill/>
-        </p:spPr>
-        <p:txBody>
-          <a:bodyPr wrap="none">
-            <a:spAutoFit/>
-          </a:bodyPr>
-          <a:lstStyle/>
-          <a:p>
-            <a:pPr algn="r"/>
-            <a:r>
-              <a:rPr sz="700">
-                <a:solidFill>
-                  <a:srgbClr val="A0B4D2"/>
-                </a:solidFill>
-                <a:latin typeface="Consolas"/>
-              </a:rPr>
-              <a:t>Übersicht</a:t>
             </a:r>
           </a:p>
         </p:txBody>
@@ -9100,7 +8034,7 @@
             <a:avLst/>
           </a:prstGeom>
           <a:solidFill>
-            <a:srgbClr val="FFFFFF"/>
+            <a:srgbClr val="EDEDF3"/>
           </a:solidFill>
           <a:ln>
             <a:noFill/>
@@ -9201,43 +8135,51 @@
                 </a:solidFill>
                 <a:latin typeface="Consolas"/>
               </a:rPr>
-              <a:t>M19  ·  SCHAUBILD</a:t>
-            </a:r>
-          </a:p>
-        </p:txBody>
-      </p:sp>
-      <p:sp>
-        <p:nvSpPr>
-          <p:cNvPr id="5" name="TextBox 4"/>
-          <p:cNvSpPr txBox="1"/>
-          <p:nvPr/>
-        </p:nvSpPr>
-        <p:spPr>
-          <a:xfrm>
-            <a:off x="685800" y="502920"/>
-            <a:ext cx="10817352" cy="594360"/>
-          </a:xfrm>
-          <a:prstGeom prst="rect">
-            <a:avLst/>
-          </a:prstGeom>
-          <a:noFill/>
-        </p:spPr>
-        <p:txBody>
-          <a:bodyPr wrap="square">
-            <a:spAutoFit/>
-          </a:bodyPr>
-          <a:lstStyle/>
-          <a:p>
-            <a:pPr algn="l"/>
-            <a:r>
-              <a:rPr sz="2000" b="1" i="0">
-                <a:solidFill>
-                  <a:srgbClr val="1F2C56"/>
-                </a:solidFill>
-                <a:latin typeface="Arial"/>
-              </a:rPr>
-              <a:t>SECI-Modell Wissensspirale nach Nonaka &amp; Takeuchi</a:t>
-            </a:r>
+              <a:t>M19  ·  INHALT</a:t>
+            </a:r>
+          </a:p>
+        </p:txBody>
+      </p:sp>
+      <p:sp>
+        <p:nvSpPr>
+          <p:cNvPr id="5" name="Rectangle 4"/>
+          <p:cNvSpPr/>
+          <p:nvPr/>
+        </p:nvSpPr>
+        <p:spPr>
+          <a:xfrm>
+            <a:off x="0" y="1234440"/>
+            <a:ext cx="12188952" cy="12700"/>
+          </a:xfrm>
+          <a:prstGeom prst="rect">
+            <a:avLst/>
+          </a:prstGeom>
+          <a:solidFill>
+            <a:srgbClr val="D8DFE4"/>
+          </a:solidFill>
+          <a:ln>
+            <a:noFill/>
+          </a:ln>
+        </p:spPr>
+        <p:style>
+          <a:lnRef idx="1">
+            <a:schemeClr val="accent1"/>
+          </a:lnRef>
+          <a:fillRef idx="3">
+            <a:schemeClr val="accent1"/>
+          </a:fillRef>
+          <a:effectRef idx="2">
+            <a:schemeClr val="accent1"/>
+          </a:effectRef>
+          <a:fontRef idx="minor">
+            <a:schemeClr val="lt1"/>
+          </a:fontRef>
+        </p:style>
+        <p:txBody>
+          <a:bodyPr rtlCol="0" anchor="ctr"/>
+          <a:lstStyle/>
+          <a:p>
+            <a:pPr algn="ctr"/>
           </a:p>
         </p:txBody>
       </p:sp>
@@ -9249,8 +8191,8 @@
         </p:nvSpPr>
         <p:spPr>
           <a:xfrm>
-            <a:off x="685800" y="1143000"/>
-            <a:ext cx="10817352" cy="25400"/>
+            <a:off x="685800" y="502920"/>
+            <a:ext cx="36576" cy="658368"/>
           </a:xfrm>
           <a:prstGeom prst="rect">
             <a:avLst/>
@@ -9284,33 +8226,124 @@
           </a:p>
         </p:txBody>
       </p:sp>
-      <p:pic>
-        <p:nvPicPr>
-          <p:cNvPr id="7" name="Picture 6" descr="image.png"/>
-          <p:cNvPicPr>
-            <a:picLocks noChangeAspect="1"/>
-          </p:cNvPicPr>
-          <p:nvPr/>
-        </p:nvPicPr>
-        <p:blipFill>
-          <a:blip r:embed="rId2"/>
-          <a:stretch>
-            <a:fillRect/>
-          </a:stretch>
-        </p:blipFill>
-        <p:spPr>
-          <a:xfrm>
-            <a:off x="2554863" y="1325880"/>
-            <a:ext cx="7079225" cy="4937760"/>
-          </a:xfrm>
-          <a:prstGeom prst="rect">
-            <a:avLst/>
-          </a:prstGeom>
-        </p:spPr>
-      </p:pic>
-      <p:sp>
-        <p:nvSpPr>
-          <p:cNvPr id="8" name="Rectangle 7"/>
+      <p:sp>
+        <p:nvSpPr>
+          <p:cNvPr id="7" name="TextBox 6"/>
+          <p:cNvSpPr txBox="1"/>
+          <p:nvPr/>
+        </p:nvSpPr>
+        <p:spPr>
+          <a:xfrm>
+            <a:off x="813816" y="502920"/>
+            <a:ext cx="10634472" cy="685800"/>
+          </a:xfrm>
+          <a:prstGeom prst="rect">
+            <a:avLst/>
+          </a:prstGeom>
+          <a:noFill/>
+        </p:spPr>
+        <p:txBody>
+          <a:bodyPr wrap="square">
+            <a:spAutoFit/>
+          </a:bodyPr>
+          <a:lstStyle/>
+          <a:p>
+            <a:pPr algn="l"/>
+            <a:r>
+              <a:rPr sz="2400" b="1" i="0">
+                <a:solidFill>
+                  <a:srgbClr val="1F2C56"/>
+                </a:solidFill>
+                <a:latin typeface="Arial"/>
+              </a:rPr>
+              <a:t>Wissen in einem Kopf ist ein Risiko</a:t>
+            </a:r>
+          </a:p>
+        </p:txBody>
+      </p:sp>
+      <p:sp>
+        <p:nvSpPr>
+          <p:cNvPr id="8" name="TextBox 7"/>
+          <p:cNvSpPr txBox="1"/>
+          <p:nvPr/>
+        </p:nvSpPr>
+        <p:spPr>
+          <a:xfrm>
+            <a:off x="685800" y="1417320"/>
+            <a:ext cx="10817352" cy="4892040"/>
+          </a:xfrm>
+          <a:prstGeom prst="rect">
+            <a:avLst/>
+          </a:prstGeom>
+          <a:noFill/>
+        </p:spPr>
+        <p:txBody>
+          <a:bodyPr wrap="square" anchor="ctr">
+            <a:spAutoFit/>
+          </a:bodyPr>
+          <a:lstStyle/>
+          <a:p>
+            <a:pPr marL="177800" indent="-177800">
+              <a:spcBef>
+                <a:spcPts val="600"/>
+              </a:spcBef>
+              <a:spcAft>
+                <a:spcPts val="200"/>
+              </a:spcAft>
+            </a:pPr>
+            <a:r>
+              <a:rPr sz="1200" i="1">
+                <a:solidFill>
+                  <a:srgbClr val="3D5466"/>
+                </a:solidFill>
+                <a:latin typeface="Arial"/>
+              </a:rPr>
+              <a:t>→  Wissen, das nur in einem Kopf liegt, ist ein Risiko – kein Vorsprung.</a:t>
+            </a:r>
+          </a:p>
+          <a:p>
+            <a:pPr marL="190500" indent="-190500">
+              <a:spcBef>
+                <a:spcPts val="400"/>
+              </a:spcBef>
+              <a:spcAft>
+                <a:spcPts val="200"/>
+              </a:spcAft>
+            </a:pPr>
+            <a:r>
+              <a:rPr sz="1300">
+                <a:solidFill>
+                  <a:srgbClr val="3D5466"/>
+                </a:solidFill>
+                <a:latin typeface="Arial"/>
+              </a:rPr>
+              <a:t>▸  Erst geteiltes Wissen macht das Team stärker als die Summe seiner Berater.</a:t>
+            </a:r>
+          </a:p>
+          <a:p>
+            <a:pPr marL="190500" indent="-190500">
+              <a:spcBef>
+                <a:spcPts val="400"/>
+              </a:spcBef>
+              <a:spcAft>
+                <a:spcPts val="200"/>
+              </a:spcAft>
+            </a:pPr>
+            <a:r>
+              <a:rPr sz="1300">
+                <a:solidFill>
+                  <a:srgbClr val="3D5466"/>
+                </a:solidFill>
+                <a:latin typeface="Arial"/>
+              </a:rPr>
+              <a:t>▸  Wissenstransfer ist Führungsaufgabe – er passiert nicht von selbst.</a:t>
+            </a:r>
+          </a:p>
+        </p:txBody>
+      </p:sp>
+      <p:sp>
+        <p:nvSpPr>
+          <p:cNvPr id="9" name="Rectangle 8"/>
           <p:cNvSpPr/>
           <p:nvPr/>
         </p:nvSpPr>
@@ -9353,7 +8386,7 @@
       </p:sp>
       <p:sp>
         <p:nvSpPr>
-          <p:cNvPr id="9" name="TextBox 8"/>
+          <p:cNvPr id="10" name="TextBox 9"/>
           <p:cNvSpPr txBox="1"/>
           <p:nvPr/>
         </p:nvSpPr>
@@ -9382,41 +8415,6 @@
                 <a:latin typeface="Consolas"/>
               </a:rPr>
               <a:t>FKB Campus  ·  M19</a:t>
-            </a:r>
-          </a:p>
-        </p:txBody>
-      </p:sp>
-      <p:sp>
-        <p:nvSpPr>
-          <p:cNvPr id="10" name="TextBox 9"/>
-          <p:cNvSpPr txBox="1"/>
-          <p:nvPr/>
-        </p:nvSpPr>
-        <p:spPr>
-          <a:xfrm>
-            <a:off x="7176211" y="6583680"/>
-            <a:ext cx="4326940" cy="256032"/>
-          </a:xfrm>
-          <a:prstGeom prst="rect">
-            <a:avLst/>
-          </a:prstGeom>
-          <a:noFill/>
-        </p:spPr>
-        <p:txBody>
-          <a:bodyPr wrap="none">
-            <a:spAutoFit/>
-          </a:bodyPr>
-          <a:lstStyle/>
-          <a:p>
-            <a:pPr algn="r"/>
-            <a:r>
-              <a:rPr sz="700">
-                <a:solidFill>
-                  <a:srgbClr val="A0B4D2"/>
-                </a:solidFill>
-                <a:latin typeface="Consolas"/>
-              </a:rPr>
-              <a:t>Schaubild</a:t>
             </a:r>
           </a:p>
         </p:txBody>
@@ -9454,7 +8452,7 @@
             <a:avLst/>
           </a:prstGeom>
           <a:solidFill>
-            <a:srgbClr val="FFFFFF"/>
+            <a:srgbClr val="EDEDF3"/>
           </a:solidFill>
           <a:ln>
             <a:noFill/>
@@ -9555,43 +8553,51 @@
                 </a:solidFill>
                 <a:latin typeface="Consolas"/>
               </a:rPr>
-              <a:t>M19  ·  SCHAUBILD</a:t>
-            </a:r>
-          </a:p>
-        </p:txBody>
-      </p:sp>
-      <p:sp>
-        <p:nvSpPr>
-          <p:cNvPr id="5" name="TextBox 4"/>
-          <p:cNvSpPr txBox="1"/>
-          <p:nvPr/>
-        </p:nvSpPr>
-        <p:spPr>
-          <a:xfrm>
-            <a:off x="685800" y="502920"/>
-            <a:ext cx="10817352" cy="594360"/>
-          </a:xfrm>
-          <a:prstGeom prst="rect">
-            <a:avLst/>
-          </a:prstGeom>
-          <a:noFill/>
-        </p:spPr>
-        <p:txBody>
-          <a:bodyPr wrap="square">
-            <a:spAutoFit/>
-          </a:bodyPr>
-          <a:lstStyle/>
-          <a:p>
-            <a:pPr algn="l"/>
-            <a:r>
-              <a:rPr sz="2000" b="1" i="0">
-                <a:solidFill>
-                  <a:srgbClr val="1F2C56"/>
-                </a:solidFill>
-                <a:latin typeface="Arial"/>
-              </a:rPr>
-              <a:t>Kolb-Lernzyklus</a:t>
-            </a:r>
+              <a:t>M19  ·  INHALT</a:t>
+            </a:r>
+          </a:p>
+        </p:txBody>
+      </p:sp>
+      <p:sp>
+        <p:nvSpPr>
+          <p:cNvPr id="5" name="Rectangle 4"/>
+          <p:cNvSpPr/>
+          <p:nvPr/>
+        </p:nvSpPr>
+        <p:spPr>
+          <a:xfrm>
+            <a:off x="0" y="1234440"/>
+            <a:ext cx="12188952" cy="12700"/>
+          </a:xfrm>
+          <a:prstGeom prst="rect">
+            <a:avLst/>
+          </a:prstGeom>
+          <a:solidFill>
+            <a:srgbClr val="D8DFE4"/>
+          </a:solidFill>
+          <a:ln>
+            <a:noFill/>
+          </a:ln>
+        </p:spPr>
+        <p:style>
+          <a:lnRef idx="1">
+            <a:schemeClr val="accent1"/>
+          </a:lnRef>
+          <a:fillRef idx="3">
+            <a:schemeClr val="accent1"/>
+          </a:fillRef>
+          <a:effectRef idx="2">
+            <a:schemeClr val="accent1"/>
+          </a:effectRef>
+          <a:fontRef idx="minor">
+            <a:schemeClr val="lt1"/>
+          </a:fontRef>
+        </p:style>
+        <p:txBody>
+          <a:bodyPr rtlCol="0" anchor="ctr"/>
+          <a:lstStyle/>
+          <a:p>
+            <a:pPr algn="ctr"/>
           </a:p>
         </p:txBody>
       </p:sp>
@@ -9603,8 +8609,8 @@
         </p:nvSpPr>
         <p:spPr>
           <a:xfrm>
-            <a:off x="685800" y="1143000"/>
-            <a:ext cx="10817352" cy="25400"/>
+            <a:off x="685800" y="502920"/>
+            <a:ext cx="36576" cy="658368"/>
           </a:xfrm>
           <a:prstGeom prst="rect">
             <a:avLst/>
@@ -9638,33 +8644,124 @@
           </a:p>
         </p:txBody>
       </p:sp>
-      <p:pic>
-        <p:nvPicPr>
-          <p:cNvPr id="7" name="Picture 6" descr="image.png"/>
-          <p:cNvPicPr>
-            <a:picLocks noChangeAspect="1"/>
-          </p:cNvPicPr>
-          <p:nvPr/>
-        </p:nvPicPr>
-        <p:blipFill>
-          <a:blip r:embed="rId2"/>
-          <a:stretch>
-            <a:fillRect/>
-          </a:stretch>
-        </p:blipFill>
-        <p:spPr>
-          <a:xfrm>
-            <a:off x="2554863" y="1325880"/>
-            <a:ext cx="7079225" cy="4937760"/>
-          </a:xfrm>
-          <a:prstGeom prst="rect">
-            <a:avLst/>
-          </a:prstGeom>
-        </p:spPr>
-      </p:pic>
-      <p:sp>
-        <p:nvSpPr>
-          <p:cNvPr id="8" name="Rectangle 7"/>
+      <p:sp>
+        <p:nvSpPr>
+          <p:cNvPr id="7" name="TextBox 6"/>
+          <p:cNvSpPr txBox="1"/>
+          <p:nvPr/>
+        </p:nvSpPr>
+        <p:spPr>
+          <a:xfrm>
+            <a:off x="813816" y="502920"/>
+            <a:ext cx="10634472" cy="685800"/>
+          </a:xfrm>
+          <a:prstGeom prst="rect">
+            <a:avLst/>
+          </a:prstGeom>
+          <a:noFill/>
+        </p:spPr>
+        <p:txBody>
+          <a:bodyPr wrap="square">
+            <a:spAutoFit/>
+          </a:bodyPr>
+          <a:lstStyle/>
+          <a:p>
+            <a:pPr algn="l"/>
+            <a:r>
+              <a:rPr sz="2400" b="1" i="0">
+                <a:solidFill>
+                  <a:srgbClr val="1F2C56"/>
+                </a:solidFill>
+                <a:latin typeface="Arial"/>
+              </a:rPr>
+              <a:t>Wie Wissen im Team entsteht: das SECI-Modell</a:t>
+            </a:r>
+          </a:p>
+        </p:txBody>
+      </p:sp>
+      <p:sp>
+        <p:nvSpPr>
+          <p:cNvPr id="8" name="TextBox 7"/>
+          <p:cNvSpPr txBox="1"/>
+          <p:nvPr/>
+        </p:nvSpPr>
+        <p:spPr>
+          <a:xfrm>
+            <a:off x="685800" y="1417320"/>
+            <a:ext cx="10817352" cy="4892040"/>
+          </a:xfrm>
+          <a:prstGeom prst="rect">
+            <a:avLst/>
+          </a:prstGeom>
+          <a:noFill/>
+        </p:spPr>
+        <p:txBody>
+          <a:bodyPr wrap="square" anchor="ctr">
+            <a:spAutoFit/>
+          </a:bodyPr>
+          <a:lstStyle/>
+          <a:p>
+            <a:pPr marL="177800" indent="-177800">
+              <a:spcBef>
+                <a:spcPts val="600"/>
+              </a:spcBef>
+              <a:spcAft>
+                <a:spcPts val="200"/>
+              </a:spcAft>
+            </a:pPr>
+            <a:r>
+              <a:rPr sz="1200" i="1">
+                <a:solidFill>
+                  <a:srgbClr val="3D5466"/>
+                </a:solidFill>
+                <a:latin typeface="Arial"/>
+              </a:rPr>
+              <a:t>→  Wissen entsteht in der Spirale aus implizit und explizit – Sozialisation, Externalisierung, Kombination, Internalisierung.</a:t>
+            </a:r>
+          </a:p>
+          <a:p>
+            <a:pPr marL="190500" indent="-190500">
+              <a:spcBef>
+                <a:spcPts val="400"/>
+              </a:spcBef>
+              <a:spcAft>
+                <a:spcPts val="200"/>
+              </a:spcAft>
+            </a:pPr>
+            <a:r>
+              <a:rPr sz="1300">
+                <a:solidFill>
+                  <a:srgbClr val="3D5466"/>
+                </a:solidFill>
+                <a:latin typeface="Arial"/>
+              </a:rPr>
+              <a:t>▸  Implizites Erfahrungswissen wird durch Teilen explizit und wieder verinnerlicht.</a:t>
+            </a:r>
+          </a:p>
+          <a:p>
+            <a:pPr marL="190500" indent="-190500">
+              <a:spcBef>
+                <a:spcPts val="400"/>
+              </a:spcBef>
+              <a:spcAft>
+                <a:spcPts val="200"/>
+              </a:spcAft>
+            </a:pPr>
+            <a:r>
+              <a:rPr sz="1300">
+                <a:solidFill>
+                  <a:srgbClr val="3D5466"/>
+                </a:solidFill>
+                <a:latin typeface="Arial"/>
+              </a:rPr>
+              <a:t>▸  Communities of Practice machen das Team zur Lerngemeinschaft.</a:t>
+            </a:r>
+          </a:p>
+        </p:txBody>
+      </p:sp>
+      <p:sp>
+        <p:nvSpPr>
+          <p:cNvPr id="9" name="Rectangle 8"/>
           <p:cNvSpPr/>
           <p:nvPr/>
         </p:nvSpPr>
@@ -9707,7 +8804,7 @@
       </p:sp>
       <p:sp>
         <p:nvSpPr>
-          <p:cNvPr id="9" name="TextBox 8"/>
+          <p:cNvPr id="10" name="TextBox 9"/>
           <p:cNvSpPr txBox="1"/>
           <p:nvPr/>
         </p:nvSpPr>
@@ -9736,41 +8833,6 @@
                 <a:latin typeface="Consolas"/>
               </a:rPr>
               <a:t>FKB Campus  ·  M19</a:t>
-            </a:r>
-          </a:p>
-        </p:txBody>
-      </p:sp>
-      <p:sp>
-        <p:nvSpPr>
-          <p:cNvPr id="10" name="TextBox 9"/>
-          <p:cNvSpPr txBox="1"/>
-          <p:nvPr/>
-        </p:nvSpPr>
-        <p:spPr>
-          <a:xfrm>
-            <a:off x="7176211" y="6583680"/>
-            <a:ext cx="4326940" cy="256032"/>
-          </a:xfrm>
-          <a:prstGeom prst="rect">
-            <a:avLst/>
-          </a:prstGeom>
-          <a:noFill/>
-        </p:spPr>
-        <p:txBody>
-          <a:bodyPr wrap="none">
-            <a:spAutoFit/>
-          </a:bodyPr>
-          <a:lstStyle/>
-          <a:p>
-            <a:pPr algn="r"/>
-            <a:r>
-              <a:rPr sz="700">
-                <a:solidFill>
-                  <a:srgbClr val="A0B4D2"/>
-                </a:solidFill>
-                <a:latin typeface="Consolas"/>
-              </a:rPr>
-              <a:t>Schaubild</a:t>
             </a:r>
           </a:p>
         </p:txBody>
@@ -9808,7 +8870,7 @@
             <a:avLst/>
           </a:prstGeom>
           <a:solidFill>
-            <a:srgbClr val="EDEDF3"/>
+            <a:srgbClr val="FFFFFF"/>
           </a:solidFill>
           <a:ln>
             <a:noFill/>
@@ -9909,51 +8971,43 @@
                 </a:solidFill>
                 <a:latin typeface="Consolas"/>
               </a:rPr>
-              <a:t>M19  ·  INHALT</a:t>
-            </a:r>
-          </a:p>
-        </p:txBody>
-      </p:sp>
-      <p:sp>
-        <p:nvSpPr>
-          <p:cNvPr id="5" name="Rectangle 4"/>
-          <p:cNvSpPr/>
-          <p:nvPr/>
-        </p:nvSpPr>
-        <p:spPr>
-          <a:xfrm>
-            <a:off x="0" y="1234440"/>
-            <a:ext cx="12188952" cy="12700"/>
-          </a:xfrm>
-          <a:prstGeom prst="rect">
-            <a:avLst/>
-          </a:prstGeom>
-          <a:solidFill>
-            <a:srgbClr val="D8DFE4"/>
-          </a:solidFill>
-          <a:ln>
-            <a:noFill/>
-          </a:ln>
-        </p:spPr>
-        <p:style>
-          <a:lnRef idx="1">
-            <a:schemeClr val="accent1"/>
-          </a:lnRef>
-          <a:fillRef idx="3">
-            <a:schemeClr val="accent1"/>
-          </a:fillRef>
-          <a:effectRef idx="2">
-            <a:schemeClr val="accent1"/>
-          </a:effectRef>
-          <a:fontRef idx="minor">
-            <a:schemeClr val="lt1"/>
-          </a:fontRef>
-        </p:style>
-        <p:txBody>
-          <a:bodyPr rtlCol="0" anchor="ctr"/>
-          <a:lstStyle/>
-          <a:p>
-            <a:pPr algn="ctr"/>
+              <a:t>M19  ·  SCHAUBILD</a:t>
+            </a:r>
+          </a:p>
+        </p:txBody>
+      </p:sp>
+      <p:sp>
+        <p:nvSpPr>
+          <p:cNvPr id="5" name="TextBox 4"/>
+          <p:cNvSpPr txBox="1"/>
+          <p:nvPr/>
+        </p:nvSpPr>
+        <p:spPr>
+          <a:xfrm>
+            <a:off x="685800" y="502920"/>
+            <a:ext cx="10817352" cy="594360"/>
+          </a:xfrm>
+          <a:prstGeom prst="rect">
+            <a:avLst/>
+          </a:prstGeom>
+          <a:noFill/>
+        </p:spPr>
+        <p:txBody>
+          <a:bodyPr wrap="square">
+            <a:spAutoFit/>
+          </a:bodyPr>
+          <a:lstStyle/>
+          <a:p>
+            <a:pPr algn="l"/>
+            <a:r>
+              <a:rPr sz="2000" b="1" i="0">
+                <a:solidFill>
+                  <a:srgbClr val="1F2C56"/>
+                </a:solidFill>
+                <a:latin typeface="Arial"/>
+              </a:rPr>
+              <a:t>Das SECI-Modell der Wissensspirale</a:t>
+            </a:r>
           </a:p>
         </p:txBody>
       </p:sp>
@@ -9965,8 +9019,8 @@
         </p:nvSpPr>
         <p:spPr>
           <a:xfrm>
-            <a:off x="685800" y="502920"/>
-            <a:ext cx="36576" cy="658368"/>
+            <a:off x="685800" y="1143000"/>
+            <a:ext cx="10817352" cy="25400"/>
           </a:xfrm>
           <a:prstGeom prst="rect">
             <a:avLst/>
@@ -10000,200 +9054,33 @@
           </a:p>
         </p:txBody>
       </p:sp>
-      <p:sp>
-        <p:nvSpPr>
-          <p:cNvPr id="7" name="TextBox 6"/>
-          <p:cNvSpPr txBox="1"/>
-          <p:nvPr/>
-        </p:nvSpPr>
-        <p:spPr>
-          <a:xfrm>
-            <a:off x="813816" y="502920"/>
-            <a:ext cx="10634472" cy="685800"/>
-          </a:xfrm>
-          <a:prstGeom prst="rect">
-            <a:avLst/>
-          </a:prstGeom>
-          <a:noFill/>
-        </p:spPr>
-        <p:txBody>
-          <a:bodyPr wrap="square">
-            <a:spAutoFit/>
-          </a:bodyPr>
-          <a:lstStyle/>
-          <a:p>
-            <a:pPr algn="l"/>
-            <a:r>
-              <a:rPr sz="2400" b="1" i="0">
-                <a:solidFill>
-                  <a:srgbClr val="1F2C56"/>
-                </a:solidFill>
-                <a:latin typeface="Arial"/>
-              </a:rPr>
-              <a:t>Methode 1: Tandem-Kundenbesuch</a:t>
-            </a:r>
-          </a:p>
-        </p:txBody>
-      </p:sp>
-      <p:sp>
-        <p:nvSpPr>
-          <p:cNvPr id="8" name="TextBox 7"/>
-          <p:cNvSpPr txBox="1"/>
-          <p:nvPr/>
-        </p:nvSpPr>
-        <p:spPr>
-          <a:xfrm>
-            <a:off x="685800" y="1417320"/>
-            <a:ext cx="10817352" cy="4892040"/>
-          </a:xfrm>
-          <a:prstGeom prst="rect">
-            <a:avLst/>
-          </a:prstGeom>
-          <a:noFill/>
-        </p:spPr>
-        <p:txBody>
-          <a:bodyPr wrap="square">
-            <a:spAutoFit/>
-          </a:bodyPr>
-          <a:lstStyle/>
-          <a:p>
-            <a:pPr marL="190500" indent="-190500">
-              <a:spcBef>
-                <a:spcPts val="400"/>
-              </a:spcBef>
-              <a:spcAft>
-                <a:spcPts val="200"/>
-              </a:spcAft>
-            </a:pPr>
-            <a:r>
-              <a:rPr sz="1300">
-                <a:solidFill>
-                  <a:srgbClr val="3D5466"/>
-                </a:solidFill>
-                <a:latin typeface="Arial"/>
-              </a:rPr>
-              <a:t>▸  Was: Zwei Berater besuchen gemeinsam einen Kunden – einer führt, einer beobachtet.</a:t>
-            </a:r>
-          </a:p>
-          <a:p>
-            <a:pPr marL="190500" indent="-190500">
-              <a:spcBef>
-                <a:spcPts val="400"/>
-              </a:spcBef>
-              <a:spcAft>
-                <a:spcPts val="200"/>
-              </a:spcAft>
-            </a:pPr>
-            <a:r>
-              <a:rPr sz="1300">
-                <a:solidFill>
-                  <a:srgbClr val="3D5466"/>
-                </a:solidFill>
-                <a:latin typeface="Arial"/>
-              </a:rPr>
-              <a:t>▸  Wann: Bei speziellem Branchenwissen oder neuem Kundensegment.</a:t>
-            </a:r>
-          </a:p>
-          <a:p>
-            <a:pPr marL="190500" indent="-190500">
-              <a:spcBef>
-                <a:spcPts val="400"/>
-              </a:spcBef>
-              <a:spcAft>
-                <a:spcPts val="200"/>
-              </a:spcAft>
-            </a:pPr>
-            <a:r>
-              <a:rPr sz="1300">
-                <a:solidFill>
-                  <a:srgbClr val="3D5466"/>
-                </a:solidFill>
-                <a:latin typeface="Arial"/>
-              </a:rPr>
-              <a:t>▸  Ablauf:</a:t>
-            </a:r>
-          </a:p>
-          <a:p>
-            <a:pPr marL="190500" indent="-190500">
-              <a:spcBef>
-                <a:spcPts val="400"/>
-              </a:spcBef>
-              <a:spcAft>
-                <a:spcPts val="200"/>
-              </a:spcAft>
-            </a:pPr>
-            <a:r>
-              <a:rPr sz="1300">
-                <a:solidFill>
-                  <a:srgbClr val="3D5466"/>
-                </a:solidFill>
-                <a:latin typeface="Arial"/>
-              </a:rPr>
-              <a:t>▸  Kurze Vorbesprechung (10 Min.): Wer übernimmt welche Rolle? Welche Beobachtungsaufgabe hat der Gast?</a:t>
-            </a:r>
-          </a:p>
-          <a:p>
-            <a:pPr marL="190500" indent="-190500">
-              <a:spcBef>
-                <a:spcPts val="400"/>
-              </a:spcBef>
-              <a:spcAft>
-                <a:spcPts val="200"/>
-              </a:spcAft>
-            </a:pPr>
-            <a:r>
-              <a:rPr sz="1300">
-                <a:solidFill>
-                  <a:srgbClr val="3D5466"/>
-                </a:solidFill>
-                <a:latin typeface="Arial"/>
-              </a:rPr>
-              <a:t>▸  Kundenbesuch (gemeinsam, einer führt)</a:t>
-            </a:r>
-          </a:p>
-          <a:p>
-            <a:pPr marL="190500" indent="-190500">
-              <a:spcBef>
-                <a:spcPts val="400"/>
-              </a:spcBef>
-              <a:spcAft>
-                <a:spcPts val="200"/>
-              </a:spcAft>
-            </a:pPr>
-            <a:r>
-              <a:rPr sz="1300">
-                <a:solidFill>
-                  <a:srgbClr val="3D5466"/>
-                </a:solidFill>
-                <a:latin typeface="Arial"/>
-              </a:rPr>
-              <a:t>▸  Nachbesprechung (15 Min.): Beobachter gibt strukturiertes Feedback; Berater teilt Hintergrundwissen</a:t>
-            </a:r>
-          </a:p>
-          <a:p>
-            <a:pPr marL="190500" indent="-190500">
-              <a:spcBef>
-                <a:spcPts val="400"/>
-              </a:spcBef>
-              <a:spcAft>
-                <a:spcPts val="200"/>
-              </a:spcAft>
-            </a:pPr>
-            <a:r>
-              <a:rPr sz="1300">
-                <a:solidFill>
-                  <a:srgbClr val="3D5466"/>
-                </a:solidFill>
-                <a:latin typeface="Arial"/>
-              </a:rPr>
-              <a:t>▸  Qualitätsfaktor: Der Beobachter hat vorab eine konkrete Beobachtungsaufgabe (z.B. „achte auf, wie der Kollege das Thema Nachfolge einführt").</a:t>
-            </a:r>
-          </a:p>
-        </p:txBody>
-      </p:sp>
-      <p:sp>
-        <p:nvSpPr>
-          <p:cNvPr id="9" name="Rectangle 8"/>
+      <p:pic>
+        <p:nvPicPr>
+          <p:cNvPr id="7" name="Picture 6" descr="image.png"/>
+          <p:cNvPicPr>
+            <a:picLocks noChangeAspect="1"/>
+          </p:cNvPicPr>
+          <p:nvPr/>
+        </p:nvPicPr>
+        <p:blipFill>
+          <a:blip r:embed="rId2"/>
+          <a:stretch>
+            <a:fillRect/>
+          </a:stretch>
+        </p:blipFill>
+        <p:spPr>
+          <a:xfrm>
+            <a:off x="2554863" y="1325880"/>
+            <a:ext cx="7079225" cy="4937760"/>
+          </a:xfrm>
+          <a:prstGeom prst="rect">
+            <a:avLst/>
+          </a:prstGeom>
+        </p:spPr>
+      </p:pic>
+      <p:sp>
+        <p:nvSpPr>
+          <p:cNvPr id="8" name="Rectangle 7"/>
           <p:cNvSpPr/>
           <p:nvPr/>
         </p:nvSpPr>
@@ -10236,7 +9123,7 @@
       </p:sp>
       <p:sp>
         <p:nvSpPr>
-          <p:cNvPr id="10" name="TextBox 9"/>
+          <p:cNvPr id="9" name="TextBox 8"/>
           <p:cNvSpPr txBox="1"/>
           <p:nvPr/>
         </p:nvSpPr>
@@ -10265,6 +9152,41 @@
                 <a:latin typeface="Consolas"/>
               </a:rPr>
               <a:t>FKB Campus  ·  M19</a:t>
+            </a:r>
+          </a:p>
+        </p:txBody>
+      </p:sp>
+      <p:sp>
+        <p:nvSpPr>
+          <p:cNvPr id="10" name="TextBox 9"/>
+          <p:cNvSpPr txBox="1"/>
+          <p:nvPr/>
+        </p:nvSpPr>
+        <p:spPr>
+          <a:xfrm>
+            <a:off x="7176211" y="6583680"/>
+            <a:ext cx="4326940" cy="256032"/>
+          </a:xfrm>
+          <a:prstGeom prst="rect">
+            <a:avLst/>
+          </a:prstGeom>
+          <a:noFill/>
+        </p:spPr>
+        <p:txBody>
+          <a:bodyPr wrap="none">
+            <a:spAutoFit/>
+          </a:bodyPr>
+          <a:lstStyle/>
+          <a:p>
+            <a:pPr algn="r"/>
+            <a:r>
+              <a:rPr sz="700">
+                <a:solidFill>
+                  <a:srgbClr val="A0B4D2"/>
+                </a:solidFill>
+                <a:latin typeface="Consolas"/>
+              </a:rPr>
+              <a:t>Schaubild</a:t>
             </a:r>
           </a:p>
         </p:txBody>
@@ -10524,7 +9446,7 @@
                 </a:solidFill>
                 <a:latin typeface="Arial"/>
               </a:rPr>
-              <a:t>Methode 2: Strukturierte Fallbesprechung</a:t>
+              <a:t>Wie Erfahrung zu Wissen wird: Kolbs Lernzyklus</a:t>
             </a:r>
           </a:p>
         </p:txBody>
@@ -10550,6 +9472,25 @@
             <a:spAutoFit/>
           </a:bodyPr>
           <a:lstStyle/>
+          <a:p>
+            <a:pPr marL="177800" indent="-177800">
+              <a:spcBef>
+                <a:spcPts val="600"/>
+              </a:spcBef>
+              <a:spcAft>
+                <a:spcPts val="200"/>
+              </a:spcAft>
+            </a:pPr>
+            <a:r>
+              <a:rPr sz="1200" i="1">
+                <a:solidFill>
+                  <a:srgbClr val="3D5466"/>
+                </a:solidFill>
+                <a:latin typeface="Arial"/>
+              </a:rPr>
+              <a:t>→  Erfahrung wird erst durch Reflexion zu Wissen – wer nur erlebt, ohne zu reflektieren, lernt nicht.</a:t>
+            </a:r>
+          </a:p>
           <a:p>
             <a:pPr marL="190500" indent="-190500">
               <a:spcBef>
@@ -10566,7 +9507,7 @@
                 </a:solidFill>
                 <a:latin typeface="Arial"/>
               </a:rPr>
-              <a:t>▸  Was: 45-minütiges Team-Format, in dem ein Berater einen aktuellen Fall vorstellt und das Team kollektiv reflektiert.</a:t>
+              <a:t>▸  Erfahren, beobachten/reflektieren, verstehen, ausprobieren.</a:t>
             </a:r>
           </a:p>
           <a:p>
@@ -10585,26 +9526,7 @@
                 </a:solidFill>
                 <a:latin typeface="Arial"/>
               </a:rPr>
-              <a:t>▸  Struktur:</a:t>
-            </a:r>
-          </a:p>
-          <a:p>
-            <a:pPr marL="190500" indent="-190500">
-              <a:spcBef>
-                <a:spcPts val="400"/>
-              </a:spcBef>
-              <a:spcAft>
-                <a:spcPts val="200"/>
-              </a:spcAft>
-            </a:pPr>
-            <a:r>
-              <a:rPr sz="1300">
-                <a:solidFill>
-                  <a:srgbClr val="3D5466"/>
-                </a:solidFill>
-                <a:latin typeface="Arial"/>
-              </a:rPr>
-              <a:t>▸  Qualitätsfaktor: Die stille Reflexion vor der Diskussion verhindert Gruppendenken (Anchoring-Bias).</a:t>
+              <a:t>▸  Der Zyklus ist der Motor jeder wirksamen Transfermethode.</a:t>
             </a:r>
           </a:p>
         </p:txBody>
@@ -10720,7 +9642,7 @@
             <a:avLst/>
           </a:prstGeom>
           <a:solidFill>
-            <a:srgbClr val="EDEDF3"/>
+            <a:srgbClr val="FFFFFF"/>
           </a:solidFill>
           <a:ln>
             <a:noFill/>
@@ -10821,51 +9743,43 @@
                 </a:solidFill>
                 <a:latin typeface="Consolas"/>
               </a:rPr>
-              <a:t>M19  ·  INHALT</a:t>
-            </a:r>
-          </a:p>
-        </p:txBody>
-      </p:sp>
-      <p:sp>
-        <p:nvSpPr>
-          <p:cNvPr id="5" name="Rectangle 4"/>
-          <p:cNvSpPr/>
-          <p:nvPr/>
-        </p:nvSpPr>
-        <p:spPr>
-          <a:xfrm>
-            <a:off x="0" y="1234440"/>
-            <a:ext cx="12188952" cy="12700"/>
-          </a:xfrm>
-          <a:prstGeom prst="rect">
-            <a:avLst/>
-          </a:prstGeom>
-          <a:solidFill>
-            <a:srgbClr val="D8DFE4"/>
-          </a:solidFill>
-          <a:ln>
-            <a:noFill/>
-          </a:ln>
-        </p:spPr>
-        <p:style>
-          <a:lnRef idx="1">
-            <a:schemeClr val="accent1"/>
-          </a:lnRef>
-          <a:fillRef idx="3">
-            <a:schemeClr val="accent1"/>
-          </a:fillRef>
-          <a:effectRef idx="2">
-            <a:schemeClr val="accent1"/>
-          </a:effectRef>
-          <a:fontRef idx="minor">
-            <a:schemeClr val="lt1"/>
-          </a:fontRef>
-        </p:style>
-        <p:txBody>
-          <a:bodyPr rtlCol="0" anchor="ctr"/>
-          <a:lstStyle/>
-          <a:p>
-            <a:pPr algn="ctr"/>
+              <a:t>M19  ·  SCHAUBILD</a:t>
+            </a:r>
+          </a:p>
+        </p:txBody>
+      </p:sp>
+      <p:sp>
+        <p:nvSpPr>
+          <p:cNvPr id="5" name="TextBox 4"/>
+          <p:cNvSpPr txBox="1"/>
+          <p:nvPr/>
+        </p:nvSpPr>
+        <p:spPr>
+          <a:xfrm>
+            <a:off x="685800" y="502920"/>
+            <a:ext cx="10817352" cy="594360"/>
+          </a:xfrm>
+          <a:prstGeom prst="rect">
+            <a:avLst/>
+          </a:prstGeom>
+          <a:noFill/>
+        </p:spPr>
+        <p:txBody>
+          <a:bodyPr wrap="square">
+            <a:spAutoFit/>
+          </a:bodyPr>
+          <a:lstStyle/>
+          <a:p>
+            <a:pPr algn="l"/>
+            <a:r>
+              <a:rPr sz="2000" b="1" i="0">
+                <a:solidFill>
+                  <a:srgbClr val="1F2C56"/>
+                </a:solidFill>
+                <a:latin typeface="Arial"/>
+              </a:rPr>
+              <a:t>Kolbs Lernzyklus</a:t>
+            </a:r>
           </a:p>
         </p:txBody>
       </p:sp>
@@ -10877,8 +9791,8 @@
         </p:nvSpPr>
         <p:spPr>
           <a:xfrm>
-            <a:off x="685800" y="502920"/>
-            <a:ext cx="36576" cy="658368"/>
+            <a:off x="685800" y="1143000"/>
+            <a:ext cx="10817352" cy="25400"/>
           </a:xfrm>
           <a:prstGeom prst="rect">
             <a:avLst/>
@@ -10912,143 +9826,33 @@
           </a:p>
         </p:txBody>
       </p:sp>
-      <p:sp>
-        <p:nvSpPr>
-          <p:cNvPr id="7" name="TextBox 6"/>
-          <p:cNvSpPr txBox="1"/>
-          <p:nvPr/>
-        </p:nvSpPr>
-        <p:spPr>
-          <a:xfrm>
-            <a:off x="813816" y="502920"/>
-            <a:ext cx="10634472" cy="685800"/>
-          </a:xfrm>
-          <a:prstGeom prst="rect">
-            <a:avLst/>
-          </a:prstGeom>
-          <a:noFill/>
-        </p:spPr>
-        <p:txBody>
-          <a:bodyPr wrap="square">
-            <a:spAutoFit/>
-          </a:bodyPr>
-          <a:lstStyle/>
-          <a:p>
-            <a:pPr algn="l"/>
-            <a:r>
-              <a:rPr sz="2400" b="1" i="0">
-                <a:solidFill>
-                  <a:srgbClr val="1F2C56"/>
-                </a:solidFill>
-                <a:latin typeface="Arial"/>
-              </a:rPr>
-              <a:t>Methode 3: Wissenslandkarte</a:t>
-            </a:r>
-          </a:p>
-        </p:txBody>
-      </p:sp>
-      <p:sp>
-        <p:nvSpPr>
-          <p:cNvPr id="8" name="TextBox 7"/>
-          <p:cNvSpPr txBox="1"/>
-          <p:nvPr/>
-        </p:nvSpPr>
-        <p:spPr>
-          <a:xfrm>
-            <a:off x="685800" y="1417320"/>
-            <a:ext cx="10817352" cy="4892040"/>
-          </a:xfrm>
-          <a:prstGeom prst="rect">
-            <a:avLst/>
-          </a:prstGeom>
-          <a:noFill/>
-        </p:spPr>
-        <p:txBody>
-          <a:bodyPr wrap="square" anchor="ctr">
-            <a:spAutoFit/>
-          </a:bodyPr>
-          <a:lstStyle/>
-          <a:p>
-            <a:pPr marL="190500" indent="-190500">
-              <a:spcBef>
-                <a:spcPts val="400"/>
-              </a:spcBef>
-              <a:spcAft>
-                <a:spcPts val="200"/>
-              </a:spcAft>
-            </a:pPr>
-            <a:r>
-              <a:rPr sz="1300">
-                <a:solidFill>
-                  <a:srgbClr val="3D5466"/>
-                </a:solidFill>
-                <a:latin typeface="Arial"/>
-              </a:rPr>
-              <a:t>▸  Was: Visualisierung, wer im Team über welches Spezialwissen verfügt.</a:t>
-            </a:r>
-          </a:p>
-          <a:p>
-            <a:pPr marL="190500" indent="-190500">
-              <a:spcBef>
-                <a:spcPts val="400"/>
-              </a:spcBef>
-              <a:spcAft>
-                <a:spcPts val="200"/>
-              </a:spcAft>
-            </a:pPr>
-            <a:r>
-              <a:rPr sz="1300">
-                <a:solidFill>
-                  <a:srgbClr val="3D5466"/>
-                </a:solidFill>
-                <a:latin typeface="Arial"/>
-              </a:rPr>
-              <a:t>▸  Wann: Einmalig erstellen, halbjährlich aktualisieren.</a:t>
-            </a:r>
-          </a:p>
-          <a:p>
-            <a:pPr marL="190500" indent="-190500">
-              <a:spcBef>
-                <a:spcPts val="400"/>
-              </a:spcBef>
-              <a:spcAft>
-                <a:spcPts val="200"/>
-              </a:spcAft>
-            </a:pPr>
-            <a:r>
-              <a:rPr sz="1300">
-                <a:solidFill>
-                  <a:srgbClr val="3D5466"/>
-                </a:solidFill>
-                <a:latin typeface="Arial"/>
-              </a:rPr>
-              <a:t>▸  Inhalt: Pro Berater: Branchenexpertise, Sonderwissen (z.B. Nachfolge, Landwirtschaft, Heilberufe), bevorzugte Methoden, Kontaktnetzwerk.</a:t>
-            </a:r>
-          </a:p>
-          <a:p>
-            <a:pPr marL="190500" indent="-190500">
-              <a:spcBef>
-                <a:spcPts val="400"/>
-              </a:spcBef>
-              <a:spcAft>
-                <a:spcPts val="200"/>
-              </a:spcAft>
-            </a:pPr>
-            <a:r>
-              <a:rPr sz="1300">
-                <a:solidFill>
-                  <a:srgbClr val="3D5466"/>
-                </a:solidFill>
-                <a:latin typeface="Arial"/>
-              </a:rPr>
-              <a:t>▸  Nutzen: Neue Berater wissen sofort, wen sie bei welchem Thema fragen sollen. Der Teamleiter erkennt Wissensinseln und -lücken.</a:t>
-            </a:r>
-          </a:p>
-        </p:txBody>
-      </p:sp>
-      <p:sp>
-        <p:nvSpPr>
-          <p:cNvPr id="9" name="Rectangle 8"/>
+      <p:pic>
+        <p:nvPicPr>
+          <p:cNvPr id="7" name="Picture 6" descr="image.png"/>
+          <p:cNvPicPr>
+            <a:picLocks noChangeAspect="1"/>
+          </p:cNvPicPr>
+          <p:nvPr/>
+        </p:nvPicPr>
+        <p:blipFill>
+          <a:blip r:embed="rId2"/>
+          <a:stretch>
+            <a:fillRect/>
+          </a:stretch>
+        </p:blipFill>
+        <p:spPr>
+          <a:xfrm>
+            <a:off x="2554863" y="1325880"/>
+            <a:ext cx="7079225" cy="4937760"/>
+          </a:xfrm>
+          <a:prstGeom prst="rect">
+            <a:avLst/>
+          </a:prstGeom>
+        </p:spPr>
+      </p:pic>
+      <p:sp>
+        <p:nvSpPr>
+          <p:cNvPr id="8" name="Rectangle 7"/>
           <p:cNvSpPr/>
           <p:nvPr/>
         </p:nvSpPr>
@@ -11091,7 +9895,7 @@
       </p:sp>
       <p:sp>
         <p:nvSpPr>
-          <p:cNvPr id="10" name="TextBox 9"/>
+          <p:cNvPr id="9" name="TextBox 8"/>
           <p:cNvSpPr txBox="1"/>
           <p:nvPr/>
         </p:nvSpPr>
@@ -11120,6 +9924,41 @@
                 <a:latin typeface="Consolas"/>
               </a:rPr>
               <a:t>FKB Campus  ·  M19</a:t>
+            </a:r>
+          </a:p>
+        </p:txBody>
+      </p:sp>
+      <p:sp>
+        <p:nvSpPr>
+          <p:cNvPr id="10" name="TextBox 9"/>
+          <p:cNvSpPr txBox="1"/>
+          <p:nvPr/>
+        </p:nvSpPr>
+        <p:spPr>
+          <a:xfrm>
+            <a:off x="7176211" y="6583680"/>
+            <a:ext cx="4326940" cy="256032"/>
+          </a:xfrm>
+          <a:prstGeom prst="rect">
+            <a:avLst/>
+          </a:prstGeom>
+          <a:noFill/>
+        </p:spPr>
+        <p:txBody>
+          <a:bodyPr wrap="none">
+            <a:spAutoFit/>
+          </a:bodyPr>
+          <a:lstStyle/>
+          <a:p>
+            <a:pPr algn="r"/>
+            <a:r>
+              <a:rPr sz="700">
+                <a:solidFill>
+                  <a:srgbClr val="A0B4D2"/>
+                </a:solidFill>
+                <a:latin typeface="Consolas"/>
+              </a:rPr>
+              <a:t>Schaubild</a:t>
             </a:r>
           </a:p>
         </p:txBody>
